--- a/docs/entregas/Apresentacao_QuatroNorte.pptx
+++ b/docs/entregas/Apresentacao_QuatroNorte.pptx
@@ -3512,7 +3512,7 @@
                 </a:solidFill>
                 <a:latin typeface="Calibri"/>
               </a:rPr>
-              <a:t>Universo derivavel da fonte unica (~25 variaveis). Variaveis de contrato/mao de obra/pecas exigiriam outras tabelas e ficam fora de escopo.</a:t>
+              <a:t>Universo derivavel da fonte unica (29 colunas), ja incluindo contrato. Mao de obra, pecas e tipo_contrato (RENTAL/LEASE) exigiriam outras tabelas.</a:t>
             </a:r>
           </a:p>
         </p:txBody>
@@ -3539,14 +3539,14 @@
                 <a:gridCol w="2697480"/>
                 <a:gridCol w="2697480"/>
               </a:tblGrid>
-              <a:tr h="298704">
-                <a:tc>
-                  <a:txBody>
-                    <a:bodyPr/>
-                    <a:lstStyle/>
-                    <a:p>
-                      <a:r>
-                        <a:rPr sz="900" b="1">
+              <a:tr h="235818">
+                <a:tc>
+                  <a:txBody>
+                    <a:bodyPr/>
+                    <a:lstStyle/>
+                    <a:p>
+                      <a:r>
+                        <a:rPr sz="800" b="1">
                           <a:solidFill>
                             <a:srgbClr val="FFFFFF"/>
                           </a:solidFill>
@@ -3567,7 +3567,7 @@
                     <a:lstStyle/>
                     <a:p>
                       <a:r>
-                        <a:rPr sz="900" b="1">
+                        <a:rPr sz="800" b="1">
                           <a:solidFill>
                             <a:srgbClr val="FFFFFF"/>
                           </a:solidFill>
@@ -3583,14 +3583,14 @@
                   </a:tcPr>
                 </a:tc>
               </a:tr>
-              <a:tr h="298704">
-                <a:tc>
-                  <a:txBody>
-                    <a:bodyPr/>
-                    <a:lstStyle/>
-                    <a:p>
-                      <a:r>
-                        <a:rPr sz="900">
+              <a:tr h="235818">
+                <a:tc>
+                  <a:txBody>
+                    <a:bodyPr/>
+                    <a:lstStyle/>
+                    <a:p>
+                      <a:r>
+                        <a:rPr sz="800">
                           <a:solidFill>
                             <a:srgbClr val="1C2433"/>
                           </a:solidFill>
@@ -3611,7 +3611,7 @@
                     <a:lstStyle/>
                     <a:p>
                       <a:r>
-                        <a:rPr sz="900">
+                        <a:rPr sz="800">
                           <a:solidFill>
                             <a:srgbClr val="1C2433"/>
                           </a:solidFill>
@@ -3627,14 +3627,14 @@
                   </a:tcPr>
                 </a:tc>
               </a:tr>
-              <a:tr h="298704">
-                <a:tc>
-                  <a:txBody>
-                    <a:bodyPr/>
-                    <a:lstStyle/>
-                    <a:p>
-                      <a:r>
-                        <a:rPr sz="900">
+              <a:tr h="235818">
+                <a:tc>
+                  <a:txBody>
+                    <a:bodyPr/>
+                    <a:lstStyle/>
+                    <a:p>
+                      <a:r>
+                        <a:rPr sz="800">
                           <a:solidFill>
                             <a:srgbClr val="1C2433"/>
                           </a:solidFill>
@@ -3655,7 +3655,7 @@
                     <a:lstStyle/>
                     <a:p>
                       <a:r>
-                        <a:rPr sz="900">
+                        <a:rPr sz="800">
                           <a:solidFill>
                             <a:srgbClr val="1C2433"/>
                           </a:solidFill>
@@ -3671,14 +3671,14 @@
                   </a:tcPr>
                 </a:tc>
               </a:tr>
-              <a:tr h="298704">
-                <a:tc>
-                  <a:txBody>
-                    <a:bodyPr/>
-                    <a:lstStyle/>
-                    <a:p>
-                      <a:r>
-                        <a:rPr sz="900">
+              <a:tr h="235818">
+                <a:tc>
+                  <a:txBody>
+                    <a:bodyPr/>
+                    <a:lstStyle/>
+                    <a:p>
+                      <a:r>
+                        <a:rPr sz="800">
                           <a:solidFill>
                             <a:srgbClr val="1C2433"/>
                           </a:solidFill>
@@ -3699,7 +3699,7 @@
                     <a:lstStyle/>
                     <a:p>
                       <a:r>
-                        <a:rPr sz="900">
+                        <a:rPr sz="800">
                           <a:solidFill>
                             <a:srgbClr val="1C2433"/>
                           </a:solidFill>
@@ -3715,14 +3715,14 @@
                   </a:tcPr>
                 </a:tc>
               </a:tr>
-              <a:tr h="298704">
-                <a:tc>
-                  <a:txBody>
-                    <a:bodyPr/>
-                    <a:lstStyle/>
-                    <a:p>
-                      <a:r>
-                        <a:rPr sz="900">
+              <a:tr h="235818">
+                <a:tc>
+                  <a:txBody>
+                    <a:bodyPr/>
+                    <a:lstStyle/>
+                    <a:p>
+                      <a:r>
+                        <a:rPr sz="800">
                           <a:solidFill>
                             <a:srgbClr val="1C2433"/>
                           </a:solidFill>
@@ -3743,7 +3743,7 @@
                     <a:lstStyle/>
                     <a:p>
                       <a:r>
-                        <a:rPr sz="900">
+                        <a:rPr sz="800">
                           <a:solidFill>
                             <a:srgbClr val="1C2433"/>
                           </a:solidFill>
@@ -3759,14 +3759,14 @@
                   </a:tcPr>
                 </a:tc>
               </a:tr>
-              <a:tr h="298704">
-                <a:tc>
-                  <a:txBody>
-                    <a:bodyPr/>
-                    <a:lstStyle/>
-                    <a:p>
-                      <a:r>
-                        <a:rPr sz="900">
+              <a:tr h="235818">
+                <a:tc>
+                  <a:txBody>
+                    <a:bodyPr/>
+                    <a:lstStyle/>
+                    <a:p>
+                      <a:r>
+                        <a:rPr sz="800">
                           <a:solidFill>
                             <a:srgbClr val="1C2433"/>
                           </a:solidFill>
@@ -3787,7 +3787,7 @@
                     <a:lstStyle/>
                     <a:p>
                       <a:r>
-                        <a:rPr sz="900">
+                        <a:rPr sz="800">
                           <a:solidFill>
                             <a:srgbClr val="1C2433"/>
                           </a:solidFill>
@@ -3803,14 +3803,14 @@
                   </a:tcPr>
                 </a:tc>
               </a:tr>
-              <a:tr h="298704">
-                <a:tc>
-                  <a:txBody>
-                    <a:bodyPr/>
-                    <a:lstStyle/>
-                    <a:p>
-                      <a:r>
-                        <a:rPr sz="900">
+              <a:tr h="235818">
+                <a:tc>
+                  <a:txBody>
+                    <a:bodyPr/>
+                    <a:lstStyle/>
+                    <a:p>
+                      <a:r>
+                        <a:rPr sz="800">
                           <a:solidFill>
                             <a:srgbClr val="1C2433"/>
                           </a:solidFill>
@@ -3831,7 +3831,7 @@
                     <a:lstStyle/>
                     <a:p>
                       <a:r>
-                        <a:rPr sz="900">
+                        <a:rPr sz="800">
                           <a:solidFill>
                             <a:srgbClr val="1C2433"/>
                           </a:solidFill>
@@ -3847,14 +3847,14 @@
                   </a:tcPr>
                 </a:tc>
               </a:tr>
-              <a:tr h="298704">
-                <a:tc>
-                  <a:txBody>
-                    <a:bodyPr/>
-                    <a:lstStyle/>
-                    <a:p>
-                      <a:r>
-                        <a:rPr sz="900">
+              <a:tr h="235818">
+                <a:tc>
+                  <a:txBody>
+                    <a:bodyPr/>
+                    <a:lstStyle/>
+                    <a:p>
+                      <a:r>
+                        <a:rPr sz="800">
                           <a:solidFill>
                             <a:srgbClr val="1C2433"/>
                           </a:solidFill>
@@ -3875,7 +3875,7 @@
                     <a:lstStyle/>
                     <a:p>
                       <a:r>
-                        <a:rPr sz="900">
+                        <a:rPr sz="800">
                           <a:solidFill>
                             <a:srgbClr val="1C2433"/>
                           </a:solidFill>
@@ -3891,14 +3891,14 @@
                   </a:tcPr>
                 </a:tc>
               </a:tr>
-              <a:tr h="298704">
-                <a:tc>
-                  <a:txBody>
-                    <a:bodyPr/>
-                    <a:lstStyle/>
-                    <a:p>
-                      <a:r>
-                        <a:rPr sz="900">
+              <a:tr h="235818">
+                <a:tc>
+                  <a:txBody>
+                    <a:bodyPr/>
+                    <a:lstStyle/>
+                    <a:p>
+                      <a:r>
+                        <a:rPr sz="800">
                           <a:solidFill>
                             <a:srgbClr val="1C2433"/>
                           </a:solidFill>
@@ -3919,7 +3919,7 @@
                     <a:lstStyle/>
                     <a:p>
                       <a:r>
-                        <a:rPr sz="900">
+                        <a:rPr sz="800">
                           <a:solidFill>
                             <a:srgbClr val="1C2433"/>
                           </a:solidFill>
@@ -3935,14 +3935,14 @@
                   </a:tcPr>
                 </a:tc>
               </a:tr>
-              <a:tr h="298704">
-                <a:tc>
-                  <a:txBody>
-                    <a:bodyPr/>
-                    <a:lstStyle/>
-                    <a:p>
-                      <a:r>
-                        <a:rPr sz="900">
+              <a:tr h="235818">
+                <a:tc>
+                  <a:txBody>
+                    <a:bodyPr/>
+                    <a:lstStyle/>
+                    <a:p>
+                      <a:r>
+                        <a:rPr sz="800">
                           <a:solidFill>
                             <a:srgbClr val="1C2433"/>
                           </a:solidFill>
@@ -3963,7 +3963,7 @@
                     <a:lstStyle/>
                     <a:p>
                       <a:r>
-                        <a:rPr sz="900">
+                        <a:rPr sz="800">
                           <a:solidFill>
                             <a:srgbClr val="1C2433"/>
                           </a:solidFill>
@@ -3979,14 +3979,14 @@
                   </a:tcPr>
                 </a:tc>
               </a:tr>
-              <a:tr h="298704">
-                <a:tc>
-                  <a:txBody>
-                    <a:bodyPr/>
-                    <a:lstStyle/>
-                    <a:p>
-                      <a:r>
-                        <a:rPr sz="900">
+              <a:tr h="235818">
+                <a:tc>
+                  <a:txBody>
+                    <a:bodyPr/>
+                    <a:lstStyle/>
+                    <a:p>
+                      <a:r>
+                        <a:rPr sz="800">
                           <a:solidFill>
                             <a:srgbClr val="1C2433"/>
                           </a:solidFill>
@@ -4007,7 +4007,7 @@
                     <a:lstStyle/>
                     <a:p>
                       <a:r>
-                        <a:rPr sz="900">
+                        <a:rPr sz="800">
                           <a:solidFill>
                             <a:srgbClr val="1C2433"/>
                           </a:solidFill>
@@ -4023,14 +4023,14 @@
                   </a:tcPr>
                 </a:tc>
               </a:tr>
-              <a:tr h="298704">
-                <a:tc>
-                  <a:txBody>
-                    <a:bodyPr/>
-                    <a:lstStyle/>
-                    <a:p>
-                      <a:r>
-                        <a:rPr sz="900">
+              <a:tr h="235818">
+                <a:tc>
+                  <a:txBody>
+                    <a:bodyPr/>
+                    <a:lstStyle/>
+                    <a:p>
+                      <a:r>
+                        <a:rPr sz="800">
                           <a:solidFill>
                             <a:srgbClr val="1C2433"/>
                           </a:solidFill>
@@ -4051,7 +4051,7 @@
                     <a:lstStyle/>
                     <a:p>
                       <a:r>
-                        <a:rPr sz="900">
+                        <a:rPr sz="800">
                           <a:solidFill>
                             <a:srgbClr val="1C2433"/>
                           </a:solidFill>
@@ -4067,14 +4067,14 @@
                   </a:tcPr>
                 </a:tc>
               </a:tr>
-              <a:tr h="298704">
-                <a:tc>
-                  <a:txBody>
-                    <a:bodyPr/>
-                    <a:lstStyle/>
-                    <a:p>
-                      <a:r>
-                        <a:rPr sz="900">
+              <a:tr h="235818">
+                <a:tc>
+                  <a:txBody>
+                    <a:bodyPr/>
+                    <a:lstStyle/>
+                    <a:p>
+                      <a:r>
+                        <a:rPr sz="800">
                           <a:solidFill>
                             <a:srgbClr val="1C2433"/>
                           </a:solidFill>
@@ -4095,7 +4095,7 @@
                     <a:lstStyle/>
                     <a:p>
                       <a:r>
-                        <a:rPr sz="900">
+                        <a:rPr sz="800">
                           <a:solidFill>
                             <a:srgbClr val="1C2433"/>
                           </a:solidFill>
@@ -4111,14 +4111,14 @@
                   </a:tcPr>
                 </a:tc>
               </a:tr>
-              <a:tr h="298704">
-                <a:tc>
-                  <a:txBody>
-                    <a:bodyPr/>
-                    <a:lstStyle/>
-                    <a:p>
-                      <a:r>
-                        <a:rPr sz="900">
+              <a:tr h="235818">
+                <a:tc>
+                  <a:txBody>
+                    <a:bodyPr/>
+                    <a:lstStyle/>
+                    <a:p>
+                      <a:r>
+                        <a:rPr sz="800">
                           <a:solidFill>
                             <a:srgbClr val="1C2433"/>
                           </a:solidFill>
@@ -4139,7 +4139,7 @@
                     <a:lstStyle/>
                     <a:p>
                       <a:r>
-                        <a:rPr sz="900">
+                        <a:rPr sz="800">
                           <a:solidFill>
                             <a:srgbClr val="1C2433"/>
                           </a:solidFill>
@@ -4155,14 +4155,14 @@
                   </a:tcPr>
                 </a:tc>
               </a:tr>
-              <a:tr h="298704">
-                <a:tc>
-                  <a:txBody>
-                    <a:bodyPr/>
-                    <a:lstStyle/>
-                    <a:p>
-                      <a:r>
-                        <a:rPr sz="900">
+              <a:tr h="235818">
+                <a:tc>
+                  <a:txBody>
+                    <a:bodyPr/>
+                    <a:lstStyle/>
+                    <a:p>
+                      <a:r>
+                        <a:rPr sz="800">
                           <a:solidFill>
                             <a:srgbClr val="1C2433"/>
                           </a:solidFill>
@@ -4183,12 +4183,188 @@
                     <a:lstStyle/>
                     <a:p>
                       <a:r>
-                        <a:rPr sz="900">
+                        <a:rPr sz="800">
                           <a:solidFill>
                             <a:srgbClr val="1C2433"/>
                           </a:solidFill>
                         </a:rPr>
                         <a:t>ativo (quant.)</a:t>
+                      </a:r>
+                    </a:p>
+                  </a:txBody>
+                  <a:tcPr>
+                    <a:solidFill>
+                      <a:srgbClr val="EEEADE"/>
+                    </a:solidFill>
+                  </a:tcPr>
+                </a:tc>
+              </a:tr>
+              <a:tr h="235818">
+                <a:tc>
+                  <a:txBody>
+                    <a:bodyPr/>
+                    <a:lstStyle/>
+                    <a:p>
+                      <a:r>
+                        <a:rPr sz="800">
+                          <a:solidFill>
+                            <a:srgbClr val="1C2433"/>
+                          </a:solidFill>
+                        </a:rPr>
+                        <a:t>eixos</a:t>
+                      </a:r>
+                    </a:p>
+                  </a:txBody>
+                  <a:tcPr>
+                    <a:solidFill>
+                      <a:srgbClr val="FFFFFF"/>
+                    </a:solidFill>
+                  </a:tcPr>
+                </a:tc>
+                <a:tc>
+                  <a:txBody>
+                    <a:bodyPr/>
+                    <a:lstStyle/>
+                    <a:p>
+                      <a:r>
+                        <a:rPr sz="800">
+                          <a:solidFill>
+                            <a:srgbClr val="1C2433"/>
+                          </a:solidFill>
+                        </a:rPr>
+                        <a:t>ativo (quant.)</a:t>
+                      </a:r>
+                    </a:p>
+                  </a:txBody>
+                  <a:tcPr>
+                    <a:solidFill>
+                      <a:srgbClr val="FFFFFF"/>
+                    </a:solidFill>
+                  </a:tcPr>
+                </a:tc>
+              </a:tr>
+              <a:tr h="235818">
+                <a:tc>
+                  <a:txBody>
+                    <a:bodyPr/>
+                    <a:lstStyle/>
+                    <a:p>
+                      <a:r>
+                        <a:rPr sz="800">
+                          <a:solidFill>
+                            <a:srgbClr val="1C2433"/>
+                          </a:solidFill>
+                        </a:rPr>
+                        <a:t>comprimento</a:t>
+                      </a:r>
+                    </a:p>
+                  </a:txBody>
+                  <a:tcPr>
+                    <a:solidFill>
+                      <a:srgbClr val="EEEADE"/>
+                    </a:solidFill>
+                  </a:tcPr>
+                </a:tc>
+                <a:tc>
+                  <a:txBody>
+                    <a:bodyPr/>
+                    <a:lstStyle/>
+                    <a:p>
+                      <a:r>
+                        <a:rPr sz="800">
+                          <a:solidFill>
+                            <a:srgbClr val="1C2433"/>
+                          </a:solidFill>
+                        </a:rPr>
+                        <a:t>ativo (quant.)</a:t>
+                      </a:r>
+                    </a:p>
+                  </a:txBody>
+                  <a:tcPr>
+                    <a:solidFill>
+                      <a:srgbClr val="EEEADE"/>
+                    </a:solidFill>
+                  </a:tcPr>
+                </a:tc>
+              </a:tr>
+              <a:tr h="235818">
+                <a:tc>
+                  <a:txBody>
+                    <a:bodyPr/>
+                    <a:lstStyle/>
+                    <a:p>
+                      <a:r>
+                        <a:rPr sz="800">
+                          <a:solidFill>
+                            <a:srgbClr val="1C2433"/>
+                          </a:solidFill>
+                        </a:rPr>
+                        <a:t>flag_refrigerado</a:t>
+                      </a:r>
+                    </a:p>
+                  </a:txBody>
+                  <a:tcPr>
+                    <a:solidFill>
+                      <a:srgbClr val="FFFFFF"/>
+                    </a:solidFill>
+                  </a:tcPr>
+                </a:tc>
+                <a:tc>
+                  <a:txBody>
+                    <a:bodyPr/>
+                    <a:lstStyle/>
+                    <a:p>
+                      <a:r>
+                        <a:rPr sz="800">
+                          <a:solidFill>
+                            <a:srgbClr val="1C2433"/>
+                          </a:solidFill>
+                        </a:rPr>
+                        <a:t>ativo (cat.)</a:t>
+                      </a:r>
+                    </a:p>
+                  </a:txBody>
+                  <a:tcPr>
+                    <a:solidFill>
+                      <a:srgbClr val="FFFFFF"/>
+                    </a:solidFill>
+                  </a:tcPr>
+                </a:tc>
+              </a:tr>
+              <a:tr h="235836">
+                <a:tc>
+                  <a:txBody>
+                    <a:bodyPr/>
+                    <a:lstStyle/>
+                    <a:p>
+                      <a:r>
+                        <a:rPr sz="800">
+                          <a:solidFill>
+                            <a:srgbClr val="1C2433"/>
+                          </a:solidFill>
+                        </a:rPr>
+                        <a:t>tailgate_flag</a:t>
+                      </a:r>
+                    </a:p>
+                  </a:txBody>
+                  <a:tcPr>
+                    <a:solidFill>
+                      <a:srgbClr val="EEEADE"/>
+                    </a:solidFill>
+                  </a:tcPr>
+                </a:tc>
+                <a:tc>
+                  <a:txBody>
+                    <a:bodyPr/>
+                    <a:lstStyle/>
+                    <a:p>
+                      <a:r>
+                        <a:rPr sz="800">
+                          <a:solidFill>
+                            <a:srgbClr val="1C2433"/>
+                          </a:solidFill>
+                        </a:rPr>
+                        <a:t>ativo (cat.) - REMOVIDA</a:t>
                       </a:r>
                     </a:p>
                   </a:txBody>
@@ -4225,14 +4401,14 @@
                 <a:gridCol w="2697480"/>
                 <a:gridCol w="2697480"/>
               </a:tblGrid>
-              <a:tr h="344658">
-                <a:tc>
-                  <a:txBody>
-                    <a:bodyPr/>
-                    <a:lstStyle/>
-                    <a:p>
-                      <a:r>
-                        <a:rPr sz="900" b="1">
+              <a:tr h="235818">
+                <a:tc>
+                  <a:txBody>
+                    <a:bodyPr/>
+                    <a:lstStyle/>
+                    <a:p>
+                      <a:r>
+                        <a:rPr sz="800" b="1">
                           <a:solidFill>
                             <a:srgbClr val="FFFFFF"/>
                           </a:solidFill>
@@ -4253,7 +4429,7 @@
                     <a:lstStyle/>
                     <a:p>
                       <a:r>
-                        <a:rPr sz="900" b="1">
+                        <a:rPr sz="800" b="1">
                           <a:solidFill>
                             <a:srgbClr val="FFFFFF"/>
                           </a:solidFill>
@@ -4269,40 +4445,40 @@
                   </a:tcPr>
                 </a:tc>
               </a:tr>
-              <a:tr h="344658">
-                <a:tc>
-                  <a:txBody>
-                    <a:bodyPr/>
-                    <a:lstStyle/>
-                    <a:p>
-                      <a:r>
-                        <a:rPr sz="900">
-                          <a:solidFill>
-                            <a:srgbClr val="1C2433"/>
-                          </a:solidFill>
-                        </a:rPr>
-                        <a:t>eixos</a:t>
-                      </a:r>
-                    </a:p>
-                  </a:txBody>
-                  <a:tcPr>
-                    <a:solidFill>
-                      <a:srgbClr val="FFFFFF"/>
-                    </a:solidFill>
-                  </a:tcPr>
-                </a:tc>
-                <a:tc>
-                  <a:txBody>
-                    <a:bodyPr/>
-                    <a:lstStyle/>
-                    <a:p>
-                      <a:r>
-                        <a:rPr sz="900">
-                          <a:solidFill>
-                            <a:srgbClr val="1C2433"/>
-                          </a:solidFill>
-                        </a:rPr>
-                        <a:t>ativo (quant.)</a:t>
+              <a:tr h="235818">
+                <a:tc>
+                  <a:txBody>
+                    <a:bodyPr/>
+                    <a:lstStyle/>
+                    <a:p>
+                      <a:r>
+                        <a:rPr sz="800">
+                          <a:solidFill>
+                            <a:srgbClr val="1C2433"/>
+                          </a:solidFill>
+                        </a:rPr>
+                        <a:t>unit_subtype</a:t>
+                      </a:r>
+                    </a:p>
+                  </a:txBody>
+                  <a:tcPr>
+                    <a:solidFill>
+                      <a:srgbClr val="FFFFFF"/>
+                    </a:solidFill>
+                  </a:tcPr>
+                </a:tc>
+                <a:tc>
+                  <a:txBody>
+                    <a:bodyPr/>
+                    <a:lstStyle/>
+                    <a:p>
+                      <a:r>
+                        <a:rPr sz="800">
+                          <a:solidFill>
+                            <a:srgbClr val="1C2433"/>
+                          </a:solidFill>
+                        </a:rPr>
+                        <a:t>ativo (cat.)</a:t>
                       </a:r>
                     </a:p>
                   </a:txBody>
@@ -4313,40 +4489,40 @@
                   </a:tcPr>
                 </a:tc>
               </a:tr>
-              <a:tr h="344658">
-                <a:tc>
-                  <a:txBody>
-                    <a:bodyPr/>
-                    <a:lstStyle/>
-                    <a:p>
-                      <a:r>
-                        <a:rPr sz="900">
-                          <a:solidFill>
-                            <a:srgbClr val="1C2433"/>
-                          </a:solidFill>
-                        </a:rPr>
-                        <a:t>comprimento</a:t>
-                      </a:r>
-                    </a:p>
-                  </a:txBody>
-                  <a:tcPr>
-                    <a:solidFill>
-                      <a:srgbClr val="EEEADE"/>
-                    </a:solidFill>
-                  </a:tcPr>
-                </a:tc>
-                <a:tc>
-                  <a:txBody>
-                    <a:bodyPr/>
-                    <a:lstStyle/>
-                    <a:p>
-                      <a:r>
-                        <a:rPr sz="900">
-                          <a:solidFill>
-                            <a:srgbClr val="1C2433"/>
-                          </a:solidFill>
-                        </a:rPr>
-                        <a:t>ativo (quant.)</a:t>
+              <a:tr h="235818">
+                <a:tc>
+                  <a:txBody>
+                    <a:bodyPr/>
+                    <a:lstStyle/>
+                    <a:p>
+                      <a:r>
+                        <a:rPr sz="800">
+                          <a:solidFill>
+                            <a:srgbClr val="1C2433"/>
+                          </a:solidFill>
+                        </a:rPr>
+                        <a:t>tire_size</a:t>
+                      </a:r>
+                    </a:p>
+                  </a:txBody>
+                  <a:tcPr>
+                    <a:solidFill>
+                      <a:srgbClr val="EEEADE"/>
+                    </a:solidFill>
+                  </a:tcPr>
+                </a:tc>
+                <a:tc>
+                  <a:txBody>
+                    <a:bodyPr/>
+                    <a:lstStyle/>
+                    <a:p>
+                      <a:r>
+                        <a:rPr sz="800">
+                          <a:solidFill>
+                            <a:srgbClr val="1C2433"/>
+                          </a:solidFill>
+                        </a:rPr>
+                        <a:t>ativo (cat.)</a:t>
                       </a:r>
                     </a:p>
                   </a:txBody>
@@ -4357,35 +4533,35 @@
                   </a:tcPr>
                 </a:tc>
               </a:tr>
-              <a:tr h="344658">
-                <a:tc>
-                  <a:txBody>
-                    <a:bodyPr/>
-                    <a:lstStyle/>
-                    <a:p>
-                      <a:r>
-                        <a:rPr sz="900">
-                          <a:solidFill>
-                            <a:srgbClr val="1C2433"/>
-                          </a:solidFill>
-                        </a:rPr>
-                        <a:t>flag_refrigerado</a:t>
-                      </a:r>
-                    </a:p>
-                  </a:txBody>
-                  <a:tcPr>
-                    <a:solidFill>
-                      <a:srgbClr val="FFFFFF"/>
-                    </a:solidFill>
-                  </a:tcPr>
-                </a:tc>
-                <a:tc>
-                  <a:txBody>
-                    <a:bodyPr/>
-                    <a:lstStyle/>
-                    <a:p>
-                      <a:r>
-                        <a:rPr sz="900">
+              <a:tr h="235818">
+                <a:tc>
+                  <a:txBody>
+                    <a:bodyPr/>
+                    <a:lstStyle/>
+                    <a:p>
+                      <a:r>
+                        <a:rPr sz="800">
+                          <a:solidFill>
+                            <a:srgbClr val="1C2433"/>
+                          </a:solidFill>
+                        </a:rPr>
+                        <a:t>suspension_type</a:t>
+                      </a:r>
+                    </a:p>
+                  </a:txBody>
+                  <a:tcPr>
+                    <a:solidFill>
+                      <a:srgbClr val="FFFFFF"/>
+                    </a:solidFill>
+                  </a:tcPr>
+                </a:tc>
+                <a:tc>
+                  <a:txBody>
+                    <a:bodyPr/>
+                    <a:lstStyle/>
+                    <a:p>
+                      <a:r>
+                        <a:rPr sz="800">
                           <a:solidFill>
                             <a:srgbClr val="1C2433"/>
                           </a:solidFill>
@@ -4401,40 +4577,40 @@
                   </a:tcPr>
                 </a:tc>
               </a:tr>
-              <a:tr h="344658">
-                <a:tc>
-                  <a:txBody>
-                    <a:bodyPr/>
-                    <a:lstStyle/>
-                    <a:p>
-                      <a:r>
-                        <a:rPr sz="900">
-                          <a:solidFill>
-                            <a:srgbClr val="1C2433"/>
-                          </a:solidFill>
-                        </a:rPr>
-                        <a:t>tailgate_flag</a:t>
-                      </a:r>
-                    </a:p>
-                  </a:txBody>
-                  <a:tcPr>
-                    <a:solidFill>
-                      <a:srgbClr val="EEEADE"/>
-                    </a:solidFill>
-                  </a:tcPr>
-                </a:tc>
-                <a:tc>
-                  <a:txBody>
-                    <a:bodyPr/>
-                    <a:lstStyle/>
-                    <a:p>
-                      <a:r>
-                        <a:rPr sz="900">
-                          <a:solidFill>
-                            <a:srgbClr val="1C2433"/>
-                          </a:solidFill>
-                        </a:rPr>
-                        <a:t>ativo (cat.) - REMOVIDA</a:t>
+              <a:tr h="235818">
+                <a:tc>
+                  <a:txBody>
+                    <a:bodyPr/>
+                    <a:lstStyle/>
+                    <a:p>
+                      <a:r>
+                        <a:rPr sz="800">
+                          <a:solidFill>
+                            <a:srgbClr val="1C2433"/>
+                          </a:solidFill>
+                        </a:rPr>
+                        <a:t>new_used_indicator</a:t>
+                      </a:r>
+                    </a:p>
+                  </a:txBody>
+                  <a:tcPr>
+                    <a:solidFill>
+                      <a:srgbClr val="EEEADE"/>
+                    </a:solidFill>
+                  </a:tcPr>
+                </a:tc>
+                <a:tc>
+                  <a:txBody>
+                    <a:bodyPr/>
+                    <a:lstStyle/>
+                    <a:p>
+                      <a:r>
+                        <a:rPr sz="800">
+                          <a:solidFill>
+                            <a:srgbClr val="1C2433"/>
+                          </a:solidFill>
+                        </a:rPr>
+                        <a:t>ativo (cat.)</a:t>
                       </a:r>
                     </a:p>
                   </a:txBody>
@@ -4445,40 +4621,40 @@
                   </a:tcPr>
                 </a:tc>
               </a:tr>
-              <a:tr h="344658">
-                <a:tc>
-                  <a:txBody>
-                    <a:bodyPr/>
-                    <a:lstStyle/>
-                    <a:p>
-                      <a:r>
-                        <a:rPr sz="900">
-                          <a:solidFill>
-                            <a:srgbClr val="1C2433"/>
-                          </a:solidFill>
-                        </a:rPr>
-                        <a:t>unit_subtype</a:t>
-                      </a:r>
-                    </a:p>
-                  </a:txBody>
-                  <a:tcPr>
-                    <a:solidFill>
-                      <a:srgbClr val="FFFFFF"/>
-                    </a:solidFill>
-                  </a:tcPr>
-                </a:tc>
-                <a:tc>
-                  <a:txBody>
-                    <a:bodyPr/>
-                    <a:lstStyle/>
-                    <a:p>
-                      <a:r>
-                        <a:rPr sz="900">
-                          <a:solidFill>
-                            <a:srgbClr val="1C2433"/>
-                          </a:solidFill>
-                        </a:rPr>
-                        <a:t>ativo (cat.)</a:t>
+              <a:tr h="235818">
+                <a:tc>
+                  <a:txBody>
+                    <a:bodyPr/>
+                    <a:lstStyle/>
+                    <a:p>
+                      <a:r>
+                        <a:rPr sz="800">
+                          <a:solidFill>
+                            <a:srgbClr val="1C2433"/>
+                          </a:solidFill>
+                        </a:rPr>
+                        <a:t>idade_carreta</a:t>
+                      </a:r>
+                    </a:p>
+                  </a:txBody>
+                  <a:tcPr>
+                    <a:solidFill>
+                      <a:srgbClr val="FFFFFF"/>
+                    </a:solidFill>
+                  </a:tcPr>
+                </a:tc>
+                <a:tc>
+                  <a:txBody>
+                    <a:bodyPr/>
+                    <a:lstStyle/>
+                    <a:p>
+                      <a:r>
+                        <a:rPr sz="800">
+                          <a:solidFill>
+                            <a:srgbClr val="1C2433"/>
+                          </a:solidFill>
+                        </a:rPr>
+                        <a:t>ativo derivada (quant.)</a:t>
                       </a:r>
                     </a:p>
                   </a:txBody>
@@ -4489,40 +4665,40 @@
                   </a:tcPr>
                 </a:tc>
               </a:tr>
-              <a:tr h="344658">
-                <a:tc>
-                  <a:txBody>
-                    <a:bodyPr/>
-                    <a:lstStyle/>
-                    <a:p>
-                      <a:r>
-                        <a:rPr sz="900">
-                          <a:solidFill>
-                            <a:srgbClr val="1C2433"/>
-                          </a:solidFill>
-                        </a:rPr>
-                        <a:t>tire_size</a:t>
-                      </a:r>
-                    </a:p>
-                  </a:txBody>
-                  <a:tcPr>
-                    <a:solidFill>
-                      <a:srgbClr val="EEEADE"/>
-                    </a:solidFill>
-                  </a:tcPr>
-                </a:tc>
-                <a:tc>
-                  <a:txBody>
-                    <a:bodyPr/>
-                    <a:lstStyle/>
-                    <a:p>
-                      <a:r>
-                        <a:rPr sz="900">
-                          <a:solidFill>
-                            <a:srgbClr val="1C2433"/>
-                          </a:solidFill>
-                        </a:rPr>
-                        <a:t>ativo (cat.)</a:t>
+              <a:tr h="235818">
+                <a:tc>
+                  <a:txBody>
+                    <a:bodyPr/>
+                    <a:lstStyle/>
+                    <a:p>
+                      <a:r>
+                        <a:rPr sz="800">
+                          <a:solidFill>
+                            <a:srgbClr val="1C2433"/>
+                          </a:solidFill>
+                        </a:rPr>
+                        <a:t>n_os_ano_anterior</a:t>
+                      </a:r>
+                    </a:p>
+                  </a:txBody>
+                  <a:tcPr>
+                    <a:solidFill>
+                      <a:srgbClr val="EEEADE"/>
+                    </a:solidFill>
+                  </a:tcPr>
+                </a:tc>
+                <a:tc>
+                  <a:txBody>
+                    <a:bodyPr/>
+                    <a:lstStyle/>
+                    <a:p>
+                      <a:r>
+                        <a:rPr sz="800">
+                          <a:solidFill>
+                            <a:srgbClr val="1C2433"/>
+                          </a:solidFill>
+                        </a:rPr>
+                        <a:t>historico defasado</a:t>
                       </a:r>
                     </a:p>
                   </a:txBody>
@@ -4533,40 +4709,40 @@
                   </a:tcPr>
                 </a:tc>
               </a:tr>
-              <a:tr h="344658">
-                <a:tc>
-                  <a:txBody>
-                    <a:bodyPr/>
-                    <a:lstStyle/>
-                    <a:p>
-                      <a:r>
-                        <a:rPr sz="900">
-                          <a:solidFill>
-                            <a:srgbClr val="1C2433"/>
-                          </a:solidFill>
-                        </a:rPr>
-                        <a:t>suspension_type</a:t>
-                      </a:r>
-                    </a:p>
-                  </a:txBody>
-                  <a:tcPr>
-                    <a:solidFill>
-                      <a:srgbClr val="FFFFFF"/>
-                    </a:solidFill>
-                  </a:tcPr>
-                </a:tc>
-                <a:tc>
-                  <a:txBody>
-                    <a:bodyPr/>
-                    <a:lstStyle/>
-                    <a:p>
-                      <a:r>
-                        <a:rPr sz="900">
-                          <a:solidFill>
-                            <a:srgbClr val="1C2433"/>
-                          </a:solidFill>
-                        </a:rPr>
-                        <a:t>ativo (cat.)</a:t>
+              <a:tr h="235818">
+                <a:tc>
+                  <a:txBody>
+                    <a:bodyPr/>
+                    <a:lstStyle/>
+                    <a:p>
+                      <a:r>
+                        <a:rPr sz="800">
+                          <a:solidFill>
+                            <a:srgbClr val="1C2433"/>
+                          </a:solidFill>
+                        </a:rPr>
+                        <a:t>n_os_acum_ate_ano_anterior</a:t>
+                      </a:r>
+                    </a:p>
+                  </a:txBody>
+                  <a:tcPr>
+                    <a:solidFill>
+                      <a:srgbClr val="FFFFFF"/>
+                    </a:solidFill>
+                  </a:tcPr>
+                </a:tc>
+                <a:tc>
+                  <a:txBody>
+                    <a:bodyPr/>
+                    <a:lstStyle/>
+                    <a:p>
+                      <a:r>
+                        <a:rPr sz="800">
+                          <a:solidFill>
+                            <a:srgbClr val="1C2433"/>
+                          </a:solidFill>
+                        </a:rPr>
+                        <a:t>historico defasado</a:t>
                       </a:r>
                     </a:p>
                   </a:txBody>
@@ -4577,40 +4753,40 @@
                   </a:tcPr>
                 </a:tc>
               </a:tr>
-              <a:tr h="344658">
-                <a:tc>
-                  <a:txBody>
-                    <a:bodyPr/>
-                    <a:lstStyle/>
-                    <a:p>
-                      <a:r>
-                        <a:rPr sz="900">
-                          <a:solidFill>
-                            <a:srgbClr val="1C2433"/>
-                          </a:solidFill>
-                        </a:rPr>
-                        <a:t>new_used_indicator</a:t>
-                      </a:r>
-                    </a:p>
-                  </a:txBody>
-                  <a:tcPr>
-                    <a:solidFill>
-                      <a:srgbClr val="EEEADE"/>
-                    </a:solidFill>
-                  </a:tcPr>
-                </a:tc>
-                <a:tc>
-                  <a:txBody>
-                    <a:bodyPr/>
-                    <a:lstStyle/>
-                    <a:p>
-                      <a:r>
-                        <a:rPr sz="900">
-                          <a:solidFill>
-                            <a:srgbClr val="1C2433"/>
-                          </a:solidFill>
-                        </a:rPr>
-                        <a:t>ativo (cat.)</a:t>
+              <a:tr h="235818">
+                <a:tc>
+                  <a:txBody>
+                    <a:bodyPr/>
+                    <a:lstStyle/>
+                    <a:p>
+                      <a:r>
+                        <a:rPr sz="800">
+                          <a:solidFill>
+                            <a:srgbClr val="1C2433"/>
+                          </a:solidFill>
+                        </a:rPr>
+                        <a:t>anos_ativo_ate_ano_anterior</a:t>
+                      </a:r>
+                    </a:p>
+                  </a:txBody>
+                  <a:tcPr>
+                    <a:solidFill>
+                      <a:srgbClr val="EEEADE"/>
+                    </a:solidFill>
+                  </a:tcPr>
+                </a:tc>
+                <a:tc>
+                  <a:txBody>
+                    <a:bodyPr/>
+                    <a:lstStyle/>
+                    <a:p>
+                      <a:r>
+                        <a:rPr sz="800">
+                          <a:solidFill>
+                            <a:srgbClr val="1C2433"/>
+                          </a:solidFill>
+                        </a:rPr>
+                        <a:t>historico defasado</a:t>
                       </a:r>
                     </a:p>
                   </a:txBody>
@@ -4621,40 +4797,40 @@
                   </a:tcPr>
                 </a:tc>
               </a:tr>
-              <a:tr h="344658">
-                <a:tc>
-                  <a:txBody>
-                    <a:bodyPr/>
-                    <a:lstStyle/>
-                    <a:p>
-                      <a:r>
-                        <a:rPr sz="900">
-                          <a:solidFill>
-                            <a:srgbClr val="1C2433"/>
-                          </a:solidFill>
-                        </a:rPr>
-                        <a:t>idade_carreta</a:t>
-                      </a:r>
-                    </a:p>
-                  </a:txBody>
-                  <a:tcPr>
-                    <a:solidFill>
-                      <a:srgbClr val="FFFFFF"/>
-                    </a:solidFill>
-                  </a:tcPr>
-                </a:tc>
-                <a:tc>
-                  <a:txBody>
-                    <a:bodyPr/>
-                    <a:lstStyle/>
-                    <a:p>
-                      <a:r>
-                        <a:rPr sz="900">
-                          <a:solidFill>
-                            <a:srgbClr val="1C2433"/>
-                          </a:solidFill>
-                        </a:rPr>
-                        <a:t>ativo derivada (quant.)</a:t>
+              <a:tr h="235818">
+                <a:tc>
+                  <a:txBody>
+                    <a:bodyPr/>
+                    <a:lstStyle/>
+                    <a:p>
+                      <a:r>
+                        <a:rPr sz="800">
+                          <a:solidFill>
+                            <a:srgbClr val="1C2433"/>
+                          </a:solidFill>
+                        </a:rPr>
+                        <a:t>tipo_manutencao_ano</a:t>
+                      </a:r>
+                    </a:p>
+                  </a:txBody>
+                  <a:tcPr>
+                    <a:solidFill>
+                      <a:srgbClr val="FFFFFF"/>
+                    </a:solidFill>
+                  </a:tcPr>
+                </a:tc>
+                <a:tc>
+                  <a:txBody>
+                    <a:bodyPr/>
+                    <a:lstStyle/>
+                    <a:p>
+                      <a:r>
+                        <a:rPr sz="800">
+                          <a:solidFill>
+                            <a:srgbClr val="1C2433"/>
+                          </a:solidFill>
+                        </a:rPr>
+                        <a:t>contrato (cat.)</a:t>
                       </a:r>
                     </a:p>
                   </a:txBody>
@@ -4665,40 +4841,40 @@
                   </a:tcPr>
                 </a:tc>
               </a:tr>
-              <a:tr h="344658">
-                <a:tc>
-                  <a:txBody>
-                    <a:bodyPr/>
-                    <a:lstStyle/>
-                    <a:p>
-                      <a:r>
-                        <a:rPr sz="900">
-                          <a:solidFill>
-                            <a:srgbClr val="1C2433"/>
-                          </a:solidFill>
-                        </a:rPr>
-                        <a:t>n_os_ano_anterior</a:t>
-                      </a:r>
-                    </a:p>
-                  </a:txBody>
-                  <a:tcPr>
-                    <a:solidFill>
-                      <a:srgbClr val="EEEADE"/>
-                    </a:solidFill>
-                  </a:tcPr>
-                </a:tc>
-                <a:tc>
-                  <a:txBody>
-                    <a:bodyPr/>
-                    <a:lstStyle/>
-                    <a:p>
-                      <a:r>
-                        <a:rPr sz="900">
-                          <a:solidFill>
-                            <a:srgbClr val="1C2433"/>
-                          </a:solidFill>
-                        </a:rPr>
-                        <a:t>historico defasado</a:t>
+              <a:tr h="235818">
+                <a:tc>
+                  <a:txBody>
+                    <a:bodyPr/>
+                    <a:lstStyle/>
+                    <a:p>
+                      <a:r>
+                        <a:rPr sz="800">
+                          <a:solidFill>
+                            <a:srgbClr val="1C2433"/>
+                          </a:solidFill>
+                        </a:rPr>
+                        <a:t>share_maint_ano</a:t>
+                      </a:r>
+                    </a:p>
+                  </a:txBody>
+                  <a:tcPr>
+                    <a:solidFill>
+                      <a:srgbClr val="EEEADE"/>
+                    </a:solidFill>
+                  </a:tcPr>
+                </a:tc>
+                <a:tc>
+                  <a:txBody>
+                    <a:bodyPr/>
+                    <a:lstStyle/>
+                    <a:p>
+                      <a:r>
+                        <a:rPr sz="800">
+                          <a:solidFill>
+                            <a:srgbClr val="1C2433"/>
+                          </a:solidFill>
+                        </a:rPr>
+                        <a:t>contrato (quant.)</a:t>
                       </a:r>
                     </a:p>
                   </a:txBody>
@@ -4709,40 +4885,40 @@
                   </a:tcPr>
                 </a:tc>
               </a:tr>
-              <a:tr h="344658">
-                <a:tc>
-                  <a:txBody>
-                    <a:bodyPr/>
-                    <a:lstStyle/>
-                    <a:p>
-                      <a:r>
-                        <a:rPr sz="900">
-                          <a:solidFill>
-                            <a:srgbClr val="1C2433"/>
-                          </a:solidFill>
-                        </a:rPr>
-                        <a:t>n_os_acum_ate_ano_anterior</a:t>
-                      </a:r>
-                    </a:p>
-                  </a:txBody>
-                  <a:tcPr>
-                    <a:solidFill>
-                      <a:srgbClr val="FFFFFF"/>
-                    </a:solidFill>
-                  </a:tcPr>
-                </a:tc>
-                <a:tc>
-                  <a:txBody>
-                    <a:bodyPr/>
-                    <a:lstStyle/>
-                    <a:p>
-                      <a:r>
-                        <a:rPr sz="900">
-                          <a:solidFill>
-                            <a:srgbClr val="1C2433"/>
-                          </a:solidFill>
-                        </a:rPr>
-                        <a:t>historico defasado</a:t>
+              <a:tr h="235818">
+                <a:tc>
+                  <a:txBody>
+                    <a:bodyPr/>
+                    <a:lstStyle/>
+                    <a:p>
+                      <a:r>
+                        <a:rPr sz="800">
+                          <a:solidFill>
+                            <a:srgbClr val="1C2433"/>
+                          </a:solidFill>
+                        </a:rPr>
+                        <a:t>n_tipos_manutencao_ano</a:t>
+                      </a:r>
+                    </a:p>
+                  </a:txBody>
+                  <a:tcPr>
+                    <a:solidFill>
+                      <a:srgbClr val="FFFFFF"/>
+                    </a:solidFill>
+                  </a:tcPr>
+                </a:tc>
+                <a:tc>
+                  <a:txBody>
+                    <a:bodyPr/>
+                    <a:lstStyle/>
+                    <a:p>
+                      <a:r>
+                        <a:rPr sz="800">
+                          <a:solidFill>
+                            <a:srgbClr val="1C2433"/>
+                          </a:solidFill>
+                        </a:rPr>
+                        <a:t>contrato (quant.)</a:t>
                       </a:r>
                     </a:p>
                   </a:txBody>
@@ -4753,40 +4929,304 @@
                   </a:tcPr>
                 </a:tc>
               </a:tr>
-              <a:tr h="344664">
-                <a:tc>
-                  <a:txBody>
-                    <a:bodyPr/>
-                    <a:lstStyle/>
-                    <a:p>
-                      <a:r>
-                        <a:rPr sz="900">
-                          <a:solidFill>
-                            <a:srgbClr val="1C2433"/>
-                          </a:solidFill>
-                        </a:rPr>
-                        <a:t>anos_ativo_ate_ano_anterior</a:t>
-                      </a:r>
-                    </a:p>
-                  </a:txBody>
-                  <a:tcPr>
-                    <a:solidFill>
-                      <a:srgbClr val="EEEADE"/>
-                    </a:solidFill>
-                  </a:tcPr>
-                </a:tc>
-                <a:tc>
-                  <a:txBody>
-                    <a:bodyPr/>
-                    <a:lstStyle/>
-                    <a:p>
-                      <a:r>
-                        <a:rPr sz="900">
-                          <a:solidFill>
-                            <a:srgbClr val="1C2433"/>
-                          </a:solidFill>
-                        </a:rPr>
-                        <a:t>historico defasado</a:t>
+              <a:tr h="235818">
+                <a:tc>
+                  <a:txBody>
+                    <a:bodyPr/>
+                    <a:lstStyle/>
+                    <a:p>
+                      <a:r>
+                        <a:rPr sz="800">
+                          <a:solidFill>
+                            <a:srgbClr val="1C2433"/>
+                          </a:solidFill>
+                        </a:rPr>
+                        <a:t>tempo_contrato_meses_fim_ano</a:t>
+                      </a:r>
+                    </a:p>
+                  </a:txBody>
+                  <a:tcPr>
+                    <a:solidFill>
+                      <a:srgbClr val="EEEADE"/>
+                    </a:solidFill>
+                  </a:tcPr>
+                </a:tc>
+                <a:tc>
+                  <a:txBody>
+                    <a:bodyPr/>
+                    <a:lstStyle/>
+                    <a:p>
+                      <a:r>
+                        <a:rPr sz="800">
+                          <a:solidFill>
+                            <a:srgbClr val="1C2433"/>
+                          </a:solidFill>
+                        </a:rPr>
+                        <a:t>contrato (quant.)</a:t>
+                      </a:r>
+                    </a:p>
+                  </a:txBody>
+                  <a:tcPr>
+                    <a:solidFill>
+                      <a:srgbClr val="EEEADE"/>
+                    </a:solidFill>
+                  </a:tcPr>
+                </a:tc>
+              </a:tr>
+              <a:tr h="235818">
+                <a:tc>
+                  <a:txBody>
+                    <a:bodyPr/>
+                    <a:lstStyle/>
+                    <a:p>
+                      <a:r>
+                        <a:rPr sz="800">
+                          <a:solidFill>
+                            <a:srgbClr val="1C2433"/>
+                          </a:solidFill>
+                        </a:rPr>
+                        <a:t>tempo_contrato_meses_inicio_ano</a:t>
+                      </a:r>
+                    </a:p>
+                  </a:txBody>
+                  <a:tcPr>
+                    <a:solidFill>
+                      <a:srgbClr val="FFFFFF"/>
+                    </a:solidFill>
+                  </a:tcPr>
+                </a:tc>
+                <a:tc>
+                  <a:txBody>
+                    <a:bodyPr/>
+                    <a:lstStyle/>
+                    <a:p>
+                      <a:r>
+                        <a:rPr sz="800">
+                          <a:solidFill>
+                            <a:srgbClr val="1C2433"/>
+                          </a:solidFill>
+                        </a:rPr>
+                        <a:t>contrato defasado</a:t>
+                      </a:r>
+                    </a:p>
+                  </a:txBody>
+                  <a:tcPr>
+                    <a:solidFill>
+                      <a:srgbClr val="FFFFFF"/>
+                    </a:solidFill>
+                  </a:tcPr>
+                </a:tc>
+              </a:tr>
+              <a:tr h="235818">
+                <a:tc>
+                  <a:txBody>
+                    <a:bodyPr/>
+                    <a:lstStyle/>
+                    <a:p>
+                      <a:r>
+                        <a:rPr sz="800">
+                          <a:solidFill>
+                            <a:srgbClr val="1C2433"/>
+                          </a:solidFill>
+                        </a:rPr>
+                        <a:t>trocou_contrato_ano</a:t>
+                      </a:r>
+                    </a:p>
+                  </a:txBody>
+                  <a:tcPr>
+                    <a:solidFill>
+                      <a:srgbClr val="EEEADE"/>
+                    </a:solidFill>
+                  </a:tcPr>
+                </a:tc>
+                <a:tc>
+                  <a:txBody>
+                    <a:bodyPr/>
+                    <a:lstStyle/>
+                    <a:p>
+                      <a:r>
+                        <a:rPr sz="800">
+                          <a:solidFill>
+                            <a:srgbClr val="1C2433"/>
+                          </a:solidFill>
+                        </a:rPr>
+                        <a:t>contrato (bin.)</a:t>
+                      </a:r>
+                    </a:p>
+                  </a:txBody>
+                  <a:tcPr>
+                    <a:solidFill>
+                      <a:srgbClr val="EEEADE"/>
+                    </a:solidFill>
+                  </a:tcPr>
+                </a:tc>
+              </a:tr>
+              <a:tr h="235818">
+                <a:tc>
+                  <a:txBody>
+                    <a:bodyPr/>
+                    <a:lstStyle/>
+                    <a:p>
+                      <a:r>
+                        <a:rPr sz="800">
+                          <a:solidFill>
+                            <a:srgbClr val="1C2433"/>
+                          </a:solidFill>
+                        </a:rPr>
+                        <a:t>n_clientes_ano</a:t>
+                      </a:r>
+                    </a:p>
+                  </a:txBody>
+                  <a:tcPr>
+                    <a:solidFill>
+                      <a:srgbClr val="FFFFFF"/>
+                    </a:solidFill>
+                  </a:tcPr>
+                </a:tc>
+                <a:tc>
+                  <a:txBody>
+                    <a:bodyPr/>
+                    <a:lstStyle/>
+                    <a:p>
+                      <a:r>
+                        <a:rPr sz="800">
+                          <a:solidFill>
+                            <a:srgbClr val="1C2433"/>
+                          </a:solidFill>
+                        </a:rPr>
+                        <a:t>contrato (quant.)</a:t>
+                      </a:r>
+                    </a:p>
+                  </a:txBody>
+                  <a:tcPr>
+                    <a:solidFill>
+                      <a:srgbClr val="FFFFFF"/>
+                    </a:solidFill>
+                  </a:tcPr>
+                </a:tc>
+              </a:tr>
+              <a:tr h="235818">
+                <a:tc>
+                  <a:txBody>
+                    <a:bodyPr/>
+                    <a:lstStyle/>
+                    <a:p>
+                      <a:r>
+                        <a:rPr sz="800">
+                          <a:solidFill>
+                            <a:srgbClr val="1C2433"/>
+                          </a:solidFill>
+                        </a:rPr>
+                        <a:t>cod_cliente_predominante_ano</a:t>
+                      </a:r>
+                    </a:p>
+                  </a:txBody>
+                  <a:tcPr>
+                    <a:solidFill>
+                      <a:srgbClr val="EEEADE"/>
+                    </a:solidFill>
+                  </a:tcPr>
+                </a:tc>
+                <a:tc>
+                  <a:txBody>
+                    <a:bodyPr/>
+                    <a:lstStyle/>
+                    <a:p>
+                      <a:r>
+                        <a:rPr sz="800">
+                          <a:solidFill>
+                            <a:srgbClr val="1C2433"/>
+                          </a:solidFill>
+                        </a:rPr>
+                        <a:t>contrato (cat.) - DESCRITIVO</a:t>
+                      </a:r>
+                    </a:p>
+                  </a:txBody>
+                  <a:tcPr>
+                    <a:solidFill>
+                      <a:srgbClr val="EEEADE"/>
+                    </a:solidFill>
+                  </a:tcPr>
+                </a:tc>
+              </a:tr>
+              <a:tr h="235818">
+                <a:tc>
+                  <a:txBody>
+                    <a:bodyPr/>
+                    <a:lstStyle/>
+                    <a:p>
+                      <a:r>
+                        <a:rPr sz="800">
+                          <a:solidFill>
+                            <a:srgbClr val="1C2433"/>
+                          </a:solidFill>
+                        </a:rPr>
+                        <a:t>populacao_maint_flag</a:t>
+                      </a:r>
+                    </a:p>
+                  </a:txBody>
+                  <a:tcPr>
+                    <a:solidFill>
+                      <a:srgbClr val="FFFFFF"/>
+                    </a:solidFill>
+                  </a:tcPr>
+                </a:tc>
+                <a:tc>
+                  <a:txBody>
+                    <a:bodyPr/>
+                    <a:lstStyle/>
+                    <a:p>
+                      <a:r>
+                        <a:rPr sz="800">
+                          <a:solidFill>
+                            <a:srgbClr val="1C2433"/>
+                          </a:solidFill>
+                        </a:rPr>
+                        <a:t>flag de populacao</a:t>
+                      </a:r>
+                    </a:p>
+                  </a:txBody>
+                  <a:tcPr>
+                    <a:solidFill>
+                      <a:srgbClr val="FFFFFF"/>
+                    </a:solidFill>
+                  </a:tcPr>
+                </a:tc>
+              </a:tr>
+              <a:tr h="235836">
+                <a:tc>
+                  <a:txBody>
+                    <a:bodyPr/>
+                    <a:lstStyle/>
+                    <a:p>
+                      <a:r>
+                        <a:rPr sz="800">
+                          <a:solidFill>
+                            <a:srgbClr val="1C2433"/>
+                          </a:solidFill>
+                        </a:rPr>
+                        <a:t>franquia_km_mensal_contrato</a:t>
+                      </a:r>
+                    </a:p>
+                  </a:txBody>
+                  <a:tcPr>
+                    <a:solidFill>
+                      <a:srgbClr val="EEEADE"/>
+                    </a:solidFill>
+                  </a:tcPr>
+                </a:tc>
+                <a:tc>
+                  <a:txBody>
+                    <a:bodyPr/>
+                    <a:lstStyle/>
+                    <a:p>
+                      <a:r>
+                        <a:rPr sz="800">
+                          <a:solidFill>
+                            <a:srgbClr val="1C2433"/>
+                          </a:solidFill>
+                        </a:rPr>
+                        <a:t>contrato - REMOVIDA</a:t>
                       </a:r>
                     </a:p>
                   </a:txBody>
@@ -5208,7 +5648,7 @@
                             <a:srgbClr val="1C2433"/>
                           </a:solidFill>
                         </a:rPr>
-                        <a:t>49248</a:t>
+                        <a:t>47715</a:t>
                       </a:r>
                     </a:p>
                   </a:txBody>
@@ -5229,7 +5669,7 @@
                             <a:srgbClr val="1C2433"/>
                           </a:solidFill>
                         </a:rPr>
-                        <a:t>1673.724</a:t>
+                        <a:t>1669.184</a:t>
                       </a:r>
                     </a:p>
                   </a:txBody>
@@ -5250,7 +5690,7 @@
                             <a:srgbClr val="1C2433"/>
                           </a:solidFill>
                         </a:rPr>
-                        <a:t>812.55</a:t>
+                        <a:t>812.262</a:t>
                       </a:r>
                     </a:p>
                   </a:txBody>
@@ -5271,7 +5711,7 @@
                             <a:srgbClr val="1C2433"/>
                           </a:solidFill>
                         </a:rPr>
-                        <a:t>2400.748</a:t>
+                        <a:t>2390.597</a:t>
                       </a:r>
                     </a:p>
                   </a:txBody>
@@ -5334,7 +5774,7 @@
                             <a:srgbClr val="1C2433"/>
                           </a:solidFill>
                         </a:rPr>
-                        <a:t>3.786</a:t>
+                        <a:t>3.819</a:t>
                       </a:r>
                     </a:p>
                   </a:txBody>
@@ -5378,7 +5818,7 @@
                             <a:srgbClr val="1C2433"/>
                           </a:solidFill>
                         </a:rPr>
-                        <a:t>49242</a:t>
+                        <a:t>47709</a:t>
                       </a:r>
                     </a:p>
                   </a:txBody>
@@ -5399,7 +5839,7 @@
                             <a:srgbClr val="1C2433"/>
                           </a:solidFill>
                         </a:rPr>
-                        <a:t>2014.545</a:t>
+                        <a:t>2014.769</a:t>
                       </a:r>
                     </a:p>
                   </a:txBody>
@@ -5420,7 +5860,7 @@
                             <a:srgbClr val="1C2433"/>
                           </a:solidFill>
                         </a:rPr>
-                        <a:t>2015.0</a:t>
+                        <a:t>2016.0</a:t>
                       </a:r>
                     </a:p>
                   </a:txBody>
@@ -5441,7 +5881,7 @@
                             <a:srgbClr val="1C2433"/>
                           </a:solidFill>
                         </a:rPr>
-                        <a:t>5.887</a:t>
+                        <a:t>5.79</a:t>
                       </a:r>
                     </a:p>
                   </a:txBody>
@@ -5504,7 +5944,7 @@
                             <a:srgbClr val="1C2433"/>
                           </a:solidFill>
                         </a:rPr>
-                        <a:t>-0.434</a:t>
+                        <a:t>-0.471</a:t>
                       </a:r>
                     </a:p>
                   </a:txBody>
@@ -5548,7 +5988,7 @@
                             <a:srgbClr val="1C2433"/>
                           </a:solidFill>
                         </a:rPr>
-                        <a:t>49157</a:t>
+                        <a:t>47624</a:t>
                       </a:r>
                     </a:p>
                   </a:txBody>
@@ -5611,7 +6051,7 @@
                             <a:srgbClr val="1C2433"/>
                           </a:solidFill>
                         </a:rPr>
-                        <a:t>0.276</a:t>
+                        <a:t>0.277</a:t>
                       </a:r>
                     </a:p>
                   </a:txBody>
@@ -5674,7 +6114,7 @@
                             <a:srgbClr val="1C2433"/>
                           </a:solidFill>
                         </a:rPr>
-                        <a:t>3.226</a:t>
+                        <a:t>3.199</a:t>
                       </a:r>
                     </a:p>
                   </a:txBody>
@@ -5718,7 +6158,7 @@
                             <a:srgbClr val="1C2433"/>
                           </a:solidFill>
                         </a:rPr>
-                        <a:t>48588</a:t>
+                        <a:t>47055</a:t>
                       </a:r>
                     </a:p>
                   </a:txBody>
@@ -5739,7 +6179,7 @@
                             <a:srgbClr val="1C2433"/>
                           </a:solidFill>
                         </a:rPr>
-                        <a:t>52.256</a:t>
+                        <a:t>52.242</a:t>
                       </a:r>
                     </a:p>
                   </a:txBody>
@@ -5781,7 +6221,7 @@
                             <a:srgbClr val="1C2433"/>
                           </a:solidFill>
                         </a:rPr>
-                        <a:t>3.686</a:t>
+                        <a:t>3.722</a:t>
                       </a:r>
                     </a:p>
                   </a:txBody>
@@ -5844,7 +6284,7 @@
                             <a:srgbClr val="1C2433"/>
                           </a:solidFill>
                         </a:rPr>
-                        <a:t>-5.024</a:t>
+                        <a:t>-4.969</a:t>
                       </a:r>
                     </a:p>
                   </a:txBody>
@@ -5888,7 +6328,7 @@
                             <a:srgbClr val="1C2433"/>
                           </a:solidFill>
                         </a:rPr>
-                        <a:t>49242</a:t>
+                        <a:t>47709</a:t>
                       </a:r>
                     </a:p>
                   </a:txBody>
@@ -5909,7 +6349,7 @@
                             <a:srgbClr val="1C2433"/>
                           </a:solidFill>
                         </a:rPr>
-                        <a:t>8.384</a:t>
+                        <a:t>8.181</a:t>
                       </a:r>
                     </a:p>
                   </a:txBody>
@@ -5951,7 +6391,7 @@
                             <a:srgbClr val="1C2433"/>
                           </a:solidFill>
                         </a:rPr>
-                        <a:t>5.791</a:t>
+                        <a:t>5.7</a:t>
                       </a:r>
                     </a:p>
                   </a:txBody>
@@ -6014,7 +6454,7 @@
                             <a:srgbClr val="1C2433"/>
                           </a:solidFill>
                         </a:rPr>
-                        <a:t>0.507</a:t>
+                        <a:t>0.542</a:t>
                       </a:r>
                     </a:p>
                   </a:txBody>
@@ -6058,7 +6498,7 @@
                             <a:srgbClr val="1C2433"/>
                           </a:solidFill>
                         </a:rPr>
-                        <a:t>48976</a:t>
+                        <a:t>47448</a:t>
                       </a:r>
                     </a:p>
                   </a:txBody>
@@ -6079,7 +6519,7 @@
                             <a:srgbClr val="1C2433"/>
                           </a:solidFill>
                         </a:rPr>
-                        <a:t>178122.519</a:t>
+                        <a:t>176040.697</a:t>
                       </a:r>
                     </a:p>
                   </a:txBody>
@@ -6100,7 +6540,7 @@
                             <a:srgbClr val="1C2433"/>
                           </a:solidFill>
                         </a:rPr>
-                        <a:t>111110.5</a:t>
+                        <a:t>110322.0</a:t>
                       </a:r>
                     </a:p>
                   </a:txBody>
@@ -6121,7 +6561,7 @@
                             <a:srgbClr val="1C2433"/>
                           </a:solidFill>
                         </a:rPr>
-                        <a:t>199147.442</a:t>
+                        <a:t>197125.394</a:t>
                       </a:r>
                     </a:p>
                   </a:txBody>
@@ -6184,7 +6624,7 @@
                             <a:srgbClr val="1C2433"/>
                           </a:solidFill>
                         </a:rPr>
-                        <a:t>2.165</a:t>
+                        <a:t>2.204</a:t>
                       </a:r>
                     </a:p>
                   </a:txBody>
@@ -6228,7 +6668,7 @@
                             <a:srgbClr val="1C2433"/>
                           </a:solidFill>
                         </a:rPr>
-                        <a:t>39076</a:t>
+                        <a:t>37822</a:t>
                       </a:r>
                     </a:p>
                   </a:txBody>
@@ -6249,7 +6689,7 @@
                             <a:srgbClr val="1C2433"/>
                           </a:solidFill>
                         </a:rPr>
-                        <a:t>23689.68</a:t>
+                        <a:t>24050.571</a:t>
                       </a:r>
                     </a:p>
                   </a:txBody>
@@ -6270,7 +6710,7 @@
                             <a:srgbClr val="1C2433"/>
                           </a:solidFill>
                         </a:rPr>
-                        <a:t>12698.5</a:t>
+                        <a:t>13016.5</a:t>
                       </a:r>
                     </a:p>
                   </a:txBody>
@@ -6291,7 +6731,7 @@
                             <a:srgbClr val="1C2433"/>
                           </a:solidFill>
                         </a:rPr>
-                        <a:t>29090.836</a:t>
+                        <a:t>29246.383</a:t>
                       </a:r>
                     </a:p>
                   </a:txBody>
@@ -6354,7 +6794,7 @@
                             <a:srgbClr val="1C2433"/>
                           </a:solidFill>
                         </a:rPr>
-                        <a:t>2.358</a:t>
+                        <a:t>2.339</a:t>
                       </a:r>
                     </a:p>
                   </a:txBody>
@@ -6398,7 +6838,7 @@
                             <a:srgbClr val="1C2433"/>
                           </a:solidFill>
                         </a:rPr>
-                        <a:t>49248</a:t>
+                        <a:t>47715</a:t>
                       </a:r>
                     </a:p>
                   </a:txBody>
@@ -6419,7 +6859,7 @@
                             <a:srgbClr val="1C2433"/>
                           </a:solidFill>
                         </a:rPr>
-                        <a:t>2.5</a:t>
+                        <a:t>2.501</a:t>
                       </a:r>
                     </a:p>
                   </a:txBody>
@@ -6461,7 +6901,7 @@
                             <a:srgbClr val="1C2433"/>
                           </a:solidFill>
                         </a:rPr>
-                        <a:t>1.549</a:t>
+                        <a:t>1.548</a:t>
                       </a:r>
                     </a:p>
                   </a:txBody>
@@ -6524,7 +6964,7 @@
                             <a:srgbClr val="1C2433"/>
                           </a:solidFill>
                         </a:rPr>
-                        <a:t>1.086</a:t>
+                        <a:t>1.097</a:t>
                       </a:r>
                     </a:p>
                   </a:txBody>
@@ -6568,7 +7008,7 @@
                             <a:srgbClr val="1C2433"/>
                           </a:solidFill>
                         </a:rPr>
-                        <a:t>49248</a:t>
+                        <a:t>47715</a:t>
                       </a:r>
                     </a:p>
                   </a:txBody>
@@ -6589,7 +7029,7 @@
                             <a:srgbClr val="1C2433"/>
                           </a:solidFill>
                         </a:rPr>
-                        <a:t>0.325</a:t>
+                        <a:t>0.322</a:t>
                       </a:r>
                     </a:p>
                   </a:txBody>
@@ -6631,7 +7071,7 @@
                             <a:srgbClr val="1C2433"/>
                           </a:solidFill>
                         </a:rPr>
-                        <a:t>0.333</a:t>
+                        <a:t>0.332</a:t>
                       </a:r>
                     </a:p>
                   </a:txBody>
@@ -6694,7 +7134,7 @@
                             <a:srgbClr val="1C2433"/>
                           </a:solidFill>
                         </a:rPr>
-                        <a:t>0.93</a:t>
+                        <a:t>0.942</a:t>
                       </a:r>
                     </a:p>
                   </a:txBody>
@@ -6738,7 +7178,7 @@
                             <a:srgbClr val="1C2433"/>
                           </a:solidFill>
                         </a:rPr>
-                        <a:t>49248</a:t>
+                        <a:t>47715</a:t>
                       </a:r>
                     </a:p>
                   </a:txBody>
@@ -6759,7 +7199,7 @@
                             <a:srgbClr val="1C2433"/>
                           </a:solidFill>
                         </a:rPr>
-                        <a:t>4.536</a:t>
+                        <a:t>4.549</a:t>
                       </a:r>
                     </a:p>
                   </a:txBody>
@@ -6801,7 +7241,7 @@
                             <a:srgbClr val="1C2433"/>
                           </a:solidFill>
                         </a:rPr>
-                        <a:t>4.275</a:t>
+                        <a:t>4.268</a:t>
                       </a:r>
                     </a:p>
                   </a:txBody>
@@ -6864,7 +7304,7 @@
                             <a:srgbClr val="1C2433"/>
                           </a:solidFill>
                         </a:rPr>
-                        <a:t>2.411</a:t>
+                        <a:t>2.407</a:t>
                       </a:r>
                     </a:p>
                   </a:txBody>
@@ -6908,7 +7348,7 @@
                             <a:srgbClr val="1C2433"/>
                           </a:solidFill>
                         </a:rPr>
-                        <a:t>49248</a:t>
+                        <a:t>47715</a:t>
                       </a:r>
                     </a:p>
                   </a:txBody>
@@ -6929,7 +7369,7 @@
                             <a:srgbClr val="1C2433"/>
                           </a:solidFill>
                         </a:rPr>
-                        <a:t>339.18</a:t>
+                        <a:t>338.104</a:t>
                       </a:r>
                     </a:p>
                   </a:txBody>
@@ -6950,7 +7390,7 @@
                             <a:srgbClr val="1C2433"/>
                           </a:solidFill>
                         </a:rPr>
-                        <a:t>244.318</a:t>
+                        <a:t>242.725</a:t>
                       </a:r>
                     </a:p>
                   </a:txBody>
@@ -6971,7 +7411,7 @@
                             <a:srgbClr val="1C2433"/>
                           </a:solidFill>
                         </a:rPr>
-                        <a:t>354.068</a:t>
+                        <a:t>354.465</a:t>
                       </a:r>
                     </a:p>
                   </a:txBody>
@@ -7034,7 +7474,7 @@
                             <a:srgbClr val="1C2433"/>
                           </a:solidFill>
                         </a:rPr>
-                        <a:t>7.321</a:t>
+                        <a:t>7.452</a:t>
                       </a:r>
                     </a:p>
                   </a:txBody>
@@ -7078,7 +7518,7 @@
                             <a:srgbClr val="1C2433"/>
                           </a:solidFill>
                         </a:rPr>
-                        <a:t>39389</a:t>
+                        <a:t>38130</a:t>
                       </a:r>
                     </a:p>
                   </a:txBody>
@@ -7099,7 +7539,7 @@
                             <a:srgbClr val="1C2433"/>
                           </a:solidFill>
                         </a:rPr>
-                        <a:t>4.476</a:t>
+                        <a:t>4.484</a:t>
                       </a:r>
                     </a:p>
                   </a:txBody>
@@ -7141,7 +7581,7 @@
                             <a:srgbClr val="1C2433"/>
                           </a:solidFill>
                         </a:rPr>
-                        <a:t>4.267</a:t>
+                        <a:t>4.251</a:t>
                       </a:r>
                     </a:p>
                   </a:txBody>
@@ -7204,7 +7644,7 @@
                             <a:srgbClr val="1C2433"/>
                           </a:solidFill>
                         </a:rPr>
-                        <a:t>2.425</a:t>
+                        <a:t>2.424</a:t>
                       </a:r>
                     </a:p>
                   </a:txBody>
@@ -7248,7 +7688,7 @@
                             <a:srgbClr val="1C2433"/>
                           </a:solidFill>
                         </a:rPr>
-                        <a:t>49248</a:t>
+                        <a:t>47715</a:t>
                       </a:r>
                     </a:p>
                   </a:txBody>
@@ -7269,7 +7709,7 @@
                             <a:srgbClr val="1C2433"/>
                           </a:solidFill>
                         </a:rPr>
-                        <a:t>9.684</a:t>
+                        <a:t>9.668</a:t>
                       </a:r>
                     </a:p>
                   </a:txBody>
@@ -7311,7 +7751,7 @@
                             <a:srgbClr val="1C2433"/>
                           </a:solidFill>
                         </a:rPr>
-                        <a:t>12.955</a:t>
+                        <a:t>12.9</a:t>
                       </a:r>
                     </a:p>
                   </a:txBody>
@@ -7374,7 +7814,7 @@
                             <a:srgbClr val="1C2433"/>
                           </a:solidFill>
                         </a:rPr>
-                        <a:t>2.89</a:t>
+                        <a:t>2.881</a:t>
                       </a:r>
                     </a:p>
                   </a:txBody>
@@ -8252,7 +8692,7 @@
                             <a:srgbClr val="1C2433"/>
                           </a:solidFill>
                         </a:rPr>
-                        <a:t>0.514</a:t>
+                        <a:t>0.512</a:t>
                       </a:r>
                     </a:p>
                   </a:txBody>
@@ -8338,7 +8778,7 @@
                             <a:srgbClr val="1C2433"/>
                           </a:solidFill>
                         </a:rPr>
-                        <a:t>0.75</a:t>
+                        <a:t>0.748</a:t>
                       </a:r>
                     </a:p>
                   </a:txBody>
@@ -8359,7 +8799,7 @@
                             <a:srgbClr val="1C2433"/>
                           </a:solidFill>
                         </a:rPr>
-                        <a:t>0.769</a:t>
+                        <a:t>0.768</a:t>
                       </a:r>
                     </a:p>
                   </a:txBody>
@@ -8424,7 +8864,7 @@
                             <a:srgbClr val="1C2433"/>
                           </a:solidFill>
                         </a:rPr>
-                        <a:t>0.63</a:t>
+                        <a:t>0.631</a:t>
                       </a:r>
                     </a:p>
                   </a:txBody>
@@ -8445,7 +8885,7 @@
                             <a:srgbClr val="1C2433"/>
                           </a:solidFill>
                         </a:rPr>
-                        <a:t>0.704</a:t>
+                        <a:t>0.702</a:t>
                       </a:r>
                     </a:p>
                   </a:txBody>
@@ -8510,7 +8950,7 @@
                             <a:srgbClr val="1C2433"/>
                           </a:solidFill>
                         </a:rPr>
-                        <a:t>0.59</a:t>
+                        <a:t>0.589</a:t>
                       </a:r>
                     </a:p>
                   </a:txBody>
@@ -8531,7 +8971,7 @@
                             <a:srgbClr val="1C2433"/>
                           </a:solidFill>
                         </a:rPr>
-                        <a:t>0.54</a:t>
+                        <a:t>0.539</a:t>
                       </a:r>
                     </a:p>
                   </a:txBody>
@@ -8596,7 +9036,7 @@
                             <a:srgbClr val="1C2433"/>
                           </a:solidFill>
                         </a:rPr>
-                        <a:t>0.588</a:t>
+                        <a:t>0.587</a:t>
                       </a:r>
                     </a:p>
                   </a:txBody>
@@ -8617,7 +9057,7 @@
                             <a:srgbClr val="1C2433"/>
                           </a:solidFill>
                         </a:rPr>
-                        <a:t>0.536</a:t>
+                        <a:t>0.538</a:t>
                       </a:r>
                     </a:p>
                   </a:txBody>
@@ -8682,7 +9122,7 @@
                             <a:srgbClr val="1C2433"/>
                           </a:solidFill>
                         </a:rPr>
-                        <a:t>0.419</a:t>
+                        <a:t>0.418</a:t>
                       </a:r>
                     </a:p>
                   </a:txBody>
@@ -8703,7 +9143,7 @@
                             <a:srgbClr val="1C2433"/>
                           </a:solidFill>
                         </a:rPr>
-                        <a:t>0.53</a:t>
+                        <a:t>0.527</a:t>
                       </a:r>
                     </a:p>
                   </a:txBody>
@@ -8768,7 +9208,7 @@
                             <a:srgbClr val="1C2433"/>
                           </a:solidFill>
                         </a:rPr>
-                        <a:t>0.537</a:t>
+                        <a:t>0.538</a:t>
                       </a:r>
                     </a:p>
                   </a:txBody>
@@ -8789,7 +9229,7 @@
                             <a:srgbClr val="1C2433"/>
                           </a:solidFill>
                         </a:rPr>
-                        <a:t>0.461</a:t>
+                        <a:t>0.465</a:t>
                       </a:r>
                     </a:p>
                   </a:txBody>
@@ -8854,7 +9294,7 @@
                             <a:srgbClr val="1C2433"/>
                           </a:solidFill>
                         </a:rPr>
-                        <a:t>0.548</a:t>
+                        <a:t>0.55</a:t>
                       </a:r>
                     </a:p>
                   </a:txBody>
@@ -8875,7 +9315,7 @@
                             <a:srgbClr val="1C2433"/>
                           </a:solidFill>
                         </a:rPr>
-                        <a:t>0.452</a:t>
+                        <a:t>0.457</a:t>
                       </a:r>
                     </a:p>
                   </a:txBody>
@@ -8940,7 +9380,7 @@
                             <a:srgbClr val="1C2433"/>
                           </a:solidFill>
                         </a:rPr>
-                        <a:t>0.373</a:t>
+                        <a:t>0.372</a:t>
                       </a:r>
                     </a:p>
                   </a:txBody>
@@ -8961,7 +9401,7 @@
                             <a:srgbClr val="1C2433"/>
                           </a:solidFill>
                         </a:rPr>
-                        <a:t>0.428</a:t>
+                        <a:t>0.435</a:t>
                       </a:r>
                     </a:p>
                   </a:txBody>
@@ -9026,7 +9466,7 @@
                             <a:srgbClr val="1C2433"/>
                           </a:solidFill>
                         </a:rPr>
-                        <a:t>0.182</a:t>
+                        <a:t>0.188</a:t>
                       </a:r>
                     </a:p>
                   </a:txBody>
@@ -9047,7 +9487,7 @@
                             <a:srgbClr val="1C2433"/>
                           </a:solidFill>
                         </a:rPr>
-                        <a:t>0.254</a:t>
+                        <a:t>0.26</a:t>
                       </a:r>
                     </a:p>
                   </a:txBody>
@@ -9091,7 +9531,7 @@
                             <a:srgbClr val="1C2433"/>
                           </a:solidFill>
                         </a:rPr>
-                        <a:t>share_pm_ano</a:t>
+                        <a:t>n_clientes_ano</a:t>
                       </a:r>
                     </a:p>
                   </a:txBody>
@@ -9112,7 +9552,7 @@
                             <a:srgbClr val="1C2433"/>
                           </a:solidFill>
                         </a:rPr>
-                        <a:t>-0.244</a:t>
+                        <a:t>0.144</a:t>
                       </a:r>
                     </a:p>
                   </a:txBody>
@@ -9133,7 +9573,7 @@
                             <a:srgbClr val="1C2433"/>
                           </a:solidFill>
                         </a:rPr>
-                        <a:t>-0.172</a:t>
+                        <a:t>0.23</a:t>
                       </a:r>
                     </a:p>
                   </a:txBody>
@@ -9177,7 +9617,7 @@
                             <a:srgbClr val="1C2433"/>
                           </a:solidFill>
                         </a:rPr>
-                        <a:t>comprimento</a:t>
+                        <a:t>share_maint_ano</a:t>
                       </a:r>
                     </a:p>
                   </a:txBody>
@@ -9198,7 +9638,7 @@
                             <a:srgbClr val="1C2433"/>
                           </a:solidFill>
                         </a:rPr>
-                        <a:t>-0.232</a:t>
+                        <a:t>0.138</a:t>
                       </a:r>
                     </a:p>
                   </a:txBody>
@@ -9219,7 +9659,7 @@
                             <a:srgbClr val="1C2433"/>
                           </a:solidFill>
                         </a:rPr>
-                        <a:t>-0.097</a:t>
+                        <a:t>0.23</a:t>
                       </a:r>
                     </a:p>
                   </a:txBody>
@@ -9263,7 +9703,7 @@
                             <a:srgbClr val="1C2433"/>
                           </a:solidFill>
                         </a:rPr>
-                        <a:t>ano_modelo</a:t>
+                        <a:t>share_pm_ano</a:t>
                       </a:r>
                     </a:p>
                   </a:txBody>
@@ -9284,7 +9724,7 @@
                             <a:srgbClr val="1C2433"/>
                           </a:solidFill>
                         </a:rPr>
-                        <a:t>0.11</a:t>
+                        <a:t>-0.243</a:t>
                       </a:r>
                     </a:p>
                   </a:txBody>
@@ -9305,7 +9745,7 @@
                             <a:srgbClr val="1C2433"/>
                           </a:solidFill>
                         </a:rPr>
-                        <a:t>0.053</a:t>
+                        <a:t>-0.172</a:t>
                       </a:r>
                     </a:p>
                   </a:txBody>
@@ -9364,7 +9804,7 @@
                 <a:gridCol w="1737360"/>
                 <a:gridCol w="1737360"/>
               </a:tblGrid>
-              <a:tr h="399010">
+              <a:tr h="365760">
                 <a:tc>
                   <a:txBody>
                     <a:bodyPr/>
@@ -9429,7 +9869,7 @@
                   </a:tcPr>
                 </a:tc>
               </a:tr>
-              <a:tr h="399010">
+              <a:tr h="365760">
                 <a:tc>
                   <a:txBody>
                     <a:bodyPr/>
@@ -9462,7 +9902,7 @@
                             <a:srgbClr val="1C2433"/>
                           </a:solidFill>
                         </a:rPr>
-                        <a:t>0.5947</a:t>
+                        <a:t>0.5918</a:t>
                       </a:r>
                     </a:p>
                   </a:txBody>
@@ -9483,7 +9923,7 @@
                             <a:srgbClr val="1C2433"/>
                           </a:solidFill>
                         </a:rPr>
-                        <a:t>253</a:t>
+                        <a:t>248</a:t>
                       </a:r>
                     </a:p>
                   </a:txBody>
@@ -9494,7 +9934,7 @@
                   </a:tcPr>
                 </a:tc>
               </a:tr>
-              <a:tr h="399010">
+              <a:tr h="365760">
                 <a:tc>
                   <a:txBody>
                     <a:bodyPr/>
@@ -9527,7 +9967,7 @@
                             <a:srgbClr val="1C2433"/>
                           </a:solidFill>
                         </a:rPr>
-                        <a:t>0.5505</a:t>
+                        <a:t>0.5438</a:t>
                       </a:r>
                     </a:p>
                   </a:txBody>
@@ -9559,7 +9999,7 @@
                   </a:tcPr>
                 </a:tc>
               </a:tr>
-              <a:tr h="399010">
+              <a:tr h="365760">
                 <a:tc>
                   <a:txBody>
                     <a:bodyPr/>
@@ -9592,7 +10032,7 @@
                             <a:srgbClr val="1C2433"/>
                           </a:solidFill>
                         </a:rPr>
-                        <a:t>0.4321</a:t>
+                        <a:t>0.4246</a:t>
                       </a:r>
                     </a:p>
                   </a:txBody>
@@ -9624,7 +10064,7 @@
                   </a:tcPr>
                 </a:tc>
               </a:tr>
-              <a:tr h="399010">
+              <a:tr h="365760">
                 <a:tc>
                   <a:txBody>
                     <a:bodyPr/>
@@ -9657,7 +10097,7 @@
                             <a:srgbClr val="1C2433"/>
                           </a:solidFill>
                         </a:rPr>
-                        <a:t>0.3423</a:t>
+                        <a:t>0.3357</a:t>
                       </a:r>
                     </a:p>
                   </a:txBody>
@@ -9689,7 +10129,7 @@
                   </a:tcPr>
                 </a:tc>
               </a:tr>
-              <a:tr h="399010">
+              <a:tr h="365760">
                 <a:tc>
                   <a:txBody>
                     <a:bodyPr/>
@@ -9722,7 +10162,7 @@
                             <a:srgbClr val="1C2433"/>
                           </a:solidFill>
                         </a:rPr>
-                        <a:t>0.2383</a:t>
+                        <a:t>0.2301</a:t>
                       </a:r>
                     </a:p>
                   </a:txBody>
@@ -9754,7 +10194,7 @@
                   </a:tcPr>
                 </a:tc>
               </a:tr>
-              <a:tr h="399010">
+              <a:tr h="365760">
                 <a:tc>
                   <a:txBody>
                     <a:bodyPr/>
@@ -9766,13 +10206,208 @@
                             <a:srgbClr val="1C2433"/>
                           </a:solidFill>
                         </a:rPr>
+                        <a:t>tipo_manutencao_ano</a:t>
+                      </a:r>
+                    </a:p>
+                  </a:txBody>
+                  <a:tcPr>
+                    <a:solidFill>
+                      <a:srgbClr val="EEEADE"/>
+                    </a:solidFill>
+                  </a:tcPr>
+                </a:tc>
+                <a:tc>
+                  <a:txBody>
+                    <a:bodyPr/>
+                    <a:lstStyle/>
+                    <a:p>
+                      <a:r>
+                        <a:rPr sz="900">
+                          <a:solidFill>
+                            <a:srgbClr val="1C2433"/>
+                          </a:solidFill>
+                        </a:rPr>
+                        <a:t>0.1828</a:t>
+                      </a:r>
+                    </a:p>
+                  </a:txBody>
+                  <a:tcPr>
+                    <a:solidFill>
+                      <a:srgbClr val="EEEADE"/>
+                    </a:solidFill>
+                  </a:tcPr>
+                </a:tc>
+                <a:tc>
+                  <a:txBody>
+                    <a:bodyPr/>
+                    <a:lstStyle/>
+                    <a:p>
+                      <a:r>
+                        <a:rPr sz="900">
+                          <a:solidFill>
+                            <a:srgbClr val="1C2433"/>
+                          </a:solidFill>
+                        </a:rPr>
+                        <a:t>5</a:t>
+                      </a:r>
+                    </a:p>
+                  </a:txBody>
+                  <a:tcPr>
+                    <a:solidFill>
+                      <a:srgbClr val="EEEADE"/>
+                    </a:solidFill>
+                  </a:tcPr>
+                </a:tc>
+              </a:tr>
+              <a:tr h="365760">
+                <a:tc>
+                  <a:txBody>
+                    <a:bodyPr/>
+                    <a:lstStyle/>
+                    <a:p>
+                      <a:r>
+                        <a:rPr sz="900">
+                          <a:solidFill>
+                            <a:srgbClr val="1C2433"/>
+                          </a:solidFill>
+                        </a:rPr>
+                        <a:t>suspension_type</a:t>
+                      </a:r>
+                    </a:p>
+                  </a:txBody>
+                  <a:tcPr>
+                    <a:solidFill>
+                      <a:srgbClr val="FFFFFF"/>
+                    </a:solidFill>
+                  </a:tcPr>
+                </a:tc>
+                <a:tc>
+                  <a:txBody>
+                    <a:bodyPr/>
+                    <a:lstStyle/>
+                    <a:p>
+                      <a:r>
+                        <a:rPr sz="900">
+                          <a:solidFill>
+                            <a:srgbClr val="1C2433"/>
+                          </a:solidFill>
+                        </a:rPr>
+                        <a:t>0.1409</a:t>
+                      </a:r>
+                    </a:p>
+                  </a:txBody>
+                  <a:tcPr>
+                    <a:solidFill>
+                      <a:srgbClr val="FFFFFF"/>
+                    </a:solidFill>
+                  </a:tcPr>
+                </a:tc>
+                <a:tc>
+                  <a:txBody>
+                    <a:bodyPr/>
+                    <a:lstStyle/>
+                    <a:p>
+                      <a:r>
+                        <a:rPr sz="900">
+                          <a:solidFill>
+                            <a:srgbClr val="1C2433"/>
+                          </a:solidFill>
+                        </a:rPr>
+                        <a:t>8</a:t>
+                      </a:r>
+                    </a:p>
+                  </a:txBody>
+                  <a:tcPr>
+                    <a:solidFill>
+                      <a:srgbClr val="FFFFFF"/>
+                    </a:solidFill>
+                  </a:tcPr>
+                </a:tc>
+              </a:tr>
+              <a:tr h="365760">
+                <a:tc>
+                  <a:txBody>
+                    <a:bodyPr/>
+                    <a:lstStyle/>
+                    <a:p>
+                      <a:r>
+                        <a:rPr sz="900">
+                          <a:solidFill>
+                            <a:srgbClr val="1C2433"/>
+                          </a:solidFill>
+                        </a:rPr>
+                        <a:t>provincia_estado</a:t>
+                      </a:r>
+                    </a:p>
+                  </a:txBody>
+                  <a:tcPr>
+                    <a:solidFill>
+                      <a:srgbClr val="EEEADE"/>
+                    </a:solidFill>
+                  </a:tcPr>
+                </a:tc>
+                <a:tc>
+                  <a:txBody>
+                    <a:bodyPr/>
+                    <a:lstStyle/>
+                    <a:p>
+                      <a:r>
+                        <a:rPr sz="900">
+                          <a:solidFill>
+                            <a:srgbClr val="1C2433"/>
+                          </a:solidFill>
+                        </a:rPr>
+                        <a:t>0.1399</a:t>
+                      </a:r>
+                    </a:p>
+                  </a:txBody>
+                  <a:tcPr>
+                    <a:solidFill>
+                      <a:srgbClr val="EEEADE"/>
+                    </a:solidFill>
+                  </a:tcPr>
+                </a:tc>
+                <a:tc>
+                  <a:txBody>
+                    <a:bodyPr/>
+                    <a:lstStyle/>
+                    <a:p>
+                      <a:r>
+                        <a:rPr sz="900">
+                          <a:solidFill>
+                            <a:srgbClr val="1C2433"/>
+                          </a:solidFill>
+                        </a:rPr>
+                        <a:t>24</a:t>
+                      </a:r>
+                    </a:p>
+                  </a:txBody>
+                  <a:tcPr>
+                    <a:solidFill>
+                      <a:srgbClr val="EEEADE"/>
+                    </a:solidFill>
+                  </a:tcPr>
+                </a:tc>
+              </a:tr>
+              <a:tr h="365760">
+                <a:tc>
+                  <a:txBody>
+                    <a:bodyPr/>
+                    <a:lstStyle/>
+                    <a:p>
+                      <a:r>
+                        <a:rPr sz="900">
+                          <a:solidFill>
+                            <a:srgbClr val="1C2433"/>
+                          </a:solidFill>
+                        </a:rPr>
                         <a:t>tire_size</a:t>
                       </a:r>
                     </a:p>
                   </a:txBody>
                   <a:tcPr>
                     <a:solidFill>
-                      <a:srgbClr val="EEEADE"/>
+                      <a:srgbClr val="FFFFFF"/>
                     </a:solidFill>
                   </a:tcPr>
                 </a:tc>
@@ -9787,13 +10422,13 @@
                             <a:srgbClr val="1C2433"/>
                           </a:solidFill>
                         </a:rPr>
-                        <a:t>0.1546</a:t>
-                      </a:r>
-                    </a:p>
-                  </a:txBody>
-                  <a:tcPr>
-                    <a:solidFill>
-                      <a:srgbClr val="EEEADE"/>
+                        <a:t>0.125</a:t>
+                      </a:r>
+                    </a:p>
+                  </a:txBody>
+                  <a:tcPr>
+                    <a:solidFill>
+                      <a:srgbClr val="FFFFFF"/>
                     </a:solidFill>
                   </a:tcPr>
                 </a:tc>
@@ -9814,12 +10449,12 @@
                   </a:txBody>
                   <a:tcPr>
                     <a:solidFill>
-                      <a:srgbClr val="EEEADE"/>
+                      <a:srgbClr val="FFFFFF"/>
                     </a:solidFill>
                   </a:tcPr>
                 </a:tc>
               </a:tr>
-              <a:tr h="399010">
+              <a:tr h="365760">
                 <a:tc>
                   <a:txBody>
                     <a:bodyPr/>
@@ -9831,13 +10466,13 @@
                             <a:srgbClr val="1C2433"/>
                           </a:solidFill>
                         </a:rPr>
-                        <a:t>suspension_type</a:t>
-                      </a:r>
-                    </a:p>
-                  </a:txBody>
-                  <a:tcPr>
-                    <a:solidFill>
-                      <a:srgbClr val="FFFFFF"/>
+                        <a:t>new_used_indicator</a:t>
+                      </a:r>
+                    </a:p>
+                  </a:txBody>
+                  <a:tcPr>
+                    <a:solidFill>
+                      <a:srgbClr val="EEEADE"/>
                     </a:solidFill>
                   </a:tcPr>
                 </a:tc>
@@ -9852,13 +10487,13 @@
                             <a:srgbClr val="1C2433"/>
                           </a:solidFill>
                         </a:rPr>
-                        <a:t>0.1473</a:t>
-                      </a:r>
-                    </a:p>
-                  </a:txBody>
-                  <a:tcPr>
-                    <a:solidFill>
-                      <a:srgbClr val="FFFFFF"/>
+                        <a:t>0.1146</a:t>
+                      </a:r>
+                    </a:p>
+                  </a:txBody>
+                  <a:tcPr>
+                    <a:solidFill>
+                      <a:srgbClr val="EEEADE"/>
                     </a:solidFill>
                   </a:tcPr>
                 </a:tc>
@@ -9873,18 +10508,18 @@
                             <a:srgbClr val="1C2433"/>
                           </a:solidFill>
                         </a:rPr>
-                        <a:t>9</a:t>
-                      </a:r>
-                    </a:p>
-                  </a:txBody>
-                  <a:tcPr>
-                    <a:solidFill>
-                      <a:srgbClr val="FFFFFF"/>
+                        <a:t>2</a:t>
+                      </a:r>
+                    </a:p>
+                  </a:txBody>
+                  <a:tcPr>
+                    <a:solidFill>
+                      <a:srgbClr val="EEEADE"/>
                     </a:solidFill>
                   </a:tcPr>
                 </a:tc>
               </a:tr>
-              <a:tr h="399010">
+              <a:tr h="365760">
                 <a:tc>
                   <a:txBody>
                     <a:bodyPr/>
@@ -9896,13 +10531,13 @@
                             <a:srgbClr val="1C2433"/>
                           </a:solidFill>
                         </a:rPr>
-                        <a:t>provincia_estado</a:t>
-                      </a:r>
-                    </a:p>
-                  </a:txBody>
-                  <a:tcPr>
-                    <a:solidFill>
-                      <a:srgbClr val="EEEADE"/>
+                        <a:t>regiao_operacao</a:t>
+                      </a:r>
+                    </a:p>
+                  </a:txBody>
+                  <a:tcPr>
+                    <a:solidFill>
+                      <a:srgbClr val="FFFFFF"/>
                     </a:solidFill>
                   </a:tcPr>
                 </a:tc>
@@ -9917,13 +10552,13 @@
                             <a:srgbClr val="1C2433"/>
                           </a:solidFill>
                         </a:rPr>
-                        <a:t>0.1424</a:t>
-                      </a:r>
-                    </a:p>
-                  </a:txBody>
-                  <a:tcPr>
-                    <a:solidFill>
-                      <a:srgbClr val="EEEADE"/>
+                        <a:t>0.0759</a:t>
+                      </a:r>
+                    </a:p>
+                  </a:txBody>
+                  <a:tcPr>
+                    <a:solidFill>
+                      <a:srgbClr val="FFFFFF"/>
                     </a:solidFill>
                   </a:tcPr>
                 </a:tc>
@@ -9938,143 +10573,13 @@
                             <a:srgbClr val="1C2433"/>
                           </a:solidFill>
                         </a:rPr>
-                        <a:t>24</a:t>
-                      </a:r>
-                    </a:p>
-                  </a:txBody>
-                  <a:tcPr>
-                    <a:solidFill>
-                      <a:srgbClr val="EEEADE"/>
-                    </a:solidFill>
-                  </a:tcPr>
-                </a:tc>
-              </a:tr>
-              <a:tr h="399010">
-                <a:tc>
-                  <a:txBody>
-                    <a:bodyPr/>
-                    <a:lstStyle/>
-                    <a:p>
-                      <a:r>
-                        <a:rPr sz="900">
-                          <a:solidFill>
-                            <a:srgbClr val="1C2433"/>
-                          </a:solidFill>
-                        </a:rPr>
-                        <a:t>new_used_indicator</a:t>
-                      </a:r>
-                    </a:p>
-                  </a:txBody>
-                  <a:tcPr>
-                    <a:solidFill>
-                      <a:srgbClr val="FFFFFF"/>
-                    </a:solidFill>
-                  </a:tcPr>
-                </a:tc>
-                <a:tc>
-                  <a:txBody>
-                    <a:bodyPr/>
-                    <a:lstStyle/>
-                    <a:p>
-                      <a:r>
-                        <a:rPr sz="900">
-                          <a:solidFill>
-                            <a:srgbClr val="1C2433"/>
-                          </a:solidFill>
-                        </a:rPr>
-                        <a:t>0.1199</a:t>
-                      </a:r>
-                    </a:p>
-                  </a:txBody>
-                  <a:tcPr>
-                    <a:solidFill>
-                      <a:srgbClr val="FFFFFF"/>
-                    </a:solidFill>
-                  </a:tcPr>
-                </a:tc>
-                <a:tc>
-                  <a:txBody>
-                    <a:bodyPr/>
-                    <a:lstStyle/>
-                    <a:p>
-                      <a:r>
-                        <a:rPr sz="900">
-                          <a:solidFill>
-                            <a:srgbClr val="1C2433"/>
-                          </a:solidFill>
-                        </a:rPr>
-                        <a:t>2</a:t>
-                      </a:r>
-                    </a:p>
-                  </a:txBody>
-                  <a:tcPr>
-                    <a:solidFill>
-                      <a:srgbClr val="FFFFFF"/>
-                    </a:solidFill>
-                  </a:tcPr>
-                </a:tc>
-              </a:tr>
-              <a:tr h="399020">
-                <a:tc>
-                  <a:txBody>
-                    <a:bodyPr/>
-                    <a:lstStyle/>
-                    <a:p>
-                      <a:r>
-                        <a:rPr sz="900">
-                          <a:solidFill>
-                            <a:srgbClr val="1C2433"/>
-                          </a:solidFill>
-                        </a:rPr>
-                        <a:t>regiao_operacao</a:t>
-                      </a:r>
-                    </a:p>
-                  </a:txBody>
-                  <a:tcPr>
-                    <a:solidFill>
-                      <a:srgbClr val="EEEADE"/>
-                    </a:solidFill>
-                  </a:tcPr>
-                </a:tc>
-                <a:tc>
-                  <a:txBody>
-                    <a:bodyPr/>
-                    <a:lstStyle/>
-                    <a:p>
-                      <a:r>
-                        <a:rPr sz="900">
-                          <a:solidFill>
-                            <a:srgbClr val="1C2433"/>
-                          </a:solidFill>
-                        </a:rPr>
-                        <a:t>0.0775</a:t>
-                      </a:r>
-                    </a:p>
-                  </a:txBody>
-                  <a:tcPr>
-                    <a:solidFill>
-                      <a:srgbClr val="EEEADE"/>
-                    </a:solidFill>
-                  </a:tcPr>
-                </a:tc>
-                <a:tc>
-                  <a:txBody>
-                    <a:bodyPr/>
-                    <a:lstStyle/>
-                    <a:p>
-                      <a:r>
-                        <a:rPr sz="900">
-                          <a:solidFill>
-                            <a:srgbClr val="1C2433"/>
-                          </a:solidFill>
-                        </a:rPr>
                         <a:t>10</a:t>
                       </a:r>
                     </a:p>
                   </a:txBody>
                   <a:tcPr>
                     <a:solidFill>
-                      <a:srgbClr val="EEEADE"/>
+                      <a:srgbClr val="FFFFFF"/>
                     </a:solidFill>
                   </a:tcPr>
                 </a:tc>
@@ -10704,7 +11209,7 @@
                             <a:srgbClr val="1C2433"/>
                           </a:solidFill>
                         </a:rPr>
-                        <a:t>13.51</a:t>
+                        <a:t>14.13</a:t>
                       </a:r>
                     </a:p>
                   </a:txBody>
@@ -10748,7 +11253,7 @@
                             <a:srgbClr val="1C2433"/>
                           </a:solidFill>
                         </a:rPr>
-                        <a:t>12.87</a:t>
+                        <a:t>12.98</a:t>
                       </a:r>
                     </a:p>
                   </a:txBody>
@@ -10792,7 +11297,7 @@
                             <a:srgbClr val="1C2433"/>
                           </a:solidFill>
                         </a:rPr>
-                        <a:t>12.21</a:t>
+                        <a:t>12.75</a:t>
                       </a:r>
                     </a:p>
                   </a:txBody>
@@ -10836,7 +11341,7 @@
                             <a:srgbClr val="1C2433"/>
                           </a:solidFill>
                         </a:rPr>
-                        <a:t>9.36</a:t>
+                        <a:t>9.48</a:t>
                       </a:r>
                     </a:p>
                   </a:txBody>
@@ -10947,7 +11452,7 @@
                             <a:srgbClr val="1C2433"/>
                           </a:solidFill>
                         </a:rPr>
-                        <a:t>n_os_ano</a:t>
+                        <a:t>tempo_contrato_meses_fim_ano</a:t>
                       </a:r>
                     </a:p>
                   </a:txBody>
@@ -10968,7 +11473,7 @@
                             <a:srgbClr val="1C2433"/>
                           </a:solidFill>
                         </a:rPr>
-                        <a:t>3.95</a:t>
+                        <a:t>4.04</a:t>
                       </a:r>
                     </a:p>
                   </a:txBody>
@@ -10991,7 +11496,7 @@
                             <a:srgbClr val="1C2433"/>
                           </a:solidFill>
                         </a:rPr>
-                        <a:t>anos_ativo_ate_ano_anterior</a:t>
+                        <a:t>n_os_ano</a:t>
                       </a:r>
                     </a:p>
                   </a:txBody>
@@ -11012,7 +11517,7 @@
                             <a:srgbClr val="1C2433"/>
                           </a:solidFill>
                         </a:rPr>
-                        <a:t>3.05</a:t>
+                        <a:t>3.97</a:t>
                       </a:r>
                     </a:p>
                   </a:txBody>
@@ -11035,7 +11540,7 @@
                             <a:srgbClr val="1C2433"/>
                           </a:solidFill>
                         </a:rPr>
-                        <a:t>n_sistemas_vmrs_distintos_ano</a:t>
+                        <a:t>anos_ativo_ate_ano_anterior</a:t>
                       </a:r>
                     </a:p>
                   </a:txBody>
@@ -11056,7 +11561,7 @@
                             <a:srgbClr val="1C2433"/>
                           </a:solidFill>
                         </a:rPr>
-                        <a:t>2.75</a:t>
+                        <a:t>3.44</a:t>
                       </a:r>
                     </a:p>
                   </a:txBody>
@@ -11079,7 +11584,7 @@
                             <a:srgbClr val="1C2433"/>
                           </a:solidFill>
                         </a:rPr>
-                        <a:t>km_rodado_ano</a:t>
+                        <a:t>tempo_contrato_meses_inicio_ano</a:t>
                       </a:r>
                     </a:p>
                   </a:txBody>
@@ -11100,7 +11605,7 @@
                             <a:srgbClr val="1C2433"/>
                           </a:solidFill>
                         </a:rPr>
-                        <a:t>1.57</a:t>
+                        <a:t>3.41</a:t>
                       </a:r>
                     </a:p>
                   </a:txBody>
@@ -11123,7 +11628,7 @@
                             <a:srgbClr val="1C2433"/>
                           </a:solidFill>
                         </a:rPr>
-                        <a:t>km_acumulado_fim_ano</a:t>
+                        <a:t>n_sistemas_vmrs_distintos_ano</a:t>
                       </a:r>
                     </a:p>
                   </a:txBody>
@@ -11144,7 +11649,7 @@
                             <a:srgbClr val="1C2433"/>
                           </a:solidFill>
                         </a:rPr>
-                        <a:t>1.49</a:t>
+                        <a:t>2.82</a:t>
                       </a:r>
                     </a:p>
                   </a:txBody>
@@ -11167,7 +11672,7 @@
                             <a:srgbClr val="1C2433"/>
                           </a:solidFill>
                         </a:rPr>
-                        <a:t>share_pm_ano</a:t>
+                        <a:t>km_rodado_ano</a:t>
                       </a:r>
                     </a:p>
                   </a:txBody>
@@ -11188,7 +11693,7 @@
                             <a:srgbClr val="1C2433"/>
                           </a:solidFill>
                         </a:rPr>
-                        <a:t>1.22</a:t>
+                        <a:t>1.61</a:t>
                       </a:r>
                     </a:p>
                   </a:txBody>
@@ -11401,14 +11906,14 @@
                 <a:gridCol w="2743200"/>
                 <a:gridCol w="2743200"/>
               </a:tblGrid>
-              <a:tr h="298704">
-                <a:tc>
-                  <a:txBody>
-                    <a:bodyPr/>
-                    <a:lstStyle/>
-                    <a:p>
-                      <a:r>
-                        <a:rPr sz="900" b="1">
+              <a:tr h="248920">
+                <a:tc>
+                  <a:txBody>
+                    <a:bodyPr/>
+                    <a:lstStyle/>
+                    <a:p>
+                      <a:r>
+                        <a:rPr sz="800" b="1">
                           <a:solidFill>
                             <a:srgbClr val="FFFFFF"/>
                           </a:solidFill>
@@ -11429,7 +11934,7 @@
                     <a:lstStyle/>
                     <a:p>
                       <a:r>
-                        <a:rPr sz="900" b="1">
+                        <a:rPr sz="800" b="1">
                           <a:solidFill>
                             <a:srgbClr val="FFFFFF"/>
                           </a:solidFill>
@@ -11445,14 +11950,14 @@
                   </a:tcPr>
                 </a:tc>
               </a:tr>
-              <a:tr h="298704">
-                <a:tc>
-                  <a:txBody>
-                    <a:bodyPr/>
-                    <a:lstStyle/>
-                    <a:p>
-                      <a:r>
-                        <a:rPr sz="900">
+              <a:tr h="248920">
+                <a:tc>
+                  <a:txBody>
+                    <a:bodyPr/>
+                    <a:lstStyle/>
+                    <a:p>
+                      <a:r>
+                        <a:rPr sz="800">
                           <a:solidFill>
                             <a:srgbClr val="1C2433"/>
                           </a:solidFill>
@@ -11473,7 +11978,7 @@
                     <a:lstStyle/>
                     <a:p>
                       <a:r>
-                        <a:rPr sz="900">
+                        <a:rPr sz="800">
                           <a:solidFill>
                             <a:srgbClr val="1C2433"/>
                           </a:solidFill>
@@ -11489,14 +11994,366 @@
                   </a:tcPr>
                 </a:tc>
               </a:tr>
-              <a:tr h="298704">
-                <a:tc>
-                  <a:txBody>
-                    <a:bodyPr/>
-                    <a:lstStyle/>
-                    <a:p>
-                      <a:r>
-                        <a:rPr sz="900">
+              <a:tr h="248920">
+                <a:tc>
+                  <a:txBody>
+                    <a:bodyPr/>
+                    <a:lstStyle/>
+                    <a:p>
+                      <a:r>
+                        <a:rPr sz="800">
+                          <a:solidFill>
+                            <a:srgbClr val="1C2433"/>
+                          </a:solidFill>
+                        </a:rPr>
+                        <a:t>franquia_km_mensal_contrato</a:t>
+                      </a:r>
+                    </a:p>
+                  </a:txBody>
+                  <a:tcPr>
+                    <a:solidFill>
+                      <a:srgbClr val="EEEADE"/>
+                    </a:solidFill>
+                  </a:tcPr>
+                </a:tc>
+                <a:tc>
+                  <a:txBody>
+                    <a:bodyPr/>
+                    <a:lstStyle/>
+                    <a:p>
+                      <a:r>
+                        <a:rPr sz="800">
+                          <a:solidFill>
+                            <a:srgbClr val="1C2433"/>
+                          </a:solidFill>
+                        </a:rPr>
+                        <a:t>removida</a:t>
+                      </a:r>
+                    </a:p>
+                  </a:txBody>
+                  <a:tcPr>
+                    <a:solidFill>
+                      <a:srgbClr val="EEEADE"/>
+                    </a:solidFill>
+                  </a:tcPr>
+                </a:tc>
+              </a:tr>
+              <a:tr h="248920">
+                <a:tc>
+                  <a:txBody>
+                    <a:bodyPr/>
+                    <a:lstStyle/>
+                    <a:p>
+                      <a:r>
+                        <a:rPr sz="800">
+                          <a:solidFill>
+                            <a:srgbClr val="1C2433"/>
+                          </a:solidFill>
+                        </a:rPr>
+                        <a:t>cod_cliente_predominante_ano</a:t>
+                      </a:r>
+                    </a:p>
+                  </a:txBody>
+                  <a:tcPr>
+                    <a:solidFill>
+                      <a:srgbClr val="FFFFFF"/>
+                    </a:solidFill>
+                  </a:tcPr>
+                </a:tc>
+                <a:tc>
+                  <a:txBody>
+                    <a:bodyPr/>
+                    <a:lstStyle/>
+                    <a:p>
+                      <a:r>
+                        <a:rPr sz="800">
+                          <a:solidFill>
+                            <a:srgbClr val="1C2433"/>
+                          </a:solidFill>
+                        </a:rPr>
+                        <a:t>removida</a:t>
+                      </a:r>
+                    </a:p>
+                  </a:txBody>
+                  <a:tcPr>
+                    <a:solidFill>
+                      <a:srgbClr val="FFFFFF"/>
+                    </a:solidFill>
+                  </a:tcPr>
+                </a:tc>
+              </a:tr>
+              <a:tr h="248920">
+                <a:tc>
+                  <a:txBody>
+                    <a:bodyPr/>
+                    <a:lstStyle/>
+                    <a:p>
+                      <a:r>
+                        <a:rPr sz="800">
+                          <a:solidFill>
+                            <a:srgbClr val="1C2433"/>
+                          </a:solidFill>
+                        </a:rPr>
+                        <a:t>tipo_manutencao_ano</a:t>
+                      </a:r>
+                    </a:p>
+                  </a:txBody>
+                  <a:tcPr>
+                    <a:solidFill>
+                      <a:srgbClr val="EEEADE"/>
+                    </a:solidFill>
+                  </a:tcPr>
+                </a:tc>
+                <a:tc>
+                  <a:txBody>
+                    <a:bodyPr/>
+                    <a:lstStyle/>
+                    <a:p>
+                      <a:r>
+                        <a:rPr sz="800">
+                          <a:solidFill>
+                            <a:srgbClr val="1C2433"/>
+                          </a:solidFill>
+                        </a:rPr>
+                        <a:t>removida do modelo</a:t>
+                      </a:r>
+                    </a:p>
+                  </a:txBody>
+                  <a:tcPr>
+                    <a:solidFill>
+                      <a:srgbClr val="EEEADE"/>
+                    </a:solidFill>
+                  </a:tcPr>
+                </a:tc>
+              </a:tr>
+              <a:tr h="248920">
+                <a:tc>
+                  <a:txBody>
+                    <a:bodyPr/>
+                    <a:lstStyle/>
+                    <a:p>
+                      <a:r>
+                        <a:rPr sz="800">
+                          <a:solidFill>
+                            <a:srgbClr val="1C2433"/>
+                          </a:solidFill>
+                        </a:rPr>
+                        <a:t>tempo_contrato_meses_inicio_ano</a:t>
+                      </a:r>
+                    </a:p>
+                  </a:txBody>
+                  <a:tcPr>
+                    <a:solidFill>
+                      <a:srgbClr val="FFFFFF"/>
+                    </a:solidFill>
+                  </a:tcPr>
+                </a:tc>
+                <a:tc>
+                  <a:txBody>
+                    <a:bodyPr/>
+                    <a:lstStyle/>
+                    <a:p>
+                      <a:r>
+                        <a:rPr sz="800">
+                          <a:solidFill>
+                            <a:srgbClr val="1C2433"/>
+                          </a:solidFill>
+                        </a:rPr>
+                        <a:t>mantida</a:t>
+                      </a:r>
+                    </a:p>
+                  </a:txBody>
+                  <a:tcPr>
+                    <a:solidFill>
+                      <a:srgbClr val="FFFFFF"/>
+                    </a:solidFill>
+                  </a:tcPr>
+                </a:tc>
+              </a:tr>
+              <a:tr h="248920">
+                <a:tc>
+                  <a:txBody>
+                    <a:bodyPr/>
+                    <a:lstStyle/>
+                    <a:p>
+                      <a:r>
+                        <a:rPr sz="800">
+                          <a:solidFill>
+                            <a:srgbClr val="1C2433"/>
+                          </a:solidFill>
+                        </a:rPr>
+                        <a:t>tempo_contrato_meses_fim_ano</a:t>
+                      </a:r>
+                    </a:p>
+                  </a:txBody>
+                  <a:tcPr>
+                    <a:solidFill>
+                      <a:srgbClr val="EEEADE"/>
+                    </a:solidFill>
+                  </a:tcPr>
+                </a:tc>
+                <a:tc>
+                  <a:txBody>
+                    <a:bodyPr/>
+                    <a:lstStyle/>
+                    <a:p>
+                      <a:r>
+                        <a:rPr sz="800">
+                          <a:solidFill>
+                            <a:srgbClr val="1C2433"/>
+                          </a:solidFill>
+                        </a:rPr>
+                        <a:t>mantida (so explicativo)</a:t>
+                      </a:r>
+                    </a:p>
+                  </a:txBody>
+                  <a:tcPr>
+                    <a:solidFill>
+                      <a:srgbClr val="EEEADE"/>
+                    </a:solidFill>
+                  </a:tcPr>
+                </a:tc>
+              </a:tr>
+              <a:tr h="248920">
+                <a:tc>
+                  <a:txBody>
+                    <a:bodyPr/>
+                    <a:lstStyle/>
+                    <a:p>
+                      <a:r>
+                        <a:rPr sz="800">
+                          <a:solidFill>
+                            <a:srgbClr val="1C2433"/>
+                          </a:solidFill>
+                        </a:rPr>
+                        <a:t>share_maint_ano</a:t>
+                      </a:r>
+                    </a:p>
+                  </a:txBody>
+                  <a:tcPr>
+                    <a:solidFill>
+                      <a:srgbClr val="FFFFFF"/>
+                    </a:solidFill>
+                  </a:tcPr>
+                </a:tc>
+                <a:tc>
+                  <a:txBody>
+                    <a:bodyPr/>
+                    <a:lstStyle/>
+                    <a:p>
+                      <a:r>
+                        <a:rPr sz="800">
+                          <a:solidFill>
+                            <a:srgbClr val="1C2433"/>
+                          </a:solidFill>
+                        </a:rPr>
+                        <a:t>mantida (so explicativo)</a:t>
+                      </a:r>
+                    </a:p>
+                  </a:txBody>
+                  <a:tcPr>
+                    <a:solidFill>
+                      <a:srgbClr val="FFFFFF"/>
+                    </a:solidFill>
+                  </a:tcPr>
+                </a:tc>
+              </a:tr>
+              <a:tr h="248920">
+                <a:tc>
+                  <a:txBody>
+                    <a:bodyPr/>
+                    <a:lstStyle/>
+                    <a:p>
+                      <a:r>
+                        <a:rPr sz="800">
+                          <a:solidFill>
+                            <a:srgbClr val="1C2433"/>
+                          </a:solidFill>
+                        </a:rPr>
+                        <a:t>n_clientes_ano</a:t>
+                      </a:r>
+                    </a:p>
+                  </a:txBody>
+                  <a:tcPr>
+                    <a:solidFill>
+                      <a:srgbClr val="EEEADE"/>
+                    </a:solidFill>
+                  </a:tcPr>
+                </a:tc>
+                <a:tc>
+                  <a:txBody>
+                    <a:bodyPr/>
+                    <a:lstStyle/>
+                    <a:p>
+                      <a:r>
+                        <a:rPr sz="800">
+                          <a:solidFill>
+                            <a:srgbClr val="1C2433"/>
+                          </a:solidFill>
+                        </a:rPr>
+                        <a:t>mantida (so explicativo)</a:t>
+                      </a:r>
+                    </a:p>
+                  </a:txBody>
+                  <a:tcPr>
+                    <a:solidFill>
+                      <a:srgbClr val="EEEADE"/>
+                    </a:solidFill>
+                  </a:tcPr>
+                </a:tc>
+              </a:tr>
+              <a:tr h="248920">
+                <a:tc>
+                  <a:txBody>
+                    <a:bodyPr/>
+                    <a:lstStyle/>
+                    <a:p>
+                      <a:r>
+                        <a:rPr sz="800">
+                          <a:solidFill>
+                            <a:srgbClr val="1C2433"/>
+                          </a:solidFill>
+                        </a:rPr>
+                        <a:t>trocou_contrato_ano</a:t>
+                      </a:r>
+                    </a:p>
+                  </a:txBody>
+                  <a:tcPr>
+                    <a:solidFill>
+                      <a:srgbClr val="FFFFFF"/>
+                    </a:solidFill>
+                  </a:tcPr>
+                </a:tc>
+                <a:tc>
+                  <a:txBody>
+                    <a:bodyPr/>
+                    <a:lstStyle/>
+                    <a:p>
+                      <a:r>
+                        <a:rPr sz="800">
+                          <a:solidFill>
+                            <a:srgbClr val="1C2433"/>
+                          </a:solidFill>
+                        </a:rPr>
+                        <a:t>mantida (so explicativo)</a:t>
+                      </a:r>
+                    </a:p>
+                  </a:txBody>
+                  <a:tcPr>
+                    <a:solidFill>
+                      <a:srgbClr val="FFFFFF"/>
+                    </a:solidFill>
+                  </a:tcPr>
+                </a:tc>
+              </a:tr>
+              <a:tr h="248920">
+                <a:tc>
+                  <a:txBody>
+                    <a:bodyPr/>
+                    <a:lstStyle/>
+                    <a:p>
+                      <a:r>
+                        <a:rPr sz="800">
                           <a:solidFill>
                             <a:srgbClr val="1C2433"/>
                           </a:solidFill>
@@ -11517,7 +12374,7 @@
                     <a:lstStyle/>
                     <a:p>
                       <a:r>
-                        <a:rPr sz="900">
+                        <a:rPr sz="800">
                           <a:solidFill>
                             <a:srgbClr val="1C2433"/>
                           </a:solidFill>
@@ -11533,14 +12390,14 @@
                   </a:tcPr>
                 </a:tc>
               </a:tr>
-              <a:tr h="298704">
-                <a:tc>
-                  <a:txBody>
-                    <a:bodyPr/>
-                    <a:lstStyle/>
-                    <a:p>
-                      <a:r>
-                        <a:rPr sz="900">
+              <a:tr h="248920">
+                <a:tc>
+                  <a:txBody>
+                    <a:bodyPr/>
+                    <a:lstStyle/>
+                    <a:p>
+                      <a:r>
+                        <a:rPr sz="800">
                           <a:solidFill>
                             <a:srgbClr val="1C2433"/>
                           </a:solidFill>
@@ -11561,7 +12418,7 @@
                     <a:lstStyle/>
                     <a:p>
                       <a:r>
-                        <a:rPr sz="900">
+                        <a:rPr sz="800">
                           <a:solidFill>
                             <a:srgbClr val="1C2433"/>
                           </a:solidFill>
@@ -11577,14 +12434,14 @@
                   </a:tcPr>
                 </a:tc>
               </a:tr>
-              <a:tr h="298704">
-                <a:tc>
-                  <a:txBody>
-                    <a:bodyPr/>
-                    <a:lstStyle/>
-                    <a:p>
-                      <a:r>
-                        <a:rPr sz="900">
+              <a:tr h="248920">
+                <a:tc>
+                  <a:txBody>
+                    <a:bodyPr/>
+                    <a:lstStyle/>
+                    <a:p>
+                      <a:r>
+                        <a:rPr sz="800">
                           <a:solidFill>
                             <a:srgbClr val="1C2433"/>
                           </a:solidFill>
@@ -11605,7 +12462,7 @@
                     <a:lstStyle/>
                     <a:p>
                       <a:r>
-                        <a:rPr sz="900">
+                        <a:rPr sz="800">
                           <a:solidFill>
                             <a:srgbClr val="1C2433"/>
                           </a:solidFill>
@@ -11621,14 +12478,14 @@
                   </a:tcPr>
                 </a:tc>
               </a:tr>
-              <a:tr h="298704">
-                <a:tc>
-                  <a:txBody>
-                    <a:bodyPr/>
-                    <a:lstStyle/>
-                    <a:p>
-                      <a:r>
-                        <a:rPr sz="900">
+              <a:tr h="248920">
+                <a:tc>
+                  <a:txBody>
+                    <a:bodyPr/>
+                    <a:lstStyle/>
+                    <a:p>
+                      <a:r>
+                        <a:rPr sz="800">
                           <a:solidFill>
                             <a:srgbClr val="1C2433"/>
                           </a:solidFill>
@@ -11649,7 +12506,7 @@
                     <a:lstStyle/>
                     <a:p>
                       <a:r>
-                        <a:rPr sz="900">
+                        <a:rPr sz="800">
                           <a:solidFill>
                             <a:srgbClr val="1C2433"/>
                           </a:solidFill>
@@ -11665,14 +12522,14 @@
                   </a:tcPr>
                 </a:tc>
               </a:tr>
-              <a:tr h="298704">
-                <a:tc>
-                  <a:txBody>
-                    <a:bodyPr/>
-                    <a:lstStyle/>
-                    <a:p>
-                      <a:r>
-                        <a:rPr sz="900">
+              <a:tr h="248920">
+                <a:tc>
+                  <a:txBody>
+                    <a:bodyPr/>
+                    <a:lstStyle/>
+                    <a:p>
+                      <a:r>
+                        <a:rPr sz="800">
                           <a:solidFill>
                             <a:srgbClr val="1C2433"/>
                           </a:solidFill>
@@ -11693,7 +12550,7 @@
                     <a:lstStyle/>
                     <a:p>
                       <a:r>
-                        <a:rPr sz="900">
+                        <a:rPr sz="800">
                           <a:solidFill>
                             <a:srgbClr val="1C2433"/>
                           </a:solidFill>
@@ -11709,14 +12566,14 @@
                   </a:tcPr>
                 </a:tc>
               </a:tr>
-              <a:tr h="298704">
-                <a:tc>
-                  <a:txBody>
-                    <a:bodyPr/>
-                    <a:lstStyle/>
-                    <a:p>
-                      <a:r>
-                        <a:rPr sz="900">
+              <a:tr h="248920">
+                <a:tc>
+                  <a:txBody>
+                    <a:bodyPr/>
+                    <a:lstStyle/>
+                    <a:p>
+                      <a:r>
+                        <a:rPr sz="800">
                           <a:solidFill>
                             <a:srgbClr val="1C2433"/>
                           </a:solidFill>
@@ -11737,7 +12594,7 @@
                     <a:lstStyle/>
                     <a:p>
                       <a:r>
-                        <a:rPr sz="900">
+                        <a:rPr sz="800">
                           <a:solidFill>
                             <a:srgbClr val="1C2433"/>
                           </a:solidFill>
@@ -11753,14 +12610,14 @@
                   </a:tcPr>
                 </a:tc>
               </a:tr>
-              <a:tr h="298704">
-                <a:tc>
-                  <a:txBody>
-                    <a:bodyPr/>
-                    <a:lstStyle/>
-                    <a:p>
-                      <a:r>
-                        <a:rPr sz="900">
+              <a:tr h="248920">
+                <a:tc>
+                  <a:txBody>
+                    <a:bodyPr/>
+                    <a:lstStyle/>
+                    <a:p>
+                      <a:r>
+                        <a:rPr sz="800">
                           <a:solidFill>
                             <a:srgbClr val="1C2433"/>
                           </a:solidFill>
@@ -11781,7 +12638,7 @@
                     <a:lstStyle/>
                     <a:p>
                       <a:r>
-                        <a:rPr sz="900">
+                        <a:rPr sz="800">
                           <a:solidFill>
                             <a:srgbClr val="1C2433"/>
                           </a:solidFill>
@@ -11797,14 +12654,14 @@
                   </a:tcPr>
                 </a:tc>
               </a:tr>
-              <a:tr h="298704">
-                <a:tc>
-                  <a:txBody>
-                    <a:bodyPr/>
-                    <a:lstStyle/>
-                    <a:p>
-                      <a:r>
-                        <a:rPr sz="900">
+              <a:tr h="248920">
+                <a:tc>
+                  <a:txBody>
+                    <a:bodyPr/>
+                    <a:lstStyle/>
+                    <a:p>
+                      <a:r>
+                        <a:rPr sz="800">
                           <a:solidFill>
                             <a:srgbClr val="1C2433"/>
                           </a:solidFill>
@@ -11825,7 +12682,7 @@
                     <a:lstStyle/>
                     <a:p>
                       <a:r>
-                        <a:rPr sz="900">
+                        <a:rPr sz="800">
                           <a:solidFill>
                             <a:srgbClr val="1C2433"/>
                           </a:solidFill>
@@ -11837,226 +12694,6 @@
                   <a:tcPr>
                     <a:solidFill>
                       <a:srgbClr val="FFFFFF"/>
-                    </a:solidFill>
-                  </a:tcPr>
-                </a:tc>
-              </a:tr>
-              <a:tr h="298704">
-                <a:tc>
-                  <a:txBody>
-                    <a:bodyPr/>
-                    <a:lstStyle/>
-                    <a:p>
-                      <a:r>
-                        <a:rPr sz="900">
-                          <a:solidFill>
-                            <a:srgbClr val="1C2433"/>
-                          </a:solidFill>
-                        </a:rPr>
-                        <a:t>unit_subtype</a:t>
-                      </a:r>
-                    </a:p>
-                  </a:txBody>
-                  <a:tcPr>
-                    <a:solidFill>
-                      <a:srgbClr val="EEEADE"/>
-                    </a:solidFill>
-                  </a:tcPr>
-                </a:tc>
-                <a:tc>
-                  <a:txBody>
-                    <a:bodyPr/>
-                    <a:lstStyle/>
-                    <a:p>
-                      <a:r>
-                        <a:rPr sz="900">
-                          <a:solidFill>
-                            <a:srgbClr val="1C2433"/>
-                          </a:solidFill>
-                        </a:rPr>
-                        <a:t>mantida</a:t>
-                      </a:r>
-                    </a:p>
-                  </a:txBody>
-                  <a:tcPr>
-                    <a:solidFill>
-                      <a:srgbClr val="EEEADE"/>
-                    </a:solidFill>
-                  </a:tcPr>
-                </a:tc>
-              </a:tr>
-              <a:tr h="298704">
-                <a:tc>
-                  <a:txBody>
-                    <a:bodyPr/>
-                    <a:lstStyle/>
-                    <a:p>
-                      <a:r>
-                        <a:rPr sz="900">
-                          <a:solidFill>
-                            <a:srgbClr val="1C2433"/>
-                          </a:solidFill>
-                        </a:rPr>
-                        <a:t>tire_size</a:t>
-                      </a:r>
-                    </a:p>
-                  </a:txBody>
-                  <a:tcPr>
-                    <a:solidFill>
-                      <a:srgbClr val="FFFFFF"/>
-                    </a:solidFill>
-                  </a:tcPr>
-                </a:tc>
-                <a:tc>
-                  <a:txBody>
-                    <a:bodyPr/>
-                    <a:lstStyle/>
-                    <a:p>
-                      <a:r>
-                        <a:rPr sz="900">
-                          <a:solidFill>
-                            <a:srgbClr val="1C2433"/>
-                          </a:solidFill>
-                        </a:rPr>
-                        <a:t>mantida</a:t>
-                      </a:r>
-                    </a:p>
-                  </a:txBody>
-                  <a:tcPr>
-                    <a:solidFill>
-                      <a:srgbClr val="FFFFFF"/>
-                    </a:solidFill>
-                  </a:tcPr>
-                </a:tc>
-              </a:tr>
-              <a:tr h="298704">
-                <a:tc>
-                  <a:txBody>
-                    <a:bodyPr/>
-                    <a:lstStyle/>
-                    <a:p>
-                      <a:r>
-                        <a:rPr sz="900">
-                          <a:solidFill>
-                            <a:srgbClr val="1C2433"/>
-                          </a:solidFill>
-                        </a:rPr>
-                        <a:t>suspension_type</a:t>
-                      </a:r>
-                    </a:p>
-                  </a:txBody>
-                  <a:tcPr>
-                    <a:solidFill>
-                      <a:srgbClr val="EEEADE"/>
-                    </a:solidFill>
-                  </a:tcPr>
-                </a:tc>
-                <a:tc>
-                  <a:txBody>
-                    <a:bodyPr/>
-                    <a:lstStyle/>
-                    <a:p>
-                      <a:r>
-                        <a:rPr sz="900">
-                          <a:solidFill>
-                            <a:srgbClr val="1C2433"/>
-                          </a:solidFill>
-                        </a:rPr>
-                        <a:t>mantida</a:t>
-                      </a:r>
-                    </a:p>
-                  </a:txBody>
-                  <a:tcPr>
-                    <a:solidFill>
-                      <a:srgbClr val="EEEADE"/>
-                    </a:solidFill>
-                  </a:tcPr>
-                </a:tc>
-              </a:tr>
-              <a:tr h="298704">
-                <a:tc>
-                  <a:txBody>
-                    <a:bodyPr/>
-                    <a:lstStyle/>
-                    <a:p>
-                      <a:r>
-                        <a:rPr sz="900">
-                          <a:solidFill>
-                            <a:srgbClr val="1C2433"/>
-                          </a:solidFill>
-                        </a:rPr>
-                        <a:t>new_used_indicator</a:t>
-                      </a:r>
-                    </a:p>
-                  </a:txBody>
-                  <a:tcPr>
-                    <a:solidFill>
-                      <a:srgbClr val="FFFFFF"/>
-                    </a:solidFill>
-                  </a:tcPr>
-                </a:tc>
-                <a:tc>
-                  <a:txBody>
-                    <a:bodyPr/>
-                    <a:lstStyle/>
-                    <a:p>
-                      <a:r>
-                        <a:rPr sz="900">
-                          <a:solidFill>
-                            <a:srgbClr val="1C2433"/>
-                          </a:solidFill>
-                        </a:rPr>
-                        <a:t>mantida</a:t>
-                      </a:r>
-                    </a:p>
-                  </a:txBody>
-                  <a:tcPr>
-                    <a:solidFill>
-                      <a:srgbClr val="FFFFFF"/>
-                    </a:solidFill>
-                  </a:tcPr>
-                </a:tc>
-              </a:tr>
-              <a:tr h="298704">
-                <a:tc>
-                  <a:txBody>
-                    <a:bodyPr/>
-                    <a:lstStyle/>
-                    <a:p>
-                      <a:r>
-                        <a:rPr sz="900">
-                          <a:solidFill>
-                            <a:srgbClr val="1C2433"/>
-                          </a:solidFill>
-                        </a:rPr>
-                        <a:t>cod_montadora</a:t>
-                      </a:r>
-                    </a:p>
-                  </a:txBody>
-                  <a:tcPr>
-                    <a:solidFill>
-                      <a:srgbClr val="EEEADE"/>
-                    </a:solidFill>
-                  </a:tcPr>
-                </a:tc>
-                <a:tc>
-                  <a:txBody>
-                    <a:bodyPr/>
-                    <a:lstStyle/>
-                    <a:p>
-                      <a:r>
-                        <a:rPr sz="900">
-                          <a:solidFill>
-                            <a:srgbClr val="1C2433"/>
-                          </a:solidFill>
-                        </a:rPr>
-                        <a:t>mantida</a:t>
-                      </a:r>
-                    </a:p>
-                  </a:txBody>
-                  <a:tcPr>
-                    <a:solidFill>
-                      <a:srgbClr val="EEEADE"/>
                     </a:solidFill>
                   </a:tcPr>
                 </a:tc>
@@ -12087,14 +12724,14 @@
                 <a:gridCol w="2743200"/>
                 <a:gridCol w="2743200"/>
               </a:tblGrid>
-              <a:tr h="344658">
-                <a:tc>
-                  <a:txBody>
-                    <a:bodyPr/>
-                    <a:lstStyle/>
-                    <a:p>
-                      <a:r>
-                        <a:rPr sz="900" b="1">
+              <a:tr h="248920">
+                <a:tc>
+                  <a:txBody>
+                    <a:bodyPr/>
+                    <a:lstStyle/>
+                    <a:p>
+                      <a:r>
+                        <a:rPr sz="800" b="1">
                           <a:solidFill>
                             <a:srgbClr val="FFFFFF"/>
                           </a:solidFill>
@@ -12115,7 +12752,7 @@
                     <a:lstStyle/>
                     <a:p>
                       <a:r>
-                        <a:rPr sz="900" b="1">
+                        <a:rPr sz="800" b="1">
                           <a:solidFill>
                             <a:srgbClr val="FFFFFF"/>
                           </a:solidFill>
@@ -12131,14 +12768,234 @@
                   </a:tcPr>
                 </a:tc>
               </a:tr>
-              <a:tr h="344658">
-                <a:tc>
-                  <a:txBody>
-                    <a:bodyPr/>
-                    <a:lstStyle/>
-                    <a:p>
-                      <a:r>
-                        <a:rPr sz="900">
+              <a:tr h="248920">
+                <a:tc>
+                  <a:txBody>
+                    <a:bodyPr/>
+                    <a:lstStyle/>
+                    <a:p>
+                      <a:r>
+                        <a:rPr sz="800">
+                          <a:solidFill>
+                            <a:srgbClr val="1C2433"/>
+                          </a:solidFill>
+                        </a:rPr>
+                        <a:t>unit_subtype</a:t>
+                      </a:r>
+                    </a:p>
+                  </a:txBody>
+                  <a:tcPr>
+                    <a:solidFill>
+                      <a:srgbClr val="FFFFFF"/>
+                    </a:solidFill>
+                  </a:tcPr>
+                </a:tc>
+                <a:tc>
+                  <a:txBody>
+                    <a:bodyPr/>
+                    <a:lstStyle/>
+                    <a:p>
+                      <a:r>
+                        <a:rPr sz="800">
+                          <a:solidFill>
+                            <a:srgbClr val="1C2433"/>
+                          </a:solidFill>
+                        </a:rPr>
+                        <a:t>mantida</a:t>
+                      </a:r>
+                    </a:p>
+                  </a:txBody>
+                  <a:tcPr>
+                    <a:solidFill>
+                      <a:srgbClr val="FFFFFF"/>
+                    </a:solidFill>
+                  </a:tcPr>
+                </a:tc>
+              </a:tr>
+              <a:tr h="248920">
+                <a:tc>
+                  <a:txBody>
+                    <a:bodyPr/>
+                    <a:lstStyle/>
+                    <a:p>
+                      <a:r>
+                        <a:rPr sz="800">
+                          <a:solidFill>
+                            <a:srgbClr val="1C2433"/>
+                          </a:solidFill>
+                        </a:rPr>
+                        <a:t>tire_size</a:t>
+                      </a:r>
+                    </a:p>
+                  </a:txBody>
+                  <a:tcPr>
+                    <a:solidFill>
+                      <a:srgbClr val="EEEADE"/>
+                    </a:solidFill>
+                  </a:tcPr>
+                </a:tc>
+                <a:tc>
+                  <a:txBody>
+                    <a:bodyPr/>
+                    <a:lstStyle/>
+                    <a:p>
+                      <a:r>
+                        <a:rPr sz="800">
+                          <a:solidFill>
+                            <a:srgbClr val="1C2433"/>
+                          </a:solidFill>
+                        </a:rPr>
+                        <a:t>mantida</a:t>
+                      </a:r>
+                    </a:p>
+                  </a:txBody>
+                  <a:tcPr>
+                    <a:solidFill>
+                      <a:srgbClr val="EEEADE"/>
+                    </a:solidFill>
+                  </a:tcPr>
+                </a:tc>
+              </a:tr>
+              <a:tr h="248920">
+                <a:tc>
+                  <a:txBody>
+                    <a:bodyPr/>
+                    <a:lstStyle/>
+                    <a:p>
+                      <a:r>
+                        <a:rPr sz="800">
+                          <a:solidFill>
+                            <a:srgbClr val="1C2433"/>
+                          </a:solidFill>
+                        </a:rPr>
+                        <a:t>suspension_type</a:t>
+                      </a:r>
+                    </a:p>
+                  </a:txBody>
+                  <a:tcPr>
+                    <a:solidFill>
+                      <a:srgbClr val="FFFFFF"/>
+                    </a:solidFill>
+                  </a:tcPr>
+                </a:tc>
+                <a:tc>
+                  <a:txBody>
+                    <a:bodyPr/>
+                    <a:lstStyle/>
+                    <a:p>
+                      <a:r>
+                        <a:rPr sz="800">
+                          <a:solidFill>
+                            <a:srgbClr val="1C2433"/>
+                          </a:solidFill>
+                        </a:rPr>
+                        <a:t>mantida</a:t>
+                      </a:r>
+                    </a:p>
+                  </a:txBody>
+                  <a:tcPr>
+                    <a:solidFill>
+                      <a:srgbClr val="FFFFFF"/>
+                    </a:solidFill>
+                  </a:tcPr>
+                </a:tc>
+              </a:tr>
+              <a:tr h="248920">
+                <a:tc>
+                  <a:txBody>
+                    <a:bodyPr/>
+                    <a:lstStyle/>
+                    <a:p>
+                      <a:r>
+                        <a:rPr sz="800">
+                          <a:solidFill>
+                            <a:srgbClr val="1C2433"/>
+                          </a:solidFill>
+                        </a:rPr>
+                        <a:t>new_used_indicator</a:t>
+                      </a:r>
+                    </a:p>
+                  </a:txBody>
+                  <a:tcPr>
+                    <a:solidFill>
+                      <a:srgbClr val="EEEADE"/>
+                    </a:solidFill>
+                  </a:tcPr>
+                </a:tc>
+                <a:tc>
+                  <a:txBody>
+                    <a:bodyPr/>
+                    <a:lstStyle/>
+                    <a:p>
+                      <a:r>
+                        <a:rPr sz="800">
+                          <a:solidFill>
+                            <a:srgbClr val="1C2433"/>
+                          </a:solidFill>
+                        </a:rPr>
+                        <a:t>mantida</a:t>
+                      </a:r>
+                    </a:p>
+                  </a:txBody>
+                  <a:tcPr>
+                    <a:solidFill>
+                      <a:srgbClr val="EEEADE"/>
+                    </a:solidFill>
+                  </a:tcPr>
+                </a:tc>
+              </a:tr>
+              <a:tr h="248920">
+                <a:tc>
+                  <a:txBody>
+                    <a:bodyPr/>
+                    <a:lstStyle/>
+                    <a:p>
+                      <a:r>
+                        <a:rPr sz="800">
+                          <a:solidFill>
+                            <a:srgbClr val="1C2433"/>
+                          </a:solidFill>
+                        </a:rPr>
+                        <a:t>cod_montadora</a:t>
+                      </a:r>
+                    </a:p>
+                  </a:txBody>
+                  <a:tcPr>
+                    <a:solidFill>
+                      <a:srgbClr val="FFFFFF"/>
+                    </a:solidFill>
+                  </a:tcPr>
+                </a:tc>
+                <a:tc>
+                  <a:txBody>
+                    <a:bodyPr/>
+                    <a:lstStyle/>
+                    <a:p>
+                      <a:r>
+                        <a:rPr sz="800">
+                          <a:solidFill>
+                            <a:srgbClr val="1C2433"/>
+                          </a:solidFill>
+                        </a:rPr>
+                        <a:t>mantida</a:t>
+                      </a:r>
+                    </a:p>
+                  </a:txBody>
+                  <a:tcPr>
+                    <a:solidFill>
+                      <a:srgbClr val="FFFFFF"/>
+                    </a:solidFill>
+                  </a:tcPr>
+                </a:tc>
+              </a:tr>
+              <a:tr h="248920">
+                <a:tc>
+                  <a:txBody>
+                    <a:bodyPr/>
+                    <a:lstStyle/>
+                    <a:p>
+                      <a:r>
+                        <a:rPr sz="800">
                           <a:solidFill>
                             <a:srgbClr val="1C2433"/>
                           </a:solidFill>
@@ -12149,17 +13006,17 @@
                   </a:txBody>
                   <a:tcPr>
                     <a:solidFill>
-                      <a:srgbClr val="FFFFFF"/>
-                    </a:solidFill>
-                  </a:tcPr>
-                </a:tc>
-                <a:tc>
-                  <a:txBody>
-                    <a:bodyPr/>
-                    <a:lstStyle/>
-                    <a:p>
-                      <a:r>
-                        <a:rPr sz="900">
+                      <a:srgbClr val="EEEADE"/>
+                    </a:solidFill>
+                  </a:tcPr>
+                </a:tc>
+                <a:tc>
+                  <a:txBody>
+                    <a:bodyPr/>
+                    <a:lstStyle/>
+                    <a:p>
+                      <a:r>
+                        <a:rPr sz="800">
                           <a:solidFill>
                             <a:srgbClr val="1C2433"/>
                           </a:solidFill>
@@ -12170,19 +13027,19 @@
                   </a:txBody>
                   <a:tcPr>
                     <a:solidFill>
-                      <a:srgbClr val="FFFFFF"/>
+                      <a:srgbClr val="EEEADE"/>
                     </a:solidFill>
                   </a:tcPr>
                 </a:tc>
               </a:tr>
-              <a:tr h="344658">
-                <a:tc>
-                  <a:txBody>
-                    <a:bodyPr/>
-                    <a:lstStyle/>
-                    <a:p>
-                      <a:r>
-                        <a:rPr sz="900">
+              <a:tr h="248920">
+                <a:tc>
+                  <a:txBody>
+                    <a:bodyPr/>
+                    <a:lstStyle/>
+                    <a:p>
+                      <a:r>
+                        <a:rPr sz="800">
                           <a:solidFill>
                             <a:srgbClr val="1C2433"/>
                           </a:solidFill>
@@ -12193,17 +13050,17 @@
                   </a:txBody>
                   <a:tcPr>
                     <a:solidFill>
-                      <a:srgbClr val="EEEADE"/>
-                    </a:solidFill>
-                  </a:tcPr>
-                </a:tc>
-                <a:tc>
-                  <a:txBody>
-                    <a:bodyPr/>
-                    <a:lstStyle/>
-                    <a:p>
-                      <a:r>
-                        <a:rPr sz="900">
+                      <a:srgbClr val="FFFFFF"/>
+                    </a:solidFill>
+                  </a:tcPr>
+                </a:tc>
+                <a:tc>
+                  <a:txBody>
+                    <a:bodyPr/>
+                    <a:lstStyle/>
+                    <a:p>
+                      <a:r>
+                        <a:rPr sz="800">
                           <a:solidFill>
                             <a:srgbClr val="1C2433"/>
                           </a:solidFill>
@@ -12214,19 +13071,19 @@
                   </a:txBody>
                   <a:tcPr>
                     <a:solidFill>
-                      <a:srgbClr val="EEEADE"/>
+                      <a:srgbClr val="FFFFFF"/>
                     </a:solidFill>
                   </a:tcPr>
                 </a:tc>
               </a:tr>
-              <a:tr h="344658">
-                <a:tc>
-                  <a:txBody>
-                    <a:bodyPr/>
-                    <a:lstStyle/>
-                    <a:p>
-                      <a:r>
-                        <a:rPr sz="900">
+              <a:tr h="248920">
+                <a:tc>
+                  <a:txBody>
+                    <a:bodyPr/>
+                    <a:lstStyle/>
+                    <a:p>
+                      <a:r>
+                        <a:rPr sz="800">
                           <a:solidFill>
                             <a:srgbClr val="1C2433"/>
                           </a:solidFill>
@@ -12237,17 +13094,17 @@
                   </a:txBody>
                   <a:tcPr>
                     <a:solidFill>
-                      <a:srgbClr val="FFFFFF"/>
-                    </a:solidFill>
-                  </a:tcPr>
-                </a:tc>
-                <a:tc>
-                  <a:txBody>
-                    <a:bodyPr/>
-                    <a:lstStyle/>
-                    <a:p>
-                      <a:r>
-                        <a:rPr sz="900">
+                      <a:srgbClr val="EEEADE"/>
+                    </a:solidFill>
+                  </a:tcPr>
+                </a:tc>
+                <a:tc>
+                  <a:txBody>
+                    <a:bodyPr/>
+                    <a:lstStyle/>
+                    <a:p>
+                      <a:r>
+                        <a:rPr sz="800">
                           <a:solidFill>
                             <a:srgbClr val="1C2433"/>
                           </a:solidFill>
@@ -12258,19 +13115,19 @@
                   </a:txBody>
                   <a:tcPr>
                     <a:solidFill>
-                      <a:srgbClr val="FFFFFF"/>
+                      <a:srgbClr val="EEEADE"/>
                     </a:solidFill>
                   </a:tcPr>
                 </a:tc>
               </a:tr>
-              <a:tr h="344658">
-                <a:tc>
-                  <a:txBody>
-                    <a:bodyPr/>
-                    <a:lstStyle/>
-                    <a:p>
-                      <a:r>
-                        <a:rPr sz="900">
+              <a:tr h="248920">
+                <a:tc>
+                  <a:txBody>
+                    <a:bodyPr/>
+                    <a:lstStyle/>
+                    <a:p>
+                      <a:r>
+                        <a:rPr sz="800">
                           <a:solidFill>
                             <a:srgbClr val="1C2433"/>
                           </a:solidFill>
@@ -12281,17 +13138,17 @@
                   </a:txBody>
                   <a:tcPr>
                     <a:solidFill>
-                      <a:srgbClr val="EEEADE"/>
-                    </a:solidFill>
-                  </a:tcPr>
-                </a:tc>
-                <a:tc>
-                  <a:txBody>
-                    <a:bodyPr/>
-                    <a:lstStyle/>
-                    <a:p>
-                      <a:r>
-                        <a:rPr sz="900">
+                      <a:srgbClr val="FFFFFF"/>
+                    </a:solidFill>
+                  </a:tcPr>
+                </a:tc>
+                <a:tc>
+                  <a:txBody>
+                    <a:bodyPr/>
+                    <a:lstStyle/>
+                    <a:p>
+                      <a:r>
+                        <a:rPr sz="800">
                           <a:solidFill>
                             <a:srgbClr val="1C2433"/>
                           </a:solidFill>
@@ -12302,19 +13159,19 @@
                   </a:txBody>
                   <a:tcPr>
                     <a:solidFill>
-                      <a:srgbClr val="EEEADE"/>
+                      <a:srgbClr val="FFFFFF"/>
                     </a:solidFill>
                   </a:tcPr>
                 </a:tc>
               </a:tr>
-              <a:tr h="344658">
-                <a:tc>
-                  <a:txBody>
-                    <a:bodyPr/>
-                    <a:lstStyle/>
-                    <a:p>
-                      <a:r>
-                        <a:rPr sz="900">
+              <a:tr h="248920">
+                <a:tc>
+                  <a:txBody>
+                    <a:bodyPr/>
+                    <a:lstStyle/>
+                    <a:p>
+                      <a:r>
+                        <a:rPr sz="800">
                           <a:solidFill>
                             <a:srgbClr val="1C2433"/>
                           </a:solidFill>
@@ -12325,17 +13182,17 @@
                   </a:txBody>
                   <a:tcPr>
                     <a:solidFill>
-                      <a:srgbClr val="FFFFFF"/>
-                    </a:solidFill>
-                  </a:tcPr>
-                </a:tc>
-                <a:tc>
-                  <a:txBody>
-                    <a:bodyPr/>
-                    <a:lstStyle/>
-                    <a:p>
-                      <a:r>
-                        <a:rPr sz="900">
+                      <a:srgbClr val="EEEADE"/>
+                    </a:solidFill>
+                  </a:tcPr>
+                </a:tc>
+                <a:tc>
+                  <a:txBody>
+                    <a:bodyPr/>
+                    <a:lstStyle/>
+                    <a:p>
+                      <a:r>
+                        <a:rPr sz="800">
                           <a:solidFill>
                             <a:srgbClr val="1C2433"/>
                           </a:solidFill>
@@ -12346,19 +13203,19 @@
                   </a:txBody>
                   <a:tcPr>
                     <a:solidFill>
-                      <a:srgbClr val="FFFFFF"/>
+                      <a:srgbClr val="EEEADE"/>
                     </a:solidFill>
                   </a:tcPr>
                 </a:tc>
               </a:tr>
-              <a:tr h="344658">
-                <a:tc>
-                  <a:txBody>
-                    <a:bodyPr/>
-                    <a:lstStyle/>
-                    <a:p>
-                      <a:r>
-                        <a:rPr sz="900">
+              <a:tr h="248920">
+                <a:tc>
+                  <a:txBody>
+                    <a:bodyPr/>
+                    <a:lstStyle/>
+                    <a:p>
+                      <a:r>
+                        <a:rPr sz="800">
                           <a:solidFill>
                             <a:srgbClr val="1C2433"/>
                           </a:solidFill>
@@ -12369,17 +13226,17 @@
                   </a:txBody>
                   <a:tcPr>
                     <a:solidFill>
-                      <a:srgbClr val="EEEADE"/>
-                    </a:solidFill>
-                  </a:tcPr>
-                </a:tc>
-                <a:tc>
-                  <a:txBody>
-                    <a:bodyPr/>
-                    <a:lstStyle/>
-                    <a:p>
-                      <a:r>
-                        <a:rPr sz="900">
+                      <a:srgbClr val="FFFFFF"/>
+                    </a:solidFill>
+                  </a:tcPr>
+                </a:tc>
+                <a:tc>
+                  <a:txBody>
+                    <a:bodyPr/>
+                    <a:lstStyle/>
+                    <a:p>
+                      <a:r>
+                        <a:rPr sz="800">
                           <a:solidFill>
                             <a:srgbClr val="1C2433"/>
                           </a:solidFill>
@@ -12390,19 +13247,19 @@
                   </a:txBody>
                   <a:tcPr>
                     <a:solidFill>
-                      <a:srgbClr val="EEEADE"/>
+                      <a:srgbClr val="FFFFFF"/>
                     </a:solidFill>
                   </a:tcPr>
                 </a:tc>
               </a:tr>
-              <a:tr h="344658">
-                <a:tc>
-                  <a:txBody>
-                    <a:bodyPr/>
-                    <a:lstStyle/>
-                    <a:p>
-                      <a:r>
-                        <a:rPr sz="900">
+              <a:tr h="248920">
+                <a:tc>
+                  <a:txBody>
+                    <a:bodyPr/>
+                    <a:lstStyle/>
+                    <a:p>
+                      <a:r>
+                        <a:rPr sz="800">
                           <a:solidFill>
                             <a:srgbClr val="1C2433"/>
                           </a:solidFill>
@@ -12413,17 +13270,17 @@
                   </a:txBody>
                   <a:tcPr>
                     <a:solidFill>
-                      <a:srgbClr val="FFFFFF"/>
-                    </a:solidFill>
-                  </a:tcPr>
-                </a:tc>
-                <a:tc>
-                  <a:txBody>
-                    <a:bodyPr/>
-                    <a:lstStyle/>
-                    <a:p>
-                      <a:r>
-                        <a:rPr sz="900">
+                      <a:srgbClr val="EEEADE"/>
+                    </a:solidFill>
+                  </a:tcPr>
+                </a:tc>
+                <a:tc>
+                  <a:txBody>
+                    <a:bodyPr/>
+                    <a:lstStyle/>
+                    <a:p>
+                      <a:r>
+                        <a:rPr sz="800">
                           <a:solidFill>
                             <a:srgbClr val="1C2433"/>
                           </a:solidFill>
@@ -12434,19 +13291,19 @@
                   </a:txBody>
                   <a:tcPr>
                     <a:solidFill>
-                      <a:srgbClr val="FFFFFF"/>
+                      <a:srgbClr val="EEEADE"/>
                     </a:solidFill>
                   </a:tcPr>
                 </a:tc>
               </a:tr>
-              <a:tr h="344658">
-                <a:tc>
-                  <a:txBody>
-                    <a:bodyPr/>
-                    <a:lstStyle/>
-                    <a:p>
-                      <a:r>
-                        <a:rPr sz="900">
+              <a:tr h="248920">
+                <a:tc>
+                  <a:txBody>
+                    <a:bodyPr/>
+                    <a:lstStyle/>
+                    <a:p>
+                      <a:r>
+                        <a:rPr sz="800">
                           <a:solidFill>
                             <a:srgbClr val="1C2433"/>
                           </a:solidFill>
@@ -12457,17 +13314,17 @@
                   </a:txBody>
                   <a:tcPr>
                     <a:solidFill>
-                      <a:srgbClr val="EEEADE"/>
-                    </a:solidFill>
-                  </a:tcPr>
-                </a:tc>
-                <a:tc>
-                  <a:txBody>
-                    <a:bodyPr/>
-                    <a:lstStyle/>
-                    <a:p>
-                      <a:r>
-                        <a:rPr sz="900">
+                      <a:srgbClr val="FFFFFF"/>
+                    </a:solidFill>
+                  </a:tcPr>
+                </a:tc>
+                <a:tc>
+                  <a:txBody>
+                    <a:bodyPr/>
+                    <a:lstStyle/>
+                    <a:p>
+                      <a:r>
+                        <a:rPr sz="800">
                           <a:solidFill>
                             <a:srgbClr val="1C2433"/>
                           </a:solidFill>
@@ -12478,19 +13335,19 @@
                   </a:txBody>
                   <a:tcPr>
                     <a:solidFill>
-                      <a:srgbClr val="EEEADE"/>
+                      <a:srgbClr val="FFFFFF"/>
                     </a:solidFill>
                   </a:tcPr>
                 </a:tc>
               </a:tr>
-              <a:tr h="344658">
-                <a:tc>
-                  <a:txBody>
-                    <a:bodyPr/>
-                    <a:lstStyle/>
-                    <a:p>
-                      <a:r>
-                        <a:rPr sz="900">
+              <a:tr h="248920">
+                <a:tc>
+                  <a:txBody>
+                    <a:bodyPr/>
+                    <a:lstStyle/>
+                    <a:p>
+                      <a:r>
+                        <a:rPr sz="800">
                           <a:solidFill>
                             <a:srgbClr val="1C2433"/>
                           </a:solidFill>
@@ -12501,17 +13358,17 @@
                   </a:txBody>
                   <a:tcPr>
                     <a:solidFill>
-                      <a:srgbClr val="FFFFFF"/>
-                    </a:solidFill>
-                  </a:tcPr>
-                </a:tc>
-                <a:tc>
-                  <a:txBody>
-                    <a:bodyPr/>
-                    <a:lstStyle/>
-                    <a:p>
-                      <a:r>
-                        <a:rPr sz="900">
+                      <a:srgbClr val="EEEADE"/>
+                    </a:solidFill>
+                  </a:tcPr>
+                </a:tc>
+                <a:tc>
+                  <a:txBody>
+                    <a:bodyPr/>
+                    <a:lstStyle/>
+                    <a:p>
+                      <a:r>
+                        <a:rPr sz="800">
                           <a:solidFill>
                             <a:srgbClr val="1C2433"/>
                           </a:solidFill>
@@ -12522,19 +13379,19 @@
                   </a:txBody>
                   <a:tcPr>
                     <a:solidFill>
-                      <a:srgbClr val="FFFFFF"/>
+                      <a:srgbClr val="EEEADE"/>
                     </a:solidFill>
                   </a:tcPr>
                 </a:tc>
               </a:tr>
-              <a:tr h="344658">
-                <a:tc>
-                  <a:txBody>
-                    <a:bodyPr/>
-                    <a:lstStyle/>
-                    <a:p>
-                      <a:r>
-                        <a:rPr sz="900">
+              <a:tr h="248920">
+                <a:tc>
+                  <a:txBody>
+                    <a:bodyPr/>
+                    <a:lstStyle/>
+                    <a:p>
+                      <a:r>
+                        <a:rPr sz="800">
                           <a:solidFill>
                             <a:srgbClr val="1C2433"/>
                           </a:solidFill>
@@ -12545,17 +13402,17 @@
                   </a:txBody>
                   <a:tcPr>
                     <a:solidFill>
-                      <a:srgbClr val="EEEADE"/>
-                    </a:solidFill>
-                  </a:tcPr>
-                </a:tc>
-                <a:tc>
-                  <a:txBody>
-                    <a:bodyPr/>
-                    <a:lstStyle/>
-                    <a:p>
-                      <a:r>
-                        <a:rPr sz="900">
+                      <a:srgbClr val="FFFFFF"/>
+                    </a:solidFill>
+                  </a:tcPr>
+                </a:tc>
+                <a:tc>
+                  <a:txBody>
+                    <a:bodyPr/>
+                    <a:lstStyle/>
+                    <a:p>
+                      <a:r>
+                        <a:rPr sz="800">
                           <a:solidFill>
                             <a:srgbClr val="1C2433"/>
                           </a:solidFill>
@@ -12566,19 +13423,19 @@
                   </a:txBody>
                   <a:tcPr>
                     <a:solidFill>
-                      <a:srgbClr val="EEEADE"/>
+                      <a:srgbClr val="FFFFFF"/>
                     </a:solidFill>
                   </a:tcPr>
                 </a:tc>
               </a:tr>
-              <a:tr h="344658">
-                <a:tc>
-                  <a:txBody>
-                    <a:bodyPr/>
-                    <a:lstStyle/>
-                    <a:p>
-                      <a:r>
-                        <a:rPr sz="900">
+              <a:tr h="248920">
+                <a:tc>
+                  <a:txBody>
+                    <a:bodyPr/>
+                    <a:lstStyle/>
+                    <a:p>
+                      <a:r>
+                        <a:rPr sz="800">
                           <a:solidFill>
                             <a:srgbClr val="1C2433"/>
                           </a:solidFill>
@@ -12589,17 +13446,17 @@
                   </a:txBody>
                   <a:tcPr>
                     <a:solidFill>
-                      <a:srgbClr val="FFFFFF"/>
-                    </a:solidFill>
-                  </a:tcPr>
-                </a:tc>
-                <a:tc>
-                  <a:txBody>
-                    <a:bodyPr/>
-                    <a:lstStyle/>
-                    <a:p>
-                      <a:r>
-                        <a:rPr sz="900">
+                      <a:srgbClr val="EEEADE"/>
+                    </a:solidFill>
+                  </a:tcPr>
+                </a:tc>
+                <a:tc>
+                  <a:txBody>
+                    <a:bodyPr/>
+                    <a:lstStyle/>
+                    <a:p>
+                      <a:r>
+                        <a:rPr sz="800">
                           <a:solidFill>
                             <a:srgbClr val="1C2433"/>
                           </a:solidFill>
@@ -12610,19 +13467,19 @@
                   </a:txBody>
                   <a:tcPr>
                     <a:solidFill>
-                      <a:srgbClr val="FFFFFF"/>
+                      <a:srgbClr val="EEEADE"/>
                     </a:solidFill>
                   </a:tcPr>
                 </a:tc>
               </a:tr>
-              <a:tr h="344664">
-                <a:tc>
-                  <a:txBody>
-                    <a:bodyPr/>
-                    <a:lstStyle/>
-                    <a:p>
-                      <a:r>
-                        <a:rPr sz="900">
+              <a:tr h="248920">
+                <a:tc>
+                  <a:txBody>
+                    <a:bodyPr/>
+                    <a:lstStyle/>
+                    <a:p>
+                      <a:r>
+                        <a:rPr sz="800">
                           <a:solidFill>
                             <a:srgbClr val="1C2433"/>
                           </a:solidFill>
@@ -12633,17 +13490,17 @@
                   </a:txBody>
                   <a:tcPr>
                     <a:solidFill>
-                      <a:srgbClr val="EEEADE"/>
-                    </a:solidFill>
-                  </a:tcPr>
-                </a:tc>
-                <a:tc>
-                  <a:txBody>
-                    <a:bodyPr/>
-                    <a:lstStyle/>
-                    <a:p>
-                      <a:r>
-                        <a:rPr sz="900">
+                      <a:srgbClr val="FFFFFF"/>
+                    </a:solidFill>
+                  </a:tcPr>
+                </a:tc>
+                <a:tc>
+                  <a:txBody>
+                    <a:bodyPr/>
+                    <a:lstStyle/>
+                    <a:p>
+                      <a:r>
+                        <a:rPr sz="800">
                           <a:solidFill>
                             <a:srgbClr val="1C2433"/>
                           </a:solidFill>
@@ -12654,7 +13511,7 @@
                   </a:txBody>
                   <a:tcPr>
                     <a:solidFill>
-                      <a:srgbClr val="EEEADE"/>
+                      <a:srgbClr val="FFFFFF"/>
                     </a:solidFill>
                   </a:tcPr>
                 </a:tc>
@@ -12988,6 +13845,38 @@
                 </a:solidFill>
                 <a:latin typeface="Calibri"/>
               </a:rPr>
+              <a:t>•  Populacao: contrato com manutencao inclusa (MAINT), aplicada como flag — o cenario sem filtro e mantido como baseline.</a:t>
+            </a:r>
+          </a:p>
+          <a:p>
+            <a:pPr>
+              <a:spcAft>
+                <a:spcPts val="600"/>
+              </a:spcAft>
+            </a:pPr>
+            <a:r>
+              <a:rPr sz="1600">
+                <a:solidFill>
+                  <a:srgbClr val="1C2433"/>
+                </a:solidFill>
+                <a:latin typeface="Calibri"/>
+              </a:rPr>
+              <a:t>•  Tres configuracoes comparadas para separar o efeito do filtro MAINT do efeito das variaveis de contrato.</a:t>
+            </a:r>
+          </a:p>
+          <a:p>
+            <a:pPr>
+              <a:spcAft>
+                <a:spcPts val="600"/>
+              </a:spcAft>
+            </a:pPr>
+            <a:r>
+              <a:rPr sz="1600">
+                <a:solidFill>
+                  <a:srgbClr val="1C2433"/>
+                </a:solidFill>
+                <a:latin typeface="Calibri"/>
+              </a:rPr>
               <a:t>•  Metricas: R², RMSE e MAE.</a:t>
             </a:r>
           </a:p>
@@ -13355,7 +14244,7 @@
                             <a:srgbClr val="1C2433"/>
                           </a:solidFill>
                         </a:rPr>
-                        <a:t>-0.2245</a:t>
+                        <a:t>0.0356</a:t>
                       </a:r>
                     </a:p>
                   </a:txBody>
@@ -13376,7 +14265,7 @@
                             <a:srgbClr val="1C2433"/>
                           </a:solidFill>
                         </a:rPr>
-                        <a:t>2965.6</a:t>
+                        <a:t>2663.4</a:t>
                       </a:r>
                     </a:p>
                   </a:txBody>
@@ -13397,7 +14286,7 @@
                             <a:srgbClr val="1C2433"/>
                           </a:solidFill>
                         </a:rPr>
-                        <a:t>1212.7</a:t>
+                        <a:t>1165.5</a:t>
                       </a:r>
                     </a:p>
                   </a:txBody>
@@ -13462,7 +14351,7 @@
                             <a:srgbClr val="1C2433"/>
                           </a:solidFill>
                         </a:rPr>
-                        <a:t>-0.2415</a:t>
+                        <a:t>0.0256</a:t>
                       </a:r>
                     </a:p>
                   </a:txBody>
@@ -13483,7 +14372,7 @@
                             <a:srgbClr val="1C2433"/>
                           </a:solidFill>
                         </a:rPr>
-                        <a:t>2986.1</a:t>
+                        <a:t>2677.2</a:t>
                       </a:r>
                     </a:p>
                   </a:txBody>
@@ -13504,7 +14393,7 @@
                             <a:srgbClr val="1C2433"/>
                           </a:solidFill>
                         </a:rPr>
-                        <a:t>1216.4</a:t>
+                        <a:t>1166.9</a:t>
                       </a:r>
                     </a:p>
                   </a:txBody>
@@ -13569,7 +14458,7 @@
                             <a:srgbClr val="1C2433"/>
                           </a:solidFill>
                         </a:rPr>
-                        <a:t>0.5063</a:t>
+                        <a:t>0.5315</a:t>
                       </a:r>
                     </a:p>
                   </a:txBody>
@@ -13590,7 +14479,7 @@
                             <a:srgbClr val="1C2433"/>
                           </a:solidFill>
                         </a:rPr>
-                        <a:t>1883.1</a:t>
+                        <a:t>1856.5</a:t>
                       </a:r>
                     </a:p>
                   </a:txBody>
@@ -13611,7 +14500,7 @@
                             <a:srgbClr val="1C2433"/>
                           </a:solidFill>
                         </a:rPr>
-                        <a:t>956.9</a:t>
+                        <a:t>959.8</a:t>
                       </a:r>
                     </a:p>
                   </a:txBody>
@@ -13676,7 +14565,7 @@
                             <a:srgbClr val="1C2433"/>
                           </a:solidFill>
                         </a:rPr>
-                        <a:t>0.5712</a:t>
+                        <a:t>0.5734</a:t>
                       </a:r>
                     </a:p>
                   </a:txBody>
@@ -13697,7 +14586,7 @@
                             <a:srgbClr val="1C2433"/>
                           </a:solidFill>
                         </a:rPr>
-                        <a:t>1754.9</a:t>
+                        <a:t>1771.5</a:t>
                       </a:r>
                     </a:p>
                   </a:txBody>
@@ -13718,7 +14607,7 @@
                             <a:srgbClr val="1C2433"/>
                           </a:solidFill>
                         </a:rPr>
-                        <a:t>887.6</a:t>
+                        <a:t>915.5</a:t>
                       </a:r>
                     </a:p>
                   </a:txBody>
@@ -13783,7 +14672,7 @@
                             <a:srgbClr val="1C2433"/>
                           </a:solidFill>
                         </a:rPr>
-                        <a:t>0.572</a:t>
+                        <a:t>0.5854</a:t>
                       </a:r>
                     </a:p>
                   </a:txBody>
@@ -13804,7 +14693,7 @@
                             <a:srgbClr val="1C2433"/>
                           </a:solidFill>
                         </a:rPr>
-                        <a:t>1753.3</a:t>
+                        <a:t>1746.4</a:t>
                       </a:r>
                     </a:p>
                   </a:txBody>
@@ -13825,7 +14714,7 @@
                             <a:srgbClr val="1C2433"/>
                           </a:solidFill>
                         </a:rPr>
-                        <a:t>894.8</a:t>
+                        <a:t>907.5</a:t>
                       </a:r>
                     </a:p>
                   </a:txBody>
@@ -13890,7 +14779,7 @@
                             <a:srgbClr val="1C2433"/>
                           </a:solidFill>
                         </a:rPr>
-                        <a:t>0.5237</a:t>
+                        <a:t>0.5289</a:t>
                       </a:r>
                     </a:p>
                   </a:txBody>
@@ -13911,7 +14800,7 @@
                             <a:srgbClr val="1C2433"/>
                           </a:solidFill>
                         </a:rPr>
-                        <a:t>1849.6</a:t>
+                        <a:t>1861.6</a:t>
                       </a:r>
                     </a:p>
                   </a:txBody>
@@ -13932,7 +14821,7 @@
                             <a:srgbClr val="1C2433"/>
                           </a:solidFill>
                         </a:rPr>
-                        <a:t>953.6</a:t>
+                        <a:t>986.1</a:t>
                       </a:r>
                     </a:p>
                   </a:txBody>
@@ -13997,7 +14886,7 @@
                             <a:srgbClr val="1C2433"/>
                           </a:solidFill>
                         </a:rPr>
-                        <a:t>-0.5328</a:t>
+                        <a:t>0.3876</a:t>
                       </a:r>
                     </a:p>
                   </a:txBody>
@@ -14018,7 +14907,7 @@
                             <a:srgbClr val="1C2433"/>
                           </a:solidFill>
                         </a:rPr>
-                        <a:t>3318.0</a:t>
+                        <a:t>2122.4</a:t>
                       </a:r>
                     </a:p>
                   </a:txBody>
@@ -14039,7 +14928,7 @@
                             <a:srgbClr val="1C2433"/>
                           </a:solidFill>
                         </a:rPr>
-                        <a:t>1383.3</a:t>
+                        <a:t>1079.1</a:t>
                       </a:r>
                     </a:p>
                   </a:txBody>
@@ -14104,7 +14993,7 @@
                             <a:srgbClr val="1C2433"/>
                           </a:solidFill>
                         </a:rPr>
-                        <a:t>-0.138</a:t>
+                        <a:t>0.2719</a:t>
                       </a:r>
                     </a:p>
                   </a:txBody>
@@ -14125,7 +15014,7 @@
                             <a:srgbClr val="1C2433"/>
                           </a:solidFill>
                         </a:rPr>
-                        <a:t>2858.9</a:t>
+                        <a:t>2314.2</a:t>
                       </a:r>
                     </a:p>
                   </a:txBody>
@@ -14146,7 +15035,7 @@
                             <a:srgbClr val="1C2433"/>
                           </a:solidFill>
                         </a:rPr>
-                        <a:t>1284.7</a:t>
+                        <a:t>1202.0</a:t>
                       </a:r>
                     </a:p>
                   </a:txBody>
@@ -14211,7 +15100,7 @@
                             <a:srgbClr val="1C2433"/>
                           </a:solidFill>
                         </a:rPr>
-                        <a:t>-0.134</a:t>
+                        <a:t>0.2665</a:t>
                       </a:r>
                     </a:p>
                   </a:txBody>
@@ -14232,7 +15121,7 @@
                             <a:srgbClr val="1C2433"/>
                           </a:solidFill>
                         </a:rPr>
-                        <a:t>2853.9</a:t>
+                        <a:t>2322.8</a:t>
                       </a:r>
                     </a:p>
                   </a:txBody>
@@ -14253,7 +15142,7 @@
                             <a:srgbClr val="1C2433"/>
                           </a:solidFill>
                         </a:rPr>
-                        <a:t>1283.4</a:t>
+                        <a:t>1202.7</a:t>
                       </a:r>
                     </a:p>
                   </a:txBody>
@@ -14318,7 +15207,7 @@
                             <a:srgbClr val="1C2433"/>
                           </a:solidFill>
                         </a:rPr>
-                        <a:t>0.4163</a:t>
+                        <a:t>0.4124</a:t>
                       </a:r>
                     </a:p>
                   </a:txBody>
@@ -14339,7 +15228,7 @@
                             <a:srgbClr val="1C2433"/>
                           </a:solidFill>
                         </a:rPr>
-                        <a:t>2047.5</a:t>
+                        <a:t>2079.1</a:t>
                       </a:r>
                     </a:p>
                   </a:txBody>
@@ -14360,7 +15249,7 @@
                             <a:srgbClr val="1C2433"/>
                           </a:solidFill>
                         </a:rPr>
-                        <a:t>1097.2</a:t>
+                        <a:t>1128.2</a:t>
                       </a:r>
                     </a:p>
                   </a:txBody>
@@ -14425,7 +15314,7 @@
                             <a:srgbClr val="1C2433"/>
                           </a:solidFill>
                         </a:rPr>
-                        <a:t>0.4286</a:t>
+                        <a:t>0.4486</a:t>
                       </a:r>
                     </a:p>
                   </a:txBody>
@@ -14446,7 +15335,7 @@
                             <a:srgbClr val="1C2433"/>
                           </a:solidFill>
                         </a:rPr>
-                        <a:t>2025.9</a:t>
+                        <a:t>2013.9</a:t>
                       </a:r>
                     </a:p>
                   </a:txBody>
@@ -14467,7 +15356,7 @@
                             <a:srgbClr val="1C2433"/>
                           </a:solidFill>
                         </a:rPr>
-                        <a:t>1064.5</a:t>
+                        <a:t>1088.6</a:t>
                       </a:r>
                     </a:p>
                   </a:txBody>
@@ -14532,7 +15421,7 @@
                             <a:srgbClr val="1C2433"/>
                           </a:solidFill>
                         </a:rPr>
-                        <a:t>0.404</a:t>
+                        <a:t>0.4549</a:t>
                       </a:r>
                     </a:p>
                   </a:txBody>
@@ -14553,7 +15442,7 @@
                             <a:srgbClr val="1C2433"/>
                           </a:solidFill>
                         </a:rPr>
-                        <a:t>2069.0</a:t>
+                        <a:t>2002.4</a:t>
                       </a:r>
                     </a:p>
                   </a:txBody>
@@ -14574,7 +15463,7 @@
                             <a:srgbClr val="1C2433"/>
                           </a:solidFill>
                         </a:rPr>
-                        <a:t>1103.0</a:t>
+                        <a:t>1092.7</a:t>
                       </a:r>
                     </a:p>
                   </a:txBody>
@@ -14639,7 +15528,7 @@
                             <a:srgbClr val="1C2433"/>
                           </a:solidFill>
                         </a:rPr>
-                        <a:t>0.4228</a:t>
+                        <a:t>0.4487</a:t>
                       </a:r>
                     </a:p>
                   </a:txBody>
@@ -14660,7 +15549,7 @@
                             <a:srgbClr val="1C2433"/>
                           </a:solidFill>
                         </a:rPr>
-                        <a:t>2036.0</a:t>
+                        <a:t>2013.8</a:t>
                       </a:r>
                     </a:p>
                   </a:txBody>
@@ -14681,7 +15570,7 @@
                             <a:srgbClr val="1C2433"/>
                           </a:solidFill>
                         </a:rPr>
-                        <a:t>1084.8</a:t>
+                        <a:t>1099.0</a:t>
                       </a:r>
                     </a:p>
                   </a:txBody>
@@ -14746,7 +15635,7 @@
                             <a:srgbClr val="1C2433"/>
                           </a:solidFill>
                         </a:rPr>
-                        <a:t>0.1386</a:t>
+                        <a:t>0.2723</a:t>
                       </a:r>
                     </a:p>
                   </a:txBody>
@@ -14767,7 +15656,7 @@
                             <a:srgbClr val="1C2433"/>
                           </a:solidFill>
                         </a:rPr>
-                        <a:t>2487.3</a:t>
+                        <a:t>2313.6</a:t>
                       </a:r>
                     </a:p>
                   </a:txBody>
@@ -14788,7 +15677,7 @@
                             <a:srgbClr val="1C2433"/>
                           </a:solidFill>
                         </a:rPr>
-                        <a:t>1368.4</a:t>
+                        <a:t>1258.1</a:t>
                       </a:r>
                     </a:p>
                   </a:txBody>
@@ -14831,13 +15720,13 @@
               </a:spcAft>
             </a:pPr>
             <a:r>
-              <a:rPr sz="1400">
+              <a:rPr sz="1300">
                 <a:solidFill>
                   <a:srgbClr val="1C2433"/>
                 </a:solidFill>
                 <a:latin typeface="Calibri"/>
               </a:rPr>
-              <a:t>•  Preditivo recomendado: random_forest</a:t>
+              <a:t>•  Preditivo recomendado: gradient_boosting</a:t>
             </a:r>
           </a:p>
           <a:p>
@@ -14847,13 +15736,13 @@
               </a:spcAft>
             </a:pPr>
             <a:r>
-              <a:rPr sz="1400">
+              <a:rPr sz="1300">
                 <a:solidFill>
                   <a:srgbClr val="1C2433"/>
                 </a:solidFill>
                 <a:latin typeface="Calibri"/>
               </a:rPr>
-              <a:t>•  R² = 0.4286 · RMSE = 2025.9</a:t>
+              <a:t>•  R² = 0.4549 · RMSE = 2002.4</a:t>
             </a:r>
           </a:p>
           <a:p>
@@ -14863,13 +15752,13 @@
               </a:spcAft>
             </a:pPr>
             <a:r>
-              <a:rPr sz="1400">
+              <a:rPr sz="1300">
                 <a:solidFill>
                   <a:srgbClr val="1C2433"/>
                 </a:solidFill>
                 <a:latin typeface="Calibri"/>
               </a:rPr>
-              <a:t>•  MAE = 1064.5 CAD/ano</a:t>
+              <a:t>•  MAE = 1092.7 CAD/ano</a:t>
             </a:r>
           </a:p>
           <a:p>
@@ -14879,13 +15768,13 @@
               </a:spcAft>
             </a:pPr>
             <a:r>
-              <a:rPr sz="1400">
+              <a:rPr sz="1300">
                 <a:solidFill>
                   <a:srgbClr val="1C2433"/>
                 </a:solidFill>
                 <a:latin typeface="Calibri"/>
               </a:rPr>
-              <a:t>•  Explicativo (melhor): R² = 0.572</a:t>
+              <a:t>•  Explicativo (melhor): R² = 0.5854</a:t>
             </a:r>
           </a:p>
           <a:p>
@@ -14895,13 +15784,45 @@
               </a:spcAft>
             </a:pPr>
             <a:r>
-              <a:rPr sz="1400">
+              <a:rPr sz="1300">
                 <a:solidFill>
                   <a:srgbClr val="1C2433"/>
                 </a:solidFill>
                 <a:latin typeface="Calibri"/>
               </a:rPr>
               <a:t>•  Arvores/ensembles superam modelos lineares.</a:t>
+            </a:r>
+          </a:p>
+          <a:p>
+            <a:pPr>
+              <a:spcAft>
+                <a:spcPts val="600"/>
+              </a:spcAft>
+            </a:pPr>
+            <a:r>
+              <a:rPr sz="1300">
+                <a:solidFill>
+                  <a:srgbClr val="1C2433"/>
+                </a:solidFill>
+                <a:latin typeface="Calibri"/>
+              </a:rPr>
+              <a:t>•  Efeito do filtro MAINT: +0.0193 de R².</a:t>
+            </a:r>
+          </a:p>
+          <a:p>
+            <a:pPr>
+              <a:spcAft>
+                <a:spcPts val="600"/>
+              </a:spcAft>
+            </a:pPr>
+            <a:r>
+              <a:rPr sz="1300">
+                <a:solidFill>
+                  <a:srgbClr val="1C2433"/>
+                </a:solidFill>
+                <a:latin typeface="Calibri"/>
+              </a:rPr>
+              <a:t>•  Efeito das variaveis de contrato: +0.0033 de R² — praticamente nulo.</a:t>
             </a:r>
           </a:p>
         </p:txBody>
@@ -15261,7 +16182,7 @@
                 </a:solidFill>
                 <a:latin typeface="Calibri"/>
               </a:rPr>
-              <a:t>9859</a:t>
+              <a:t>9585</a:t>
             </a:r>
           </a:p>
         </p:txBody>
@@ -15377,7 +16298,7 @@
                 </a:solidFill>
                 <a:latin typeface="Calibri"/>
               </a:rPr>
-              <a:t>223.590</a:t>
+              <a:t>217.217</a:t>
             </a:r>
           </a:p>
         </p:txBody>
@@ -15493,7 +16414,7 @@
                 </a:solidFill>
                 <a:latin typeface="Calibri"/>
               </a:rPr>
-              <a:t>CAD 82.428 mi</a:t>
+              <a:t>CAD 79.645 mi</a:t>
             </a:r>
           </a:p>
         </p:txBody>
@@ -15948,7 +16869,7 @@
                             <a:srgbClr val="1C2433"/>
                           </a:solidFill>
                         </a:rPr>
-                        <a:t>0.2214792727512291</a:t>
+                        <a:t>0.1692510524300573</a:t>
                       </a:r>
                     </a:p>
                   </a:txBody>
@@ -15992,7 +16913,7 @@
                             <a:srgbClr val="1C2433"/>
                           </a:solidFill>
                         </a:rPr>
-                        <a:t>0.1154128227762423</a:t>
+                        <a:t>0.0966781125569682</a:t>
                       </a:r>
                     </a:p>
                   </a:txBody>
@@ -16015,7 +16936,7 @@
                             <a:srgbClr val="1C2433"/>
                           </a:solidFill>
                         </a:rPr>
-                        <a:t>km_acumulado_inicio_ano</a:t>
+                        <a:t>custo_acum_ate_ano_anterior</a:t>
                       </a:r>
                     </a:p>
                   </a:txBody>
@@ -16036,7 +16957,7 @@
                             <a:srgbClr val="1C2433"/>
                           </a:solidFill>
                         </a:rPr>
-                        <a:t>0.0718246054508778</a:t>
+                        <a:t>0.080441886778797</a:t>
                       </a:r>
                     </a:p>
                   </a:txBody>
@@ -16059,7 +16980,7 @@
                             <a:srgbClr val="1C2433"/>
                           </a:solidFill>
                         </a:rPr>
-                        <a:t>custo_ano_anterior</a:t>
+                        <a:t>km_acumulado_inicio_ano</a:t>
                       </a:r>
                     </a:p>
                   </a:txBody>
@@ -16080,7 +17001,7 @@
                             <a:srgbClr val="1C2433"/>
                           </a:solidFill>
                         </a:rPr>
-                        <a:t>0.0662965121228389</a:t>
+                        <a:t>0.0790806776968799</a:t>
                       </a:r>
                     </a:p>
                   </a:txBody>
@@ -16103,7 +17024,7 @@
                             <a:srgbClr val="1C2433"/>
                           </a:solidFill>
                         </a:rPr>
-                        <a:t>custo_acum_ate_ano_anterior</a:t>
+                        <a:t>unit_subtype</a:t>
                       </a:r>
                     </a:p>
                   </a:txBody>
@@ -16124,7 +17045,7 @@
                             <a:srgbClr val="1C2433"/>
                           </a:solidFill>
                         </a:rPr>
-                        <a:t>0.065382059596437</a:t>
+                        <a:t>0.0573575093548561</a:t>
                       </a:r>
                     </a:p>
                   </a:txBody>
@@ -16168,7 +17089,7 @@
                             <a:srgbClr val="1C2433"/>
                           </a:solidFill>
                         </a:rPr>
-                        <a:t>0.0589398045259931</a:t>
+                        <a:t>0.0400249967014216</a:t>
                       </a:r>
                     </a:p>
                   </a:txBody>
@@ -16191,7 +17112,7 @@
                             <a:srgbClr val="1C2433"/>
                           </a:solidFill>
                         </a:rPr>
-                        <a:t>idade_carreta</a:t>
+                        <a:t>comprimento</a:t>
                       </a:r>
                     </a:p>
                   </a:txBody>
@@ -16212,7 +17133,7 @@
                             <a:srgbClr val="1C2433"/>
                           </a:solidFill>
                         </a:rPr>
-                        <a:t>0.0317756976849476</a:t>
+                        <a:t>0.039470122927394</a:t>
                       </a:r>
                     </a:p>
                   </a:txBody>
@@ -16235,7 +17156,7 @@
                             <a:srgbClr val="1C2433"/>
                           </a:solidFill>
                         </a:rPr>
-                        <a:t>unit_subtype</a:t>
+                        <a:t>provincia_estado</a:t>
                       </a:r>
                     </a:p>
                   </a:txBody>
@@ -16256,7 +17177,7 @@
                             <a:srgbClr val="1C2433"/>
                           </a:solidFill>
                         </a:rPr>
-                        <a:t>0.0312847007573095</a:t>
+                        <a:t>0.0366753003826876</a:t>
                       </a:r>
                     </a:p>
                   </a:txBody>
@@ -16561,7 +17482,23 @@
                 </a:solidFill>
                 <a:latin typeface="Calibri"/>
               </a:rPr>
-              <a:t>•  O modelo preditivo (R² ≈ 0.4286) e util para orcamento e priorizacao de frota.</a:t>
+              <a:t>•  Contrato (H6): efeito fraco. A duracao de contrato quase nao acrescenta poder preditivo, e o tipo contratual separa pouco os custos — hipotese testada, nao assumida.</a:t>
+            </a:r>
+          </a:p>
+          <a:p>
+            <a:pPr>
+              <a:spcAft>
+                <a:spcPts val="600"/>
+              </a:spcAft>
+            </a:pPr>
+            <a:r>
+              <a:rPr sz="1500">
+                <a:solidFill>
+                  <a:srgbClr val="1C2433"/>
+                </a:solidFill>
+                <a:latin typeface="Calibri"/>
+              </a:rPr>
+              <a:t>•  O modelo preditivo (R² ≈ 0.4549) e util para orcamento e priorizacao de frota.</a:t>
             </a:r>
           </a:p>
         </p:txBody>
@@ -16776,7 +17713,7 @@
                 </a:solidFill>
                 <a:latin typeface="Calibri"/>
               </a:rPr>
-              <a:t>•  Fonte unica: sem dados de contrato, mao de obra detalhada e pecas — reduz o conjunto explicativo.</a:t>
+              <a:t>•  Fonte unica: contrato ja incorporado; seguem ausentes mao de obra, pecas e tipo_contrato (RENTAL/LEASE).</a:t>
             </a:r>
           </a:p>
           <a:p>
@@ -16792,7 +17729,39 @@
                 </a:solidFill>
                 <a:latin typeface="Calibri"/>
               </a:rPr>
-              <a:t>•  Sem filtro por tipo de manutencao (MAINT): analisa-se todo o custo interno.</a:t>
+              <a:t>•  Populacao restrita a MAINT: o ganho de R² do filtro reflete amostra mais homogenea, nao melhora de previsao.</a:t>
+            </a:r>
+          </a:p>
+          <a:p>
+            <a:pPr>
+              <a:spcAft>
+                <a:spcPts val="600"/>
+              </a:spcAft>
+            </a:pPr>
+            <a:r>
+              <a:rPr sz="1500">
+                <a:solidFill>
+                  <a:srgbClr val="1C2433"/>
+                </a:solidFill>
+                <a:latin typeface="Calibri"/>
+              </a:rPr>
+              <a:t>•  franquia_km_mensal_contrato descartada (99,8% de zeros); NET/MIX somam 2,7% das OS, o que limita conclusoes sobre esses regimes.</a:t>
+            </a:r>
+          </a:p>
+          <a:p>
+            <a:pPr>
+              <a:spcAft>
+                <a:spcPts val="600"/>
+              </a:spcAft>
+            </a:pPr>
+            <a:r>
+              <a:rPr sz="1500">
+                <a:solidFill>
+                  <a:srgbClr val="1C2433"/>
+                </a:solidFill>
+                <a:latin typeface="Calibri"/>
+              </a:rPr>
+              <a:t>•  cod_cliente nao modelado (597 categorias): risco de o modelo memorizar o cliente em vez de explicar o custo.</a:t>
             </a:r>
           </a:p>
           <a:p>
@@ -17055,7 +18024,7 @@
                 </a:solidFill>
                 <a:latin typeface="Calibri"/>
               </a:rPr>
-              <a:t>•  Integrar contrato, mao de obra e pecas em etapa futura para ampliar as variaveis explicativas.</a:t>
+              <a:t>•  Integrar mao de obra, pecas e tipo_contrato (RENTAL/LEASE) — contrato de manutencao ja foi incorporado.</a:t>
             </a:r>
           </a:p>
           <a:p>
@@ -17178,7 +18147,7 @@
                 </a:solidFill>
                 <a:latin typeface="Calibri"/>
               </a:rPr>
-              <a:t>A partir da base consolidada unica, em CAD corrigidos pelo CPI do Canada, avaliaram-se as variaveis candidatas, analisaram-se suas distribuicoes e relacoes com o custo anual por carreta, construiu-se um ranking, selecionaram-se variaveis de forma fundamentada e desenvolveram-se modelos estatisticos e de ML — sendo o custo anual real explicado sobretudo por refrigeracao, historico de manutencao e uso.</a:t>
+              <a:t>Sobre a base unica reextraida (29 colunas), em CAD corrigidos pelo CPI do Canada e no grao carreta x ano, o custo anual real e explicado sobretudo por refrigeracao, historico de manutencao e uso. As variaveis de contrato, incorporadas nesta fase, foram testadas e mostraram efeito fraco — resultado que decorre de teste, nao de suposicao.</a:t>
             </a:r>
           </a:p>
         </p:txBody>
@@ -18050,14 +19019,14 @@
                 <a:gridCol w="3535680"/>
                 <a:gridCol w="3535680"/>
               </a:tblGrid>
-              <a:tr h="600891">
-                <a:tc>
-                  <a:txBody>
-                    <a:bodyPr/>
-                    <a:lstStyle/>
-                    <a:p>
-                      <a:r>
-                        <a:rPr sz="1200" b="1">
+              <a:tr h="525780">
+                <a:tc>
+                  <a:txBody>
+                    <a:bodyPr/>
+                    <a:lstStyle/>
+                    <a:p>
+                      <a:r>
+                        <a:rPr sz="1100" b="1">
                           <a:solidFill>
                             <a:srgbClr val="FFFFFF"/>
                           </a:solidFill>
@@ -18078,7 +19047,7 @@
                     <a:lstStyle/>
                     <a:p>
                       <a:r>
-                        <a:rPr sz="1200" b="1">
+                        <a:rPr sz="1100" b="1">
                           <a:solidFill>
                             <a:srgbClr val="FFFFFF"/>
                           </a:solidFill>
@@ -18099,7 +19068,7 @@
                     <a:lstStyle/>
                     <a:p>
                       <a:r>
-                        <a:rPr sz="1200" b="1">
+                        <a:rPr sz="1100" b="1">
                           <a:solidFill>
                             <a:srgbClr val="FFFFFF"/>
                           </a:solidFill>
@@ -18115,14 +19084,14 @@
                   </a:tcPr>
                 </a:tc>
               </a:tr>
-              <a:tr h="600891">
-                <a:tc>
-                  <a:txBody>
-                    <a:bodyPr/>
-                    <a:lstStyle/>
-                    <a:p>
-                      <a:r>
-                        <a:rPr sz="1200">
+              <a:tr h="525780">
+                <a:tc>
+                  <a:txBody>
+                    <a:bodyPr/>
+                    <a:lstStyle/>
+                    <a:p>
+                      <a:r>
+                        <a:rPr sz="1100">
                           <a:solidFill>
                             <a:srgbClr val="1C2433"/>
                           </a:solidFill>
@@ -18143,7 +19112,7 @@
                     <a:lstStyle/>
                     <a:p>
                       <a:r>
-                        <a:rPr sz="1200">
+                        <a:rPr sz="1100">
                           <a:solidFill>
                             <a:srgbClr val="1C2433"/>
                           </a:solidFill>
@@ -18164,7 +19133,7 @@
                     <a:lstStyle/>
                     <a:p>
                       <a:r>
-                        <a:rPr sz="1200">
+                        <a:rPr sz="1100">
                           <a:solidFill>
                             <a:srgbClr val="1C2433"/>
                           </a:solidFill>
@@ -18180,14 +19149,14 @@
                   </a:tcPr>
                 </a:tc>
               </a:tr>
-              <a:tr h="600891">
-                <a:tc>
-                  <a:txBody>
-                    <a:bodyPr/>
-                    <a:lstStyle/>
-                    <a:p>
-                      <a:r>
-                        <a:rPr sz="1200">
+              <a:tr h="525780">
+                <a:tc>
+                  <a:txBody>
+                    <a:bodyPr/>
+                    <a:lstStyle/>
+                    <a:p>
+                      <a:r>
+                        <a:rPr sz="1100">
                           <a:solidFill>
                             <a:srgbClr val="1C2433"/>
                           </a:solidFill>
@@ -18208,7 +19177,7 @@
                     <a:lstStyle/>
                     <a:p>
                       <a:r>
-                        <a:rPr sz="1200">
+                        <a:rPr sz="1100">
                           <a:solidFill>
                             <a:srgbClr val="1C2433"/>
                           </a:solidFill>
@@ -18229,7 +19198,7 @@
                     <a:lstStyle/>
                     <a:p>
                       <a:r>
-                        <a:rPr sz="1200">
+                        <a:rPr sz="1100">
                           <a:solidFill>
                             <a:srgbClr val="1C2433"/>
                           </a:solidFill>
@@ -18245,14 +19214,14 @@
                   </a:tcPr>
                 </a:tc>
               </a:tr>
-              <a:tr h="600891">
-                <a:tc>
-                  <a:txBody>
-                    <a:bodyPr/>
-                    <a:lstStyle/>
-                    <a:p>
-                      <a:r>
-                        <a:rPr sz="1200">
+              <a:tr h="525780">
+                <a:tc>
+                  <a:txBody>
+                    <a:bodyPr/>
+                    <a:lstStyle/>
+                    <a:p>
+                      <a:r>
+                        <a:rPr sz="1100">
                           <a:solidFill>
                             <a:srgbClr val="1C2433"/>
                           </a:solidFill>
@@ -18273,7 +19242,7 @@
                     <a:lstStyle/>
                     <a:p>
                       <a:r>
-                        <a:rPr sz="1200">
+                        <a:rPr sz="1100">
                           <a:solidFill>
                             <a:srgbClr val="1C2433"/>
                           </a:solidFill>
@@ -18294,7 +19263,7 @@
                     <a:lstStyle/>
                     <a:p>
                       <a:r>
-                        <a:rPr sz="1200">
+                        <a:rPr sz="1100">
                           <a:solidFill>
                             <a:srgbClr val="1C2433"/>
                           </a:solidFill>
@@ -18310,14 +19279,14 @@
                   </a:tcPr>
                 </a:tc>
               </a:tr>
-              <a:tr h="600891">
-                <a:tc>
-                  <a:txBody>
-                    <a:bodyPr/>
-                    <a:lstStyle/>
-                    <a:p>
-                      <a:r>
-                        <a:rPr sz="1200">
+              <a:tr h="525780">
+                <a:tc>
+                  <a:txBody>
+                    <a:bodyPr/>
+                    <a:lstStyle/>
+                    <a:p>
+                      <a:r>
+                        <a:rPr sz="1100">
                           <a:solidFill>
                             <a:srgbClr val="1C2433"/>
                           </a:solidFill>
@@ -18338,7 +19307,7 @@
                     <a:lstStyle/>
                     <a:p>
                       <a:r>
-                        <a:rPr sz="1200">
+                        <a:rPr sz="1100">
                           <a:solidFill>
                             <a:srgbClr val="1C2433"/>
                           </a:solidFill>
@@ -18359,7 +19328,7 @@
                     <a:lstStyle/>
                     <a:p>
                       <a:r>
-                        <a:rPr sz="1200">
+                        <a:rPr sz="1100">
                           <a:solidFill>
                             <a:srgbClr val="1C2433"/>
                           </a:solidFill>
@@ -18375,14 +19344,14 @@
                   </a:tcPr>
                 </a:tc>
               </a:tr>
-              <a:tr h="600891">
-                <a:tc>
-                  <a:txBody>
-                    <a:bodyPr/>
-                    <a:lstStyle/>
-                    <a:p>
-                      <a:r>
-                        <a:rPr sz="1200">
+              <a:tr h="525780">
+                <a:tc>
+                  <a:txBody>
+                    <a:bodyPr/>
+                    <a:lstStyle/>
+                    <a:p>
+                      <a:r>
+                        <a:rPr sz="1100">
                           <a:solidFill>
                             <a:srgbClr val="1C2433"/>
                           </a:solidFill>
@@ -18403,7 +19372,7 @@
                     <a:lstStyle/>
                     <a:p>
                       <a:r>
-                        <a:rPr sz="1200">
+                        <a:rPr sz="1100">
                           <a:solidFill>
                             <a:srgbClr val="1C2433"/>
                           </a:solidFill>
@@ -18424,7 +19393,7 @@
                     <a:lstStyle/>
                     <a:p>
                       <a:r>
-                        <a:rPr sz="1200">
+                        <a:rPr sz="1100">
                           <a:solidFill>
                             <a:srgbClr val="1C2433"/>
                           </a:solidFill>
@@ -18440,67 +19409,132 @@
                   </a:tcPr>
                 </a:tc>
               </a:tr>
-              <a:tr h="600894">
-                <a:tc>
-                  <a:txBody>
-                    <a:bodyPr/>
-                    <a:lstStyle/>
-                    <a:p>
-                      <a:r>
-                        <a:rPr sz="1200">
-                          <a:solidFill>
-                            <a:srgbClr val="1C2433"/>
-                          </a:solidFill>
-                        </a:rPr>
-                        <a:t>(fora de escopo)</a:t>
-                      </a:r>
-                    </a:p>
-                  </a:txBody>
-                  <a:tcPr>
-                    <a:solidFill>
-                      <a:srgbClr val="EEEADE"/>
-                    </a:solidFill>
-                  </a:tcPr>
-                </a:tc>
-                <a:tc>
-                  <a:txBody>
-                    <a:bodyPr/>
-                    <a:lstStyle/>
-                    <a:p>
-                      <a:r>
-                        <a:rPr sz="1200">
-                          <a:solidFill>
-                            <a:srgbClr val="1C2433"/>
-                          </a:solidFill>
-                        </a:rPr>
-                        <a:t>Contrato (duracao/tipo) influencia o custo</a:t>
-                      </a:r>
-                    </a:p>
-                  </a:txBody>
-                  <a:tcPr>
-                    <a:solidFill>
-                      <a:srgbClr val="EEEADE"/>
-                    </a:solidFill>
-                  </a:tcPr>
-                </a:tc>
-                <a:tc>
-                  <a:txBody>
-                    <a:bodyPr/>
-                    <a:lstStyle/>
-                    <a:p>
-                      <a:r>
-                        <a:rPr sz="1200">
-                          <a:solidFill>
-                            <a:srgbClr val="1C2433"/>
-                          </a:solidFill>
-                        </a:rPr>
-                        <a:t>Nao testavel nesta etapa</a:t>
-                      </a:r>
-                    </a:p>
-                  </a:txBody>
-                  <a:tcPr>
-                    <a:solidFill>
-                      <a:srgbClr val="EEEADE"/>
+              <a:tr h="525780">
+                <a:tc>
+                  <a:txBody>
+                    <a:bodyPr/>
+                    <a:lstStyle/>
+                    <a:p>
+                      <a:r>
+                        <a:rPr sz="1100">
+                          <a:solidFill>
+                            <a:srgbClr val="1C2433"/>
+                          </a:solidFill>
+                        </a:rPr>
+                        <a:t>H6a</a:t>
+                      </a:r>
+                    </a:p>
+                  </a:txBody>
+                  <a:tcPr>
+                    <a:solidFill>
+                      <a:srgbClr val="EEEADE"/>
+                    </a:solidFill>
+                  </a:tcPr>
+                </a:tc>
+                <a:tc>
+                  <a:txBody>
+                    <a:bodyPr/>
+                    <a:lstStyle/>
+                    <a:p>
+                      <a:r>
+                        <a:rPr sz="1100">
+                          <a:solidFill>
+                            <a:srgbClr val="1C2433"/>
+                          </a:solidFill>
+                        </a:rPr>
+                        <a:t>Duracao do contrato influencia o custo anual</a:t>
+                      </a:r>
+                    </a:p>
+                  </a:txBody>
+                  <a:tcPr>
+                    <a:solidFill>
+                      <a:srgbClr val="EEEADE"/>
+                    </a:solidFill>
+                  </a:tcPr>
+                </a:tc>
+                <a:tc>
+                  <a:txBody>
+                    <a:bodyPr/>
+                    <a:lstStyle/>
+                    <a:p>
+                      <a:r>
+                        <a:rPr sz="1100">
+                          <a:solidFill>
+                            <a:srgbClr val="1C2433"/>
+                          </a:solidFill>
+                        </a:rPr>
+                        <a:t>Parcial (efeito fraco)</a:t>
+                      </a:r>
+                    </a:p>
+                  </a:txBody>
+                  <a:tcPr>
+                    <a:solidFill>
+                      <a:srgbClr val="EEEADE"/>
+                    </a:solidFill>
+                  </a:tcPr>
+                </a:tc>
+              </a:tr>
+              <a:tr h="525780">
+                <a:tc>
+                  <a:txBody>
+                    <a:bodyPr/>
+                    <a:lstStyle/>
+                    <a:p>
+                      <a:r>
+                        <a:rPr sz="1100">
+                          <a:solidFill>
+                            <a:srgbClr val="1C2433"/>
+                          </a:solidFill>
+                        </a:rPr>
+                        <a:t>H6b</a:t>
+                      </a:r>
+                    </a:p>
+                  </a:txBody>
+                  <a:tcPr>
+                    <a:solidFill>
+                      <a:srgbClr val="FFFFFF"/>
+                    </a:solidFill>
+                  </a:tcPr>
+                </a:tc>
+                <a:tc>
+                  <a:txBody>
+                    <a:bodyPr/>
+                    <a:lstStyle/>
+                    <a:p>
+                      <a:r>
+                        <a:rPr sz="1100">
+                          <a:solidFill>
+                            <a:srgbClr val="1C2433"/>
+                          </a:solidFill>
+                        </a:rPr>
+                        <a:t>Tipo de manutencao contratual (MAINT/NET/MIX) influencia o custo anual</a:t>
+                      </a:r>
+                    </a:p>
+                  </a:txBody>
+                  <a:tcPr>
+                    <a:solidFill>
+                      <a:srgbClr val="FFFFFF"/>
+                    </a:solidFill>
+                  </a:tcPr>
+                </a:tc>
+                <a:tc>
+                  <a:txBody>
+                    <a:bodyPr/>
+                    <a:lstStyle/>
+                    <a:p>
+                      <a:r>
+                        <a:rPr sz="1100">
+                          <a:solidFill>
+                            <a:srgbClr val="1C2433"/>
+                          </a:solidFill>
+                        </a:rPr>
+                        <a:t>Parcial (efeito fraco)</a:t>
+                      </a:r>
+                    </a:p>
+                  </a:txBody>
+                  <a:tcPr>
+                    <a:solidFill>
+                      <a:srgbClr val="FFFFFF"/>
                     </a:solidFill>
                   </a:tcPr>
                 </a:tc>
@@ -18539,7 +19573,7 @@
                 </a:solidFill>
                 <a:latin typeface="Calibri"/>
               </a:rPr>
-              <a:t>Hipoteses adaptadas a unidade anual e a fonte unica; hipoteses de contrato ficaram fora de escopo (dados ausentes).</a:t>
+              <a:t>H6 (contrato) tornou-se testavel em 2026-08-16, quando os dados de contrato passaram a integrar a fonte unica; desdobrada em H6a (duracao) e H6b (tipo).</a:t>
             </a:r>
           </a:p>
         </p:txBody>
@@ -19100,7 +20134,7 @@
                 </a:solidFill>
                 <a:latin typeface="Calibri"/>
               </a:rPr>
-              <a:t>•  223.590 OS · 9859 carretas · 2020–2025.</a:t>
+              <a:t>•  217.217 OS · 9585 carretas · 2020–2025.</a:t>
             </a:r>
           </a:p>
           <a:p>
@@ -19601,7 +20635,7 @@
                 </a:solidFill>
                 <a:latin typeface="Calibri"/>
               </a:rPr>
-              <a:t>•  Media CAD 1673.72/ano · mediana CAD 812.55/ano · p90 CAD 4221.76.</a:t>
+              <a:t>•  Media CAD 1669.18/ano · mediana CAD 812.26/ano · p90 CAD 4208.49.</a:t>
             </a:r>
           </a:p>
           <a:p>
@@ -19617,7 +20651,7 @@
                 </a:solidFill>
                 <a:latin typeface="Calibri"/>
               </a:rPr>
-              <a:t>•  Assimetria 3.79 (cauda longa), tratada por log1p e modelos robustos.</a:t>
+              <a:t>•  Assimetria 3.82 (cauda longa), tratada por log1p e modelos robustos.</a:t>
             </a:r>
           </a:p>
           <a:p>
@@ -19633,7 +20667,7 @@
                 </a:solidFill>
                 <a:latin typeface="Calibri"/>
               </a:rPr>
-              <a:t>•  Apenas 3.23% de carreta-anos com custo zero: o grao anual praticamente elimina a zero-inflacao.</a:t>
+              <a:t>•  Apenas 3.13% de carreta-anos com custo zero: o grao anual praticamente elimina a zero-inflacao.</a:t>
             </a:r>
           </a:p>
           <a:p>
@@ -19649,7 +20683,7 @@
                 </a:solidFill>
                 <a:latin typeface="Calibri"/>
               </a:rPr>
-              <a:t>•  Custo interno total: CAD 77.18 mi nominal / CAD 82.428 mi real (dez/2025).</a:t>
+              <a:t>•  Custo interno total: CAD 74.617 mi nominal / CAD 79.645 mi real (dez/2025).</a:t>
             </a:r>
           </a:p>
         </p:txBody>

--- a/docs/entregas/Apresentacao_QuatroNorte.pptx
+++ b/docs/entregas/Apresentacao_QuatroNorte.pptx
@@ -12094,7 +12094,7 @@
                             <a:srgbClr val="1C2433"/>
                           </a:solidFill>
                         </a:rPr>
-                        <a:t>tipo_manutencao_ano</a:t>
+                        <a:t>populacao_maint_flag</a:t>
                       </a:r>
                     </a:p>
                   </a:txBody>
@@ -12115,7 +12115,7 @@
                             <a:srgbClr val="1C2433"/>
                           </a:solidFill>
                         </a:rPr>
-                        <a:t>removida do modelo</a:t>
+                        <a:t>removida</a:t>
                       </a:r>
                     </a:p>
                   </a:txBody>
@@ -12138,7 +12138,7 @@
                             <a:srgbClr val="1C2433"/>
                           </a:solidFill>
                         </a:rPr>
-                        <a:t>tempo_contrato_meses_inicio_ano</a:t>
+                        <a:t>tipo_manutencao_ano</a:t>
                       </a:r>
                     </a:p>
                   </a:txBody>
@@ -12159,7 +12159,7 @@
                             <a:srgbClr val="1C2433"/>
                           </a:solidFill>
                         </a:rPr>
-                        <a:t>mantida</a:t>
+                        <a:t>mantida (DUMMY)</a:t>
                       </a:r>
                     </a:p>
                   </a:txBody>
@@ -12182,7 +12182,7 @@
                             <a:srgbClr val="1C2433"/>
                           </a:solidFill>
                         </a:rPr>
-                        <a:t>tempo_contrato_meses_fim_ano</a:t>
+                        <a:t>share_maint_ano</a:t>
                       </a:r>
                     </a:p>
                   </a:txBody>
@@ -12226,7 +12226,7 @@
                             <a:srgbClr val="1C2433"/>
                           </a:solidFill>
                         </a:rPr>
-                        <a:t>share_maint_ano</a:t>
+                        <a:t>tempo_contrato_meses_inicio_ano</a:t>
                       </a:r>
                     </a:p>
                   </a:txBody>
@@ -12247,7 +12247,7 @@
                             <a:srgbClr val="1C2433"/>
                           </a:solidFill>
                         </a:rPr>
-                        <a:t>mantida (so explicativo)</a:t>
+                        <a:t>mantida</a:t>
                       </a:r>
                     </a:p>
                   </a:txBody>
@@ -12270,7 +12270,7 @@
                             <a:srgbClr val="1C2433"/>
                           </a:solidFill>
                         </a:rPr>
-                        <a:t>n_clientes_ano</a:t>
+                        <a:t>tempo_contrato_meses_fim_ano</a:t>
                       </a:r>
                     </a:p>
                   </a:txBody>
@@ -12314,7 +12314,7 @@
                             <a:srgbClr val="1C2433"/>
                           </a:solidFill>
                         </a:rPr>
-                        <a:t>trocou_contrato_ano</a:t>
+                        <a:t>n_clientes_ano</a:t>
                       </a:r>
                     </a:p>
                   </a:txBody>
@@ -12358,7 +12358,7 @@
                             <a:srgbClr val="1C2433"/>
                           </a:solidFill>
                         </a:rPr>
-                        <a:t>n_os_ano</a:t>
+                        <a:t>trocou_contrato_ano</a:t>
                       </a:r>
                     </a:p>
                   </a:txBody>
@@ -12379,7 +12379,7 @@
                             <a:srgbClr val="1C2433"/>
                           </a:solidFill>
                         </a:rPr>
-                        <a:t>removida</a:t>
+                        <a:t>mantida (so explicativo)</a:t>
                       </a:r>
                     </a:p>
                   </a:txBody>
@@ -12402,7 +12402,7 @@
                             <a:srgbClr val="1C2433"/>
                           </a:solidFill>
                         </a:rPr>
-                        <a:t>custo_medio_por_os_ano</a:t>
+                        <a:t>n_os_ano</a:t>
                       </a:r>
                     </a:p>
                   </a:txBody>
@@ -12423,7 +12423,7 @@
                             <a:srgbClr val="1C2433"/>
                           </a:solidFill>
                         </a:rPr>
-                        <a:t>removida</a:t>
+                        <a:t>ALVO Y2</a:t>
                       </a:r>
                     </a:p>
                   </a:txBody>
@@ -12446,7 +12446,7 @@
                             <a:srgbClr val="1C2433"/>
                           </a:solidFill>
                         </a:rPr>
-                        <a:t>descricao_carreta</a:t>
+                        <a:t>custo_medio_por_os_ano</a:t>
                       </a:r>
                     </a:p>
                   </a:txBody>
@@ -12467,7 +12467,7 @@
                             <a:srgbClr val="1C2433"/>
                           </a:solidFill>
                         </a:rPr>
-                        <a:t>removida</a:t>
+                        <a:t>ALVO Y3</a:t>
                       </a:r>
                     </a:p>
                   </a:txBody>
@@ -12490,7 +12490,7 @@
                             <a:srgbClr val="1C2433"/>
                           </a:solidFill>
                         </a:rPr>
-                        <a:t>ano_modelo</a:t>
+                        <a:t>descricao_carreta</a:t>
                       </a:r>
                     </a:p>
                   </a:txBody>
@@ -12511,7 +12511,7 @@
                             <a:srgbClr val="1C2433"/>
                           </a:solidFill>
                         </a:rPr>
-                        <a:t>condicional</a:t>
+                        <a:t>mantida (DUMMY)</a:t>
                       </a:r>
                     </a:p>
                   </a:txBody>
@@ -12534,7 +12534,7 @@
                             <a:srgbClr val="1C2433"/>
                           </a:solidFill>
                         </a:rPr>
-                        <a:t>idade_carreta</a:t>
+                        <a:t>unit_subtype</a:t>
                       </a:r>
                     </a:p>
                   </a:txBody>
@@ -12555,7 +12555,7 @@
                             <a:srgbClr val="1C2433"/>
                           </a:solidFill>
                         </a:rPr>
-                        <a:t>mantida</a:t>
+                        <a:t>mantida (DUMMY)</a:t>
                       </a:r>
                     </a:p>
                   </a:txBody>
@@ -12578,7 +12578,7 @@
                             <a:srgbClr val="1C2433"/>
                           </a:solidFill>
                         </a:rPr>
-                        <a:t>eixos</a:t>
+                        <a:t>flag_refrigerado</a:t>
                       </a:r>
                     </a:p>
                   </a:txBody>
@@ -12599,7 +12599,7 @@
                             <a:srgbClr val="1C2433"/>
                           </a:solidFill>
                         </a:rPr>
-                        <a:t>mantida</a:t>
+                        <a:t>mantida (DUMMY)</a:t>
                       </a:r>
                     </a:p>
                   </a:txBody>
@@ -12622,7 +12622,7 @@
                             <a:srgbClr val="1C2433"/>
                           </a:solidFill>
                         </a:rPr>
-                        <a:t>comprimento</a:t>
+                        <a:t>vmrs_predominante_ano</a:t>
                       </a:r>
                     </a:p>
                   </a:txBody>
@@ -12643,7 +12643,7 @@
                             <a:srgbClr val="1C2433"/>
                           </a:solidFill>
                         </a:rPr>
-                        <a:t>mantida</a:t>
+                        <a:t>mantida (DUMMY, so explicativo)</a:t>
                       </a:r>
                     </a:p>
                   </a:txBody>
@@ -12666,7 +12666,7 @@
                             <a:srgbClr val="1C2433"/>
                           </a:solidFill>
                         </a:rPr>
-                        <a:t>flag_refrigerado</a:t>
+                        <a:t>n_sistemas_vmrs_distintos_ano</a:t>
                       </a:r>
                     </a:p>
                   </a:txBody>
@@ -12687,7 +12687,7 @@
                             <a:srgbClr val="1C2433"/>
                           </a:solidFill>
                         </a:rPr>
-                        <a:t>mantida</a:t>
+                        <a:t>mantida (so explicativo)</a:t>
                       </a:r>
                     </a:p>
                   </a:txBody>
@@ -12780,7 +12780,7 @@
                             <a:srgbClr val="1C2433"/>
                           </a:solidFill>
                         </a:rPr>
-                        <a:t>unit_subtype</a:t>
+                        <a:t>vmrs_dist_media_5a</a:t>
                       </a:r>
                     </a:p>
                   </a:txBody>
@@ -12801,7 +12801,7 @@
                             <a:srgbClr val="1C2433"/>
                           </a:solidFill>
                         </a:rPr>
-                        <a:t>mantida</a:t>
+                        <a:t>mantida (preditivo)</a:t>
                       </a:r>
                     </a:p>
                   </a:txBody>
@@ -12824,7 +12824,7 @@
                             <a:srgbClr val="1C2433"/>
                           </a:solidFill>
                         </a:rPr>
-                        <a:t>tire_size</a:t>
+                        <a:t>km_rodado_ano</a:t>
                       </a:r>
                     </a:p>
                   </a:txBody>
@@ -12845,7 +12845,7 @@
                             <a:srgbClr val="1C2433"/>
                           </a:solidFill>
                         </a:rPr>
-                        <a:t>mantida</a:t>
+                        <a:t>mantida (so explicativo)</a:t>
                       </a:r>
                     </a:p>
                   </a:txBody>
@@ -12868,7 +12868,7 @@
                             <a:srgbClr val="1C2433"/>
                           </a:solidFill>
                         </a:rPr>
-                        <a:t>suspension_type</a:t>
+                        <a:t>km_acumulado_fim_ano</a:t>
                       </a:r>
                     </a:p>
                   </a:txBody>
@@ -12889,7 +12889,7 @@
                             <a:srgbClr val="1C2433"/>
                           </a:solidFill>
                         </a:rPr>
-                        <a:t>mantida</a:t>
+                        <a:t>explicativo / inicio_ano no preditivo</a:t>
                       </a:r>
                     </a:p>
                   </a:txBody>
@@ -12912,7 +12912,7 @@
                             <a:srgbClr val="1C2433"/>
                           </a:solidFill>
                         </a:rPr>
-                        <a:t>new_used_indicator</a:t>
+                        <a:t>n_os_ano_anterior</a:t>
                       </a:r>
                     </a:p>
                   </a:txBody>
@@ -12956,7 +12956,7 @@
                             <a:srgbClr val="1C2433"/>
                           </a:solidFill>
                         </a:rPr>
-                        <a:t>cod_montadora</a:t>
+                        <a:t>custo_ano_anterior</a:t>
                       </a:r>
                     </a:p>
                   </a:txBody>
@@ -13000,7 +13000,7 @@
                             <a:srgbClr val="1C2433"/>
                           </a:solidFill>
                         </a:rPr>
-                        <a:t>regiao_operacao</a:t>
+                        <a:t>n_os_acum_ate_ano_anterior</a:t>
                       </a:r>
                     </a:p>
                   </a:txBody>
@@ -13044,7 +13044,7 @@
                             <a:srgbClr val="1C2433"/>
                           </a:solidFill>
                         </a:rPr>
-                        <a:t>provincia_estado</a:t>
+                        <a:t>custo_acum_ate_ano_anterior</a:t>
                       </a:r>
                     </a:p>
                   </a:txBody>
@@ -13088,7 +13088,7 @@
                             <a:srgbClr val="1C2433"/>
                           </a:solidFill>
                         </a:rPr>
-                        <a:t>vmrs_predominante_ano</a:t>
+                        <a:t>anos_ativo_ate_ano_anterior</a:t>
                       </a:r>
                     </a:p>
                   </a:txBody>
@@ -13109,7 +13109,7 @@
                             <a:srgbClr val="1C2433"/>
                           </a:solidFill>
                         </a:rPr>
-                        <a:t>mantida (so explicativo)</a:t>
+                        <a:t>mantida</a:t>
                       </a:r>
                     </a:p>
                   </a:txBody>
@@ -13132,7 +13132,7 @@
                             <a:srgbClr val="1C2433"/>
                           </a:solidFill>
                         </a:rPr>
-                        <a:t>km_rodado_ano</a:t>
+                        <a:t>idade_carreta</a:t>
                       </a:r>
                     </a:p>
                   </a:txBody>
@@ -13153,7 +13153,7 @@
                             <a:srgbClr val="1C2433"/>
                           </a:solidFill>
                         </a:rPr>
-                        <a:t>mantida (so explicativo)</a:t>
+                        <a:t>mantida</a:t>
                       </a:r>
                     </a:p>
                   </a:txBody>
@@ -13176,7 +13176,7 @@
                             <a:srgbClr val="1C2433"/>
                           </a:solidFill>
                         </a:rPr>
-                        <a:t>n_sistemas_vmrs_distintos_ano</a:t>
+                        <a:t>eixos</a:t>
                       </a:r>
                     </a:p>
                   </a:txBody>
@@ -13197,7 +13197,7 @@
                             <a:srgbClr val="1C2433"/>
                           </a:solidFill>
                         </a:rPr>
-                        <a:t>mantida (so explicativo)</a:t>
+                        <a:t>mantida</a:t>
                       </a:r>
                     </a:p>
                   </a:txBody>
@@ -13220,7 +13220,7 @@
                             <a:srgbClr val="1C2433"/>
                           </a:solidFill>
                         </a:rPr>
-                        <a:t>share_pm_ano</a:t>
+                        <a:t>regiao_operacao</a:t>
                       </a:r>
                     </a:p>
                   </a:txBody>
@@ -13241,7 +13241,7 @@
                             <a:srgbClr val="1C2433"/>
                           </a:solidFill>
                         </a:rPr>
-                        <a:t>mantida (so explicativo)</a:t>
+                        <a:t>removida</a:t>
                       </a:r>
                     </a:p>
                   </a:txBody>
@@ -13264,7 +13264,7 @@
                             <a:srgbClr val="1C2433"/>
                           </a:solidFill>
                         </a:rPr>
-                        <a:t>km_acumulado_fim_ano</a:t>
+                        <a:t>provincia_estado</a:t>
                       </a:r>
                     </a:p>
                   </a:txBody>
@@ -13285,7 +13285,7 @@
                             <a:srgbClr val="1C2433"/>
                           </a:solidFill>
                         </a:rPr>
-                        <a:t>explicativo / inicio_ano no preditivo</a:t>
+                        <a:t>removida</a:t>
                       </a:r>
                     </a:p>
                   </a:txBody>
@@ -13308,7 +13308,7 @@
                             <a:srgbClr val="1C2433"/>
                           </a:solidFill>
                         </a:rPr>
-                        <a:t>n_os_ano_anterior</a:t>
+                        <a:t>cod_montadora</a:t>
                       </a:r>
                     </a:p>
                   </a:txBody>
@@ -13329,7 +13329,7 @@
                             <a:srgbClr val="1C2433"/>
                           </a:solidFill>
                         </a:rPr>
-                        <a:t>mantida</a:t>
+                        <a:t>removida</a:t>
                       </a:r>
                     </a:p>
                   </a:txBody>
@@ -13352,7 +13352,7 @@
                             <a:srgbClr val="1C2433"/>
                           </a:solidFill>
                         </a:rPr>
-                        <a:t>custo_ano_anterior</a:t>
+                        <a:t>suspension_type</a:t>
                       </a:r>
                     </a:p>
                   </a:txBody>
@@ -13373,7 +13373,7 @@
                             <a:srgbClr val="1C2433"/>
                           </a:solidFill>
                         </a:rPr>
-                        <a:t>mantida</a:t>
+                        <a:t>removida</a:t>
                       </a:r>
                     </a:p>
                   </a:txBody>
@@ -13396,7 +13396,7 @@
                             <a:srgbClr val="1C2433"/>
                           </a:solidFill>
                         </a:rPr>
-                        <a:t>n_os_acum_ate_ano_anterior</a:t>
+                        <a:t>new_used_indicator</a:t>
                       </a:r>
                     </a:p>
                   </a:txBody>
@@ -13417,7 +13417,7 @@
                             <a:srgbClr val="1C2433"/>
                           </a:solidFill>
                         </a:rPr>
-                        <a:t>mantida</a:t>
+                        <a:t>removida</a:t>
                       </a:r>
                     </a:p>
                   </a:txBody>
@@ -13440,7 +13440,7 @@
                             <a:srgbClr val="1C2433"/>
                           </a:solidFill>
                         </a:rPr>
-                        <a:t>custo_acum_ate_ano_anterior</a:t>
+                        <a:t>tire_size</a:t>
                       </a:r>
                     </a:p>
                   </a:txBody>
@@ -13461,7 +13461,7 @@
                             <a:srgbClr val="1C2433"/>
                           </a:solidFill>
                         </a:rPr>
-                        <a:t>mantida</a:t>
+                        <a:t>removida (PENDENTE)</a:t>
                       </a:r>
                     </a:p>
                   </a:txBody>
@@ -13484,7 +13484,7 @@
                             <a:srgbClr val="1C2433"/>
                           </a:solidFill>
                         </a:rPr>
-                        <a:t>anos_ativo_ate_ano_anterior</a:t>
+                        <a:t>ano_modelo</a:t>
                       </a:r>
                     </a:p>
                   </a:txBody>
@@ -13505,7 +13505,7 @@
                             <a:srgbClr val="1C2433"/>
                           </a:solidFill>
                         </a:rPr>
-                        <a:t>mantida</a:t>
+                        <a:t>removida</a:t>
                       </a:r>
                     </a:p>
                   </a:txBody>
@@ -13845,7 +13845,7 @@
                 </a:solidFill>
                 <a:latin typeface="Calibri"/>
               </a:rPr>
-              <a:t>•  Populacao: contrato com manutencao inclusa (MAINT), aplicada como flag — o cenario sem filtro e mantido como baseline.</a:t>
+              <a:t>•  Populacao: frota completa (D7, 2026-09-02) — o recorte MAINT deixou de definir a amostra e virou cenario de comparacao.</a:t>
             </a:r>
           </a:p>
           <a:p>
@@ -13861,7 +13861,23 @@
                 </a:solidFill>
                 <a:latin typeface="Calibri"/>
               </a:rPr>
-              <a:t>•  Tres configuracoes comparadas para separar o efeito do filtro MAINT do efeito das variaveis de contrato.</a:t>
+              <a:t>•  Tres configuracoes comparadas: sem contrato, com contrato e restrita a MAINT — separam o efeito das variaveis do efeito da populacao.</a:t>
+            </a:r>
+          </a:p>
+          <a:p>
+            <a:pPr>
+              <a:spcAft>
+                <a:spcPts val="600"/>
+              </a:spcAft>
+            </a:pPr>
+            <a:r>
+              <a:rPr sz="1600">
+                <a:solidFill>
+                  <a:srgbClr val="1C2433"/>
+                </a:solidFill>
+                <a:latin typeface="Calibri"/>
+              </a:rPr>
+              <a:t>•  Alvo decomposto (D8): alem do modelo direto de Y1, prevemos n de OS e custo medio por OS e reconstituimos Y1 = Y2 x Y3.</a:t>
             </a:r>
           </a:p>
           <a:p>
@@ -14244,7 +14260,7 @@
                             <a:srgbClr val="1C2433"/>
                           </a:solidFill>
                         </a:rPr>
-                        <a:t>0.0356</a:t>
+                        <a:t>-0.1149</a:t>
                       </a:r>
                     </a:p>
                   </a:txBody>
@@ -14265,7 +14281,7 @@
                             <a:srgbClr val="1C2433"/>
                           </a:solidFill>
                         </a:rPr>
-                        <a:t>2663.4</a:t>
+                        <a:t>2838.7</a:t>
                       </a:r>
                     </a:p>
                   </a:txBody>
@@ -14286,7 +14302,7 @@
                             <a:srgbClr val="1C2433"/>
                           </a:solidFill>
                         </a:rPr>
-                        <a:t>1165.5</a:t>
+                        <a:t>1191.9</a:t>
                       </a:r>
                     </a:p>
                   </a:txBody>
@@ -14351,7 +14367,7 @@
                             <a:srgbClr val="1C2433"/>
                           </a:solidFill>
                         </a:rPr>
-                        <a:t>0.0256</a:t>
+                        <a:t>-0.1179</a:t>
                       </a:r>
                     </a:p>
                   </a:txBody>
@@ -14372,7 +14388,7 @@
                             <a:srgbClr val="1C2433"/>
                           </a:solidFill>
                         </a:rPr>
-                        <a:t>2677.2</a:t>
+                        <a:t>2842.6</a:t>
                       </a:r>
                     </a:p>
                   </a:txBody>
@@ -14393,7 +14409,7 @@
                             <a:srgbClr val="1C2433"/>
                           </a:solidFill>
                         </a:rPr>
-                        <a:t>1166.9</a:t>
+                        <a:t>1193.4</a:t>
                       </a:r>
                     </a:p>
                   </a:txBody>
@@ -14458,7 +14474,7 @@
                             <a:srgbClr val="1C2433"/>
                           </a:solidFill>
                         </a:rPr>
-                        <a:t>0.5315</a:t>
+                        <a:t>0.5099</a:t>
                       </a:r>
                     </a:p>
                   </a:txBody>
@@ -14479,7 +14495,7 @@
                             <a:srgbClr val="1C2433"/>
                           </a:solidFill>
                         </a:rPr>
-                        <a:t>1856.5</a:t>
+                        <a:t>1882.1</a:t>
                       </a:r>
                     </a:p>
                   </a:txBody>
@@ -14500,7 +14516,7 @@
                             <a:srgbClr val="1C2433"/>
                           </a:solidFill>
                         </a:rPr>
-                        <a:t>959.8</a:t>
+                        <a:t>958.0</a:t>
                       </a:r>
                     </a:p>
                   </a:txBody>
@@ -14565,7 +14581,7 @@
                             <a:srgbClr val="1C2433"/>
                           </a:solidFill>
                         </a:rPr>
-                        <a:t>0.5734</a:t>
+                        <a:t>0.5654</a:t>
                       </a:r>
                     </a:p>
                   </a:txBody>
@@ -14586,7 +14602,7 @@
                             <a:srgbClr val="1C2433"/>
                           </a:solidFill>
                         </a:rPr>
-                        <a:t>1771.5</a:t>
+                        <a:t>1772.5</a:t>
                       </a:r>
                     </a:p>
                   </a:txBody>
@@ -14607,7 +14623,7 @@
                             <a:srgbClr val="1C2433"/>
                           </a:solidFill>
                         </a:rPr>
-                        <a:t>915.5</a:t>
+                        <a:t>907.0</a:t>
                       </a:r>
                     </a:p>
                   </a:txBody>
@@ -14672,7 +14688,7 @@
                             <a:srgbClr val="1C2433"/>
                           </a:solidFill>
                         </a:rPr>
-                        <a:t>0.5854</a:t>
+                        <a:t>0.5776</a:t>
                       </a:r>
                     </a:p>
                   </a:txBody>
@@ -14693,7 +14709,7 @@
                             <a:srgbClr val="1C2433"/>
                           </a:solidFill>
                         </a:rPr>
-                        <a:t>1746.4</a:t>
+                        <a:t>1747.4</a:t>
                       </a:r>
                     </a:p>
                   </a:txBody>
@@ -14714,7 +14730,7 @@
                             <a:srgbClr val="1C2433"/>
                           </a:solidFill>
                         </a:rPr>
-                        <a:t>907.5</a:t>
+                        <a:t>912.5</a:t>
                       </a:r>
                     </a:p>
                   </a:txBody>
@@ -14779,7 +14795,7 @@
                             <a:srgbClr val="1C2433"/>
                           </a:solidFill>
                         </a:rPr>
-                        <a:t>0.5289</a:t>
+                        <a:t>0.5198</a:t>
                       </a:r>
                     </a:p>
                   </a:txBody>
@@ -14800,7 +14816,7 @@
                             <a:srgbClr val="1C2433"/>
                           </a:solidFill>
                         </a:rPr>
-                        <a:t>1861.6</a:t>
+                        <a:t>1863.1</a:t>
                       </a:r>
                     </a:p>
                   </a:txBody>
@@ -14821,7 +14837,7 @@
                             <a:srgbClr val="1C2433"/>
                           </a:solidFill>
                         </a:rPr>
-                        <a:t>986.1</a:t>
+                        <a:t>958.2</a:t>
                       </a:r>
                     </a:p>
                   </a:txBody>
@@ -14886,7 +14902,7 @@
                             <a:srgbClr val="1C2433"/>
                           </a:solidFill>
                         </a:rPr>
-                        <a:t>0.3876</a:t>
+                        <a:t>-9.7209</a:t>
                       </a:r>
                     </a:p>
                   </a:txBody>
@@ -14907,7 +14923,7 @@
                             <a:srgbClr val="1C2433"/>
                           </a:solidFill>
                         </a:rPr>
-                        <a:t>2122.4</a:t>
+                        <a:t>8802.9</a:t>
                       </a:r>
                     </a:p>
                   </a:txBody>
@@ -14928,7 +14944,7 @@
                             <a:srgbClr val="1C2433"/>
                           </a:solidFill>
                         </a:rPr>
-                        <a:t>1079.1</a:t>
+                        <a:t>1696.6</a:t>
                       </a:r>
                     </a:p>
                   </a:txBody>
@@ -14993,7 +15009,7 @@
                             <a:srgbClr val="1C2433"/>
                           </a:solidFill>
                         </a:rPr>
-                        <a:t>0.2719</a:t>
+                        <a:t>0.3118</a:t>
                       </a:r>
                     </a:p>
                   </a:txBody>
@@ -15014,7 +15030,7 @@
                             <a:srgbClr val="1C2433"/>
                           </a:solidFill>
                         </a:rPr>
-                        <a:t>2314.2</a:t>
+                        <a:t>2230.4</a:t>
                       </a:r>
                     </a:p>
                   </a:txBody>
@@ -15035,7 +15051,7 @@
                             <a:srgbClr val="1C2433"/>
                           </a:solidFill>
                         </a:rPr>
-                        <a:t>1202.0</a:t>
+                        <a:t>1183.1</a:t>
                       </a:r>
                     </a:p>
                   </a:txBody>
@@ -15100,7 +15116,7 @@
                             <a:srgbClr val="1C2433"/>
                           </a:solidFill>
                         </a:rPr>
-                        <a:t>0.2665</a:t>
+                        <a:t>0.3148</a:t>
                       </a:r>
                     </a:p>
                   </a:txBody>
@@ -15121,7 +15137,7 @@
                             <a:srgbClr val="1C2433"/>
                           </a:solidFill>
                         </a:rPr>
-                        <a:t>2322.8</a:t>
+                        <a:t>2225.5</a:t>
                       </a:r>
                     </a:p>
                   </a:txBody>
@@ -15142,7 +15158,7 @@
                             <a:srgbClr val="1C2433"/>
                           </a:solidFill>
                         </a:rPr>
-                        <a:t>1202.7</a:t>
+                        <a:t>1181.9</a:t>
                       </a:r>
                     </a:p>
                   </a:txBody>
@@ -15207,7 +15223,7 @@
                             <a:srgbClr val="1C2433"/>
                           </a:solidFill>
                         </a:rPr>
-                        <a:t>0.4124</a:t>
+                        <a:t>0.3944</a:t>
                       </a:r>
                     </a:p>
                   </a:txBody>
@@ -15228,7 +15244,7 @@
                             <a:srgbClr val="1C2433"/>
                           </a:solidFill>
                         </a:rPr>
-                        <a:t>2079.1</a:t>
+                        <a:t>2092.2</a:t>
                       </a:r>
                     </a:p>
                   </a:txBody>
@@ -15249,7 +15265,7 @@
                             <a:srgbClr val="1C2433"/>
                           </a:solidFill>
                         </a:rPr>
-                        <a:t>1128.2</a:t>
+                        <a:t>1128.6</a:t>
                       </a:r>
                     </a:p>
                   </a:txBody>
@@ -15314,7 +15330,7 @@
                             <a:srgbClr val="1C2433"/>
                           </a:solidFill>
                         </a:rPr>
-                        <a:t>0.4486</a:t>
+                        <a:t>0.4359</a:t>
                       </a:r>
                     </a:p>
                   </a:txBody>
@@ -15335,7 +15351,7 @@
                             <a:srgbClr val="1C2433"/>
                           </a:solidFill>
                         </a:rPr>
-                        <a:t>2013.9</a:t>
+                        <a:t>2019.3</a:t>
                       </a:r>
                     </a:p>
                   </a:txBody>
@@ -15356,7 +15372,7 @@
                             <a:srgbClr val="1C2433"/>
                           </a:solidFill>
                         </a:rPr>
-                        <a:t>1088.6</a:t>
+                        <a:t>1069.3</a:t>
                       </a:r>
                     </a:p>
                   </a:txBody>
@@ -15421,7 +15437,7 @@
                             <a:srgbClr val="1C2433"/>
                           </a:solidFill>
                         </a:rPr>
-                        <a:t>0.4549</a:t>
+                        <a:t>0.4418</a:t>
                       </a:r>
                     </a:p>
                   </a:txBody>
@@ -15442,7 +15458,7 @@
                             <a:srgbClr val="1C2433"/>
                           </a:solidFill>
                         </a:rPr>
-                        <a:t>2002.4</a:t>
+                        <a:t>2008.7</a:t>
                       </a:r>
                     </a:p>
                   </a:txBody>
@@ -15463,7 +15479,7 @@
                             <a:srgbClr val="1C2433"/>
                           </a:solidFill>
                         </a:rPr>
-                        <a:t>1092.7</a:t>
+                        <a:t>1074.3</a:t>
                       </a:r>
                     </a:p>
                   </a:txBody>
@@ -15528,7 +15544,7 @@
                             <a:srgbClr val="1C2433"/>
                           </a:solidFill>
                         </a:rPr>
-                        <a:t>0.4487</a:t>
+                        <a:t>0.4317</a:t>
                       </a:r>
                     </a:p>
                   </a:txBody>
@@ -15549,7 +15565,7 @@
                             <a:srgbClr val="1C2433"/>
                           </a:solidFill>
                         </a:rPr>
-                        <a:t>2013.8</a:t>
+                        <a:t>2026.8</a:t>
                       </a:r>
                     </a:p>
                   </a:txBody>
@@ -15570,7 +15586,7 @@
                             <a:srgbClr val="1C2433"/>
                           </a:solidFill>
                         </a:rPr>
-                        <a:t>1099.0</a:t>
+                        <a:t>1080.4</a:t>
                       </a:r>
                     </a:p>
                   </a:txBody>
@@ -15635,7 +15651,7 @@
                             <a:srgbClr val="1C2433"/>
                           </a:solidFill>
                         </a:rPr>
-                        <a:t>0.2723</a:t>
+                        <a:t>-46170.7899</a:t>
                       </a:r>
                     </a:p>
                   </a:txBody>
@@ -15656,7 +15672,7 @@
                             <a:srgbClr val="1C2433"/>
                           </a:solidFill>
                         </a:rPr>
-                        <a:t>2313.6</a:t>
+                        <a:t>577691.3</a:t>
                       </a:r>
                     </a:p>
                   </a:txBody>
@@ -15677,7 +15693,7 @@
                             <a:srgbClr val="1C2433"/>
                           </a:solidFill>
                         </a:rPr>
-                        <a:t>1258.1</a:t>
+                        <a:t>7572.7</a:t>
                       </a:r>
                     </a:p>
                   </a:txBody>
@@ -15742,7 +15758,7 @@
                 </a:solidFill>
                 <a:latin typeface="Calibri"/>
               </a:rPr>
-              <a:t>•  R² = 0.4549 · RMSE = 2002.4</a:t>
+              <a:t>•  R² = 0.4418 · RMSE = 2008.7</a:t>
             </a:r>
           </a:p>
           <a:p>
@@ -15758,7 +15774,7 @@
                 </a:solidFill>
                 <a:latin typeface="Calibri"/>
               </a:rPr>
-              <a:t>•  MAE = 1092.7 CAD/ano</a:t>
+              <a:t>•  MAE = 1074.3 CAD/ano</a:t>
             </a:r>
           </a:p>
           <a:p>
@@ -15774,7 +15790,7 @@
                 </a:solidFill>
                 <a:latin typeface="Calibri"/>
               </a:rPr>
-              <a:t>•  Explicativo (melhor): R² = 0.5854</a:t>
+              <a:t>•  Explicativo (melhor): R² = 0.5776</a:t>
             </a:r>
           </a:p>
           <a:p>
@@ -15806,7 +15822,7 @@
                 </a:solidFill>
                 <a:latin typeface="Calibri"/>
               </a:rPr>
-              <a:t>•  Efeito do filtro MAINT: +0.0193 de R².</a:t>
+              <a:t>•  Efeito das variaveis de contrato: +0.0359 de R².</a:t>
             </a:r>
           </a:p>
           <a:p>
@@ -15822,7 +15838,23 @@
                 </a:solidFill>
                 <a:latin typeface="Calibri"/>
               </a:rPr>
-              <a:t>•  Efeito das variaveis de contrato: +0.0033 de R² — praticamente nulo.</a:t>
+              <a:t>•  Efeito de restringir a populacao a MAINT: +0.0017 de R² — por isso a base completa foi adotada.</a:t>
+            </a:r>
+          </a:p>
+          <a:p>
+            <a:pPr>
+              <a:spcAft>
+                <a:spcPts val="600"/>
+              </a:spcAft>
+            </a:pPr>
+            <a:r>
+              <a:rPr sz="1300">
+                <a:solidFill>
+                  <a:srgbClr val="1C2433"/>
+                </a:solidFill>
+                <a:latin typeface="Calibri"/>
+              </a:rPr>
+              <a:t>•  Alvo decomposto (Y2 x Y3): R² = 0.4713 (+0.0295 vs direto).</a:t>
             </a:r>
           </a:p>
         </p:txBody>
@@ -16869,7 +16901,7 @@
                             <a:srgbClr val="1C2433"/>
                           </a:solidFill>
                         </a:rPr>
-                        <a:t>0.1692510524300573</a:t>
+                        <a:t>0.2088727843005763</a:t>
                       </a:r>
                     </a:p>
                   </a:txBody>
@@ -16892,7 +16924,7 @@
                             <a:srgbClr val="1C2433"/>
                           </a:solidFill>
                         </a:rPr>
-                        <a:t>n_os_ano_anterior</a:t>
+                        <a:t>custo_acum_ate_ano_anterior</a:t>
                       </a:r>
                     </a:p>
                   </a:txBody>
@@ -16913,7 +16945,7 @@
                             <a:srgbClr val="1C2433"/>
                           </a:solidFill>
                         </a:rPr>
-                        <a:t>0.0966781125569682</a:t>
+                        <a:t>0.100241863506034</a:t>
                       </a:r>
                     </a:p>
                   </a:txBody>
@@ -16936,7 +16968,7 @@
                             <a:srgbClr val="1C2433"/>
                           </a:solidFill>
                         </a:rPr>
-                        <a:t>custo_acum_ate_ano_anterior</a:t>
+                        <a:t>n_os_ano_anterior</a:t>
                       </a:r>
                     </a:p>
                   </a:txBody>
@@ -16957,7 +16989,7 @@
                             <a:srgbClr val="1C2433"/>
                           </a:solidFill>
                         </a:rPr>
-                        <a:t>0.080441886778797</a:t>
+                        <a:t>0.092318332170151</a:t>
                       </a:r>
                     </a:p>
                   </a:txBody>
@@ -16980,7 +17012,7 @@
                             <a:srgbClr val="1C2433"/>
                           </a:solidFill>
                         </a:rPr>
-                        <a:t>km_acumulado_inicio_ano</a:t>
+                        <a:t>tipo_manutencao_ano</a:t>
                       </a:r>
                     </a:p>
                   </a:txBody>
@@ -17001,7 +17033,7 @@
                             <a:srgbClr val="1C2433"/>
                           </a:solidFill>
                         </a:rPr>
-                        <a:t>0.0790806776968799</a:t>
+                        <a:t>0.0583232741755356</a:t>
                       </a:r>
                     </a:p>
                   </a:txBody>
@@ -17024,7 +17056,7 @@
                             <a:srgbClr val="1C2433"/>
                           </a:solidFill>
                         </a:rPr>
-                        <a:t>unit_subtype</a:t>
+                        <a:t>km_acumulado_inicio_ano</a:t>
                       </a:r>
                     </a:p>
                   </a:txBody>
@@ -17045,7 +17077,7 @@
                             <a:srgbClr val="1C2433"/>
                           </a:solidFill>
                         </a:rPr>
-                        <a:t>0.0573575093548561</a:t>
+                        <a:t>0.0559581571074708</a:t>
                       </a:r>
                     </a:p>
                   </a:txBody>
@@ -17068,7 +17100,7 @@
                             <a:srgbClr val="1C2433"/>
                           </a:solidFill>
                         </a:rPr>
-                        <a:t>n_os_acum_ate_ano_anterior</a:t>
+                        <a:t>idade_carreta</a:t>
                       </a:r>
                     </a:p>
                   </a:txBody>
@@ -17089,7 +17121,7 @@
                             <a:srgbClr val="1C2433"/>
                           </a:solidFill>
                         </a:rPr>
-                        <a:t>0.0400249967014216</a:t>
+                        <a:t>0.0393024070457087</a:t>
                       </a:r>
                     </a:p>
                   </a:txBody>
@@ -17112,7 +17144,7 @@
                             <a:srgbClr val="1C2433"/>
                           </a:solidFill>
                         </a:rPr>
-                        <a:t>comprimento</a:t>
+                        <a:t>descricao_carreta</a:t>
                       </a:r>
                     </a:p>
                   </a:txBody>
@@ -17133,7 +17165,7 @@
                             <a:srgbClr val="1C2433"/>
                           </a:solidFill>
                         </a:rPr>
-                        <a:t>0.039470122927394</a:t>
+                        <a:t>0.0388635397835509</a:t>
                       </a:r>
                     </a:p>
                   </a:txBody>
@@ -17156,7 +17188,7 @@
                             <a:srgbClr val="1C2433"/>
                           </a:solidFill>
                         </a:rPr>
-                        <a:t>provincia_estado</a:t>
+                        <a:t>n_os_acum_ate_ano_anterior</a:t>
                       </a:r>
                     </a:p>
                   </a:txBody>
@@ -17177,7 +17209,7 @@
                             <a:srgbClr val="1C2433"/>
                           </a:solidFill>
                         </a:rPr>
-                        <a:t>0.0366753003826876</a:t>
+                        <a:t>0.0338426853863409</a:t>
                       </a:r>
                     </a:p>
                   </a:txBody>
@@ -17418,7 +17450,7 @@
                 </a:solidFill>
                 <a:latin typeface="Calibri"/>
               </a:rPr>
-              <a:t>•  Refrigeracao e o fator estrutural mais forte; subtipo e montadora tambem separam custos.</a:t>
+              <a:t>•  Descricao/subtipo da carreta e refrigeracao sao os fatores estruturais mais fortes (eta 0,59 / 0,54 / 0,42).</a:t>
             </a:r>
           </a:p>
           <a:p>
@@ -17482,7 +17514,7 @@
                 </a:solidFill>
                 <a:latin typeface="Calibri"/>
               </a:rPr>
-              <a:t>•  Contrato (H6): efeito fraco. A duracao de contrato quase nao acrescenta poder preditivo, e o tipo contratual separa pouco os custos — hipotese testada, nao assumida.</a:t>
+              <a:t>•  Contrato (H6b/H7): efeito fraco. A duracao quase nao ordena o custo (rho 0,12–0,14) e o tipo contratual separa pouco (eta 0,18) — hipotese testada, nao assumida.</a:t>
             </a:r>
           </a:p>
           <a:p>
@@ -17498,7 +17530,23 @@
                 </a:solidFill>
                 <a:latin typeface="Calibri"/>
               </a:rPr>
-              <a:t>•  O modelo preditivo (R² ≈ 0.4549) e util para orcamento e priorizacao de frota.</a:t>
+              <a:t>•  Geografia (H5) saiu do modelo na curadoria de 2026-09-02: regiao eta 0,08 e provincia eta 0,14 nao sustentam a hipotese.</a:t>
+            </a:r>
+          </a:p>
+          <a:p>
+            <a:pPr>
+              <a:spcAft>
+                <a:spcPts val="600"/>
+              </a:spcAft>
+            </a:pPr>
+            <a:r>
+              <a:rPr sz="1500">
+                <a:solidFill>
+                  <a:srgbClr val="1C2433"/>
+                </a:solidFill>
+                <a:latin typeface="Calibri"/>
+              </a:rPr>
+              <a:t>•  O modelo preditivo (R² ≈ 0.4418) e util para orcamento e priorizacao de frota.</a:t>
             </a:r>
           </a:p>
         </p:txBody>
@@ -17729,7 +17777,7 @@
                 </a:solidFill>
                 <a:latin typeface="Calibri"/>
               </a:rPr>
-              <a:t>•  Populacao restrita a MAINT: o ganho de R² do filtro reflete amostra mais homogenea, nao melhora de previsao.</a:t>
+              <a:t>•  Y mudou de definicao ao adotar a frota completa (D7): os numeros das entregas anteriores, calculados sobre o recorte MAINT, nao sao comparaveis.</a:t>
             </a:r>
           </a:p>
           <a:p>
@@ -17793,7 +17841,23 @@
                 </a:solidFill>
                 <a:latin typeface="Calibri"/>
               </a:rPr>
-              <a:t>•  Provincia parcial (~54%); regiao usada como proxy geografica.</a:t>
+              <a:t>•  Geografia retirada do modelo (H5 encerrada); permanece disponivel apenas para analise descritiva.</a:t>
+            </a:r>
+          </a:p>
+          <a:p>
+            <a:pPr>
+              <a:spcAft>
+                <a:spcPts val="600"/>
+              </a:spcAft>
+            </a:pPr>
+            <a:r>
+              <a:rPr sz="1500">
+                <a:solidFill>
+                  <a:srgbClr val="1C2433"/>
+                </a:solidFill>
+                <a:latin typeface="Calibri"/>
+              </a:rPr>
+              <a:t>•  id_carreta como one-hot (9.584 colunas) foi gerado por decisao do Grupo, com ressalva registrada: memoriza o ativo em vez de explicar o custo.</a:t>
             </a:r>
           </a:p>
           <a:p>
@@ -18147,7 +18211,7 @@
                 </a:solidFill>
                 <a:latin typeface="Calibri"/>
               </a:rPr>
-              <a:t>Sobre a base unica reextraida (29 colunas), em CAD corrigidos pelo CPI do Canada e no grao carreta x ano, o custo anual real e explicado sobretudo por refrigeracao, historico de manutencao e uso. As variaveis de contrato, incorporadas nesta fase, foram testadas e mostraram efeito fraco — resultado que decorre de teste, nao de suposicao.</a:t>
+              <a:t>Sobre a base unica reextraida (29 colunas), em CAD corrigidos pelo CPI do Canada e no grao carreta x ano, o custo anual real e explicado sobretudo por refrigeracao, historico de manutencao e uso. As variaveis de contrato, incorporadas nesta fase, foram testadas e mostraram efeito fraco — resultado que decorre de teste, nao de suposicao. A previsao para 2026 usa o caminho decomposto (Y1 = n de OS x custo medio por OS), que superou o modelo direto no teste de 2025.</a:t>
             </a:r>
           </a:p>
         </p:txBody>
@@ -19138,7 +19202,7 @@
                             <a:srgbClr val="1C2433"/>
                           </a:solidFill>
                         </a:rPr>
-                        <a:t>Nao suportada (efeito direto fraco)</a:t>
+                        <a:t>Não suportada (efeito direto fraco)</a:t>
                       </a:r>
                     </a:p>
                   </a:txBody>
@@ -19247,7 +19311,7 @@
                             <a:srgbClr val="1C2433"/>
                           </a:solidFill>
                         </a:rPr>
-                        <a:t>Historico de manutencao preve o custo futuro</a:t>
+                        <a:t>Histórico de manutenção prevê o custo futuro</a:t>
                       </a:r>
                     </a:p>
                   </a:txBody>
@@ -19312,7 +19376,7 @@
                             <a:srgbClr val="1C2433"/>
                           </a:solidFill>
                         </a:rPr>
-                        <a:t>Caracteristicas do ativo influenciam o custo</a:t>
+                        <a:t>Características do ativo influenciam o custo</a:t>
                       </a:r>
                     </a:p>
                   </a:txBody>
@@ -19377,7 +19441,7 @@
                             <a:srgbClr val="1C2433"/>
                           </a:solidFill>
                         </a:rPr>
-                        <a:t>Regiao/operacao influencia o custo</a:t>
+                        <a:t>Região/operação influencia o custo</a:t>
                       </a:r>
                     </a:p>
                   </a:txBody>
@@ -19398,7 +19462,7 @@
                             <a:srgbClr val="1C2433"/>
                           </a:solidFill>
                         </a:rPr>
-                        <a:t>Parcial (efeito fraco)</a:t>
+                        <a:t>Não suportada (fora do modelo desde 2026-09-02)</a:t>
                       </a:r>
                     </a:p>
                   </a:txBody>
@@ -19421,7 +19485,7 @@
                             <a:srgbClr val="1C2433"/>
                           </a:solidFill>
                         </a:rPr>
-                        <a:t>H6a</a:t>
+                        <a:t>H6b</a:t>
                       </a:r>
                     </a:p>
                   </a:txBody>
@@ -19442,7 +19506,7 @@
                             <a:srgbClr val="1C2433"/>
                           </a:solidFill>
                         </a:rPr>
-                        <a:t>Duracao do contrato influencia o custo anual</a:t>
+                        <a:t>Tipo de manutenção contratual (MAINT/NET/MIX) influencia o custo anual</a:t>
                       </a:r>
                     </a:p>
                   </a:txBody>
@@ -19486,7 +19550,7 @@
                             <a:srgbClr val="1C2433"/>
                           </a:solidFill>
                         </a:rPr>
-                        <a:t>H6b</a:t>
+                        <a:t>H7</a:t>
                       </a:r>
                     </a:p>
                   </a:txBody>
@@ -19507,7 +19571,7 @@
                             <a:srgbClr val="1C2433"/>
                           </a:solidFill>
                         </a:rPr>
-                        <a:t>Tipo de manutencao contratual (MAINT/NET/MIX) influencia o custo anual</a:t>
+                        <a:t>Tempo de contrato até o reparo influencia o custo anual</a:t>
                       </a:r>
                     </a:p>
                   </a:txBody>
